--- a/slides/EE5180_endterm_slides.pptx
+++ b/slides/EE5180_endterm_slides.pptx
@@ -2657,7 +2657,7 @@
                 <a:ea typeface="Cambria" pitchFamily="34" charset="-122"/>
                 <a:cs typeface="Cambria" pitchFamily="34" charset="-120"/>
               </a:rPr>
-              <a:t>17.77</a:t>
+              <a:t>4.88</a:t>
             </a:r>
             <a:endParaRPr lang="en-US" sz="3600" dirty="0"/>
           </a:p>
@@ -2779,7 +2779,7 @@
                 <a:ea typeface="Cambria" pitchFamily="34" charset="-122"/>
                 <a:cs typeface="Cambria" pitchFamily="34" charset="-120"/>
               </a:rPr>
-              <a:t>0.03</a:t>
+              <a:t>0.00</a:t>
             </a:r>
             <a:endParaRPr lang="en-US" sz="3600" dirty="0"/>
           </a:p>
@@ -3196,43 +3196,846 @@
           </a:p>
         </p:txBody>
       </p:sp>
-      <p:sp>
-        <p:nvSpPr>
-          <p:cNvPr id="4" name="Shape 2"/>
-          <p:cNvSpPr/>
+      <p:graphicFrame>
+        <p:nvGraphicFramePr>
+          <p:cNvPr id="12" name="Table 0"/>
+          <p:cNvGraphicFramePr>
+            <a:graphicFrameLocks noGrp="1"/>
+          </p:cNvGraphicFramePr>
+          <p:nvPr>
+            <p:extLst>
+              <p:ext uri="{D42A27DB-BD31-4B8C-83A1-F6EECF244321}">
+                <p14:modId xmlns:p14="http://schemas.microsoft.com/office/powerpoint/2010/main" val="1579011935"/>
+              </p:ext>
+            </p:extLst>
+          </p:nvPr>
+        </p:nvGraphicFramePr>
+        <p:xfrm>
+          <a:off x="548640" y="1572768"/>
+          <a:ext cx="11064240" cy="914400"/>
+        </p:xfrm>
+        <a:graphic>
+          <a:graphicData uri="http://schemas.openxmlformats.org/drawingml/2006/table">
+            <a:tbl>
+              <a:tblPr/>
+              <a:tblGrid>
+                <a:gridCol w="5120640"/>
+                <a:gridCol w="2011680"/>
+                <a:gridCol w="2011680"/>
+                <a:gridCol w="1920240"/>
+              </a:tblGrid>
+              <a:tr h="310896">
+                <a:tc>
+                  <a:txBody>
+                    <a:bodyPr/>
+                    <a:lstStyle/>
+                    <a:p>
+                      <a:pPr algn="ctr" indent="0" marL="0">
+                        <a:buNone/>
+                      </a:pPr>
+                      <a:r>
+                        <a:rPr lang="en-US" sz="1300" b="1" dirty="0">
+                          <a:solidFill>
+                            <a:srgbClr val="FFFFFF"/>
+                          </a:solidFill>
+                          <a:latin typeface="Calibri" pitchFamily="34" charset="0"/>
+                          <a:ea typeface="Calibri" pitchFamily="34" charset="-122"/>
+                          <a:cs typeface="Calibri" pitchFamily="34" charset="-120"/>
+                        </a:rPr>
+                        <a:t>Arm (beam 12)</a:t>
+                      </a:r>
+                      <a:endParaRPr lang="en-US" sz="1300" dirty="0">
+                        <a:latin typeface="Calibri" charset="0"/>
+                        <a:ea typeface="Calibri" charset="0"/>
+                        <a:cs typeface="Calibri" charset="0"/>
+                      </a:endParaRPr>
+                    </a:p>
+                  </a:txBody>
+                  <a:tcPr marL="91440" marR="91440" marT="45720" marB="45720" anchor="ctr">
+                    <a:lnL w="6350" cap="flat" cmpd="sng" algn="ctr">
+                      <a:solidFill>
+                        <a:srgbClr val="D6DBE8"/>
+                      </a:solidFill>
+                      <a:prstDash val="solid"/>
+                      <a:round/>
+                      <a:headEnd type="none" w="med" len="med"/>
+                      <a:tailEnd type="none" w="med" len="med"/>
+                    </a:lnL>
+                    <a:lnR w="6350" cap="flat" cmpd="sng" algn="ctr">
+                      <a:solidFill>
+                        <a:srgbClr val="D6DBE8"/>
+                      </a:solidFill>
+                      <a:prstDash val="solid"/>
+                      <a:round/>
+                      <a:headEnd type="none" w="med" len="med"/>
+                      <a:tailEnd type="none" w="med" len="med"/>
+                    </a:lnR>
+                    <a:lnT w="6350" cap="flat" cmpd="sng" algn="ctr">
+                      <a:solidFill>
+                        <a:srgbClr val="D6DBE8"/>
+                      </a:solidFill>
+                      <a:prstDash val="solid"/>
+                      <a:round/>
+                      <a:headEnd type="none" w="med" len="med"/>
+                      <a:tailEnd type="none" w="med" len="med"/>
+                    </a:lnT>
+                    <a:lnB w="6350" cap="flat" cmpd="sng" algn="ctr">
+                      <a:solidFill>
+                        <a:srgbClr val="D6DBE8"/>
+                      </a:solidFill>
+                      <a:prstDash val="solid"/>
+                      <a:round/>
+                      <a:headEnd type="none" w="med" len="med"/>
+                      <a:tailEnd type="none" w="med" len="med"/>
+                    </a:lnB>
+                    <a:solidFill>
+                      <a:srgbClr val="18204A"/>
+                    </a:solidFill>
+                  </a:tcPr>
+                </a:tc>
+                <a:tc>
+                  <a:txBody>
+                    <a:bodyPr/>
+                    <a:lstStyle/>
+                    <a:p>
+                      <a:pPr algn="ctr" indent="0" marL="0">
+                        <a:buNone/>
+                      </a:pPr>
+                      <a:r>
+                        <a:rPr lang="en-US" sz="1300" b="1" dirty="0">
+                          <a:solidFill>
+                            <a:srgbClr val="FFFFFF"/>
+                          </a:solidFill>
+                          <a:latin typeface="Calibri" pitchFamily="34" charset="0"/>
+                          <a:ea typeface="Calibri" pitchFamily="34" charset="-122"/>
+                          <a:cs typeface="Calibri" pitchFamily="34" charset="-120"/>
+                        </a:rPr>
+                        <a:t>BLEU (tok)</a:t>
+                      </a:r>
+                      <a:endParaRPr lang="en-US" sz="1300" dirty="0">
+                        <a:latin typeface="Calibri" charset="0"/>
+                        <a:ea typeface="Calibri" charset="0"/>
+                        <a:cs typeface="Calibri" charset="0"/>
+                      </a:endParaRPr>
+                    </a:p>
+                  </a:txBody>
+                  <a:tcPr marL="91440" marR="91440" marT="45720" marB="45720" anchor="ctr">
+                    <a:lnL w="6350" cap="flat" cmpd="sng" algn="ctr">
+                      <a:solidFill>
+                        <a:srgbClr val="D6DBE8"/>
+                      </a:solidFill>
+                      <a:prstDash val="solid"/>
+                      <a:round/>
+                      <a:headEnd type="none" w="med" len="med"/>
+                      <a:tailEnd type="none" w="med" len="med"/>
+                    </a:lnL>
+                    <a:lnR w="6350" cap="flat" cmpd="sng" algn="ctr">
+                      <a:solidFill>
+                        <a:srgbClr val="D6DBE8"/>
+                      </a:solidFill>
+                      <a:prstDash val="solid"/>
+                      <a:round/>
+                      <a:headEnd type="none" w="med" len="med"/>
+                      <a:tailEnd type="none" w="med" len="med"/>
+                    </a:lnR>
+                    <a:lnT w="6350" cap="flat" cmpd="sng" algn="ctr">
+                      <a:solidFill>
+                        <a:srgbClr val="D6DBE8"/>
+                      </a:solidFill>
+                      <a:prstDash val="solid"/>
+                      <a:round/>
+                      <a:headEnd type="none" w="med" len="med"/>
+                      <a:tailEnd type="none" w="med" len="med"/>
+                    </a:lnT>
+                    <a:lnB w="6350" cap="flat" cmpd="sng" algn="ctr">
+                      <a:solidFill>
+                        <a:srgbClr val="D6DBE8"/>
+                      </a:solidFill>
+                      <a:prstDash val="solid"/>
+                      <a:round/>
+                      <a:headEnd type="none" w="med" len="med"/>
+                      <a:tailEnd type="none" w="med" len="med"/>
+                    </a:lnB>
+                    <a:solidFill>
+                      <a:srgbClr val="18204A"/>
+                    </a:solidFill>
+                  </a:tcPr>
+                </a:tc>
+                <a:tc>
+                  <a:txBody>
+                    <a:bodyPr/>
+                    <a:lstStyle/>
+                    <a:p>
+                      <a:pPr algn="ctr" indent="0" marL="0">
+                        <a:buNone/>
+                      </a:pPr>
+                      <a:r>
+                        <a:rPr lang="en-US" sz="1300" b="1" dirty="0">
+                          <a:solidFill>
+                            <a:srgbClr val="FFFFFF"/>
+                          </a:solidFill>
+                          <a:latin typeface="Calibri" pitchFamily="34" charset="0"/>
+                          <a:ea typeface="Calibri" pitchFamily="34" charset="-122"/>
+                          <a:cs typeface="Calibri" pitchFamily="34" charset="-120"/>
+                        </a:rPr>
+                        <a:t>BLEU (detok)</a:t>
+                      </a:r>
+                      <a:endParaRPr lang="en-US" sz="1300" dirty="0">
+                        <a:latin typeface="Calibri" charset="0"/>
+                        <a:ea typeface="Calibri" charset="0"/>
+                        <a:cs typeface="Calibri" charset="0"/>
+                      </a:endParaRPr>
+                    </a:p>
+                  </a:txBody>
+                  <a:tcPr marL="91440" marR="91440" marT="45720" marB="45720" anchor="ctr">
+                    <a:lnL w="6350" cap="flat" cmpd="sng" algn="ctr">
+                      <a:solidFill>
+                        <a:srgbClr val="D6DBE8"/>
+                      </a:solidFill>
+                      <a:prstDash val="solid"/>
+                      <a:round/>
+                      <a:headEnd type="none" w="med" len="med"/>
+                      <a:tailEnd type="none" w="med" len="med"/>
+                    </a:lnL>
+                    <a:lnR w="6350" cap="flat" cmpd="sng" algn="ctr">
+                      <a:solidFill>
+                        <a:srgbClr val="D6DBE8"/>
+                      </a:solidFill>
+                      <a:prstDash val="solid"/>
+                      <a:round/>
+                      <a:headEnd type="none" w="med" len="med"/>
+                      <a:tailEnd type="none" w="med" len="med"/>
+                    </a:lnR>
+                    <a:lnT w="6350" cap="flat" cmpd="sng" algn="ctr">
+                      <a:solidFill>
+                        <a:srgbClr val="D6DBE8"/>
+                      </a:solidFill>
+                      <a:prstDash val="solid"/>
+                      <a:round/>
+                      <a:headEnd type="none" w="med" len="med"/>
+                      <a:tailEnd type="none" w="med" len="med"/>
+                    </a:lnT>
+                    <a:lnB w="6350" cap="flat" cmpd="sng" algn="ctr">
+                      <a:solidFill>
+                        <a:srgbClr val="D6DBE8"/>
+                      </a:solidFill>
+                      <a:prstDash val="solid"/>
+                      <a:round/>
+                      <a:headEnd type="none" w="med" len="med"/>
+                      <a:tailEnd type="none" w="med" len="med"/>
+                    </a:lnB>
+                    <a:solidFill>
+                      <a:srgbClr val="18204A"/>
+                    </a:solidFill>
+                  </a:tcPr>
+                </a:tc>
+                <a:tc>
+                  <a:txBody>
+                    <a:bodyPr/>
+                    <a:lstStyle/>
+                    <a:p>
+                      <a:pPr algn="ctr" indent="0" marL="0">
+                        <a:buNone/>
+                      </a:pPr>
+                      <a:r>
+                        <a:rPr lang="en-US" sz="1300" b="1" dirty="0">
+                          <a:solidFill>
+                            <a:srgbClr val="FFFFFF"/>
+                          </a:solidFill>
+                          <a:latin typeface="Calibri" pitchFamily="34" charset="0"/>
+                          <a:ea typeface="Calibri" pitchFamily="34" charset="-122"/>
+                          <a:cs typeface="Calibri" pitchFamily="34" charset="-120"/>
+                        </a:rPr>
+                        <a:t>test ppl</a:t>
+                      </a:r>
+                      <a:endParaRPr lang="en-US" sz="1300" dirty="0">
+                        <a:latin typeface="Calibri" charset="0"/>
+                        <a:ea typeface="Calibri" charset="0"/>
+                        <a:cs typeface="Calibri" charset="0"/>
+                      </a:endParaRPr>
+                    </a:p>
+                  </a:txBody>
+                  <a:tcPr marL="91440" marR="91440" marT="45720" marB="45720" anchor="ctr">
+                    <a:lnL w="6350" cap="flat" cmpd="sng" algn="ctr">
+                      <a:solidFill>
+                        <a:srgbClr val="D6DBE8"/>
+                      </a:solidFill>
+                      <a:prstDash val="solid"/>
+                      <a:round/>
+                      <a:headEnd type="none" w="med" len="med"/>
+                      <a:tailEnd type="none" w="med" len="med"/>
+                    </a:lnL>
+                    <a:lnR w="6350" cap="flat" cmpd="sng" algn="ctr">
+                      <a:solidFill>
+                        <a:srgbClr val="D6DBE8"/>
+                      </a:solidFill>
+                      <a:prstDash val="solid"/>
+                      <a:round/>
+                      <a:headEnd type="none" w="med" len="med"/>
+                      <a:tailEnd type="none" w="med" len="med"/>
+                    </a:lnR>
+                    <a:lnT w="6350" cap="flat" cmpd="sng" algn="ctr">
+                      <a:solidFill>
+                        <a:srgbClr val="D6DBE8"/>
+                      </a:solidFill>
+                      <a:prstDash val="solid"/>
+                      <a:round/>
+                      <a:headEnd type="none" w="med" len="med"/>
+                      <a:tailEnd type="none" w="med" len="med"/>
+                    </a:lnT>
+                    <a:lnB w="6350" cap="flat" cmpd="sng" algn="ctr">
+                      <a:solidFill>
+                        <a:srgbClr val="D6DBE8"/>
+                      </a:solidFill>
+                      <a:prstDash val="solid"/>
+                      <a:round/>
+                      <a:headEnd type="none" w="med" len="med"/>
+                      <a:tailEnd type="none" w="med" len="med"/>
+                    </a:lnB>
+                    <a:solidFill>
+                      <a:srgbClr val="18204A"/>
+                    </a:solidFill>
+                  </a:tcPr>
+                </a:tc>
+              </a:tr>
+              <a:tr h="310896">
+                <a:tc>
+                  <a:txBody>
+                    <a:bodyPr/>
+                    <a:lstStyle/>
+                    <a:p>
+                      <a:pPr algn="ctr" indent="0" marL="0">
+                        <a:buNone/>
+                      </a:pPr>
+                      <a:r>
+                        <a:rPr lang="en-US" sz="1300" dirty="0">
+                          <a:solidFill>
+                            <a:srgbClr val="3B4A7A"/>
+                          </a:solidFill>
+                          <a:latin typeface="Calibri" pitchFamily="34" charset="0"/>
+                          <a:ea typeface="Calibri" pitchFamily="34" charset="-122"/>
+                          <a:cs typeface="Calibri" pitchFamily="34" charset="-120"/>
+                        </a:rPr>
+                        <a:t>reversed, fixed vector</a:t>
+                      </a:r>
+                      <a:endParaRPr lang="en-US" sz="1300" dirty="0">
+                        <a:latin typeface="Calibri" charset="0"/>
+                        <a:ea typeface="Calibri" charset="0"/>
+                        <a:cs typeface="Calibri" charset="0"/>
+                      </a:endParaRPr>
+                    </a:p>
+                  </a:txBody>
+                  <a:tcPr marL="91440" marR="91440" marT="45720" marB="45720" anchor="ctr">
+                    <a:lnL w="6350" cap="flat" cmpd="sng" algn="ctr">
+                      <a:solidFill>
+                        <a:srgbClr val="D6DBE8"/>
+                      </a:solidFill>
+                      <a:prstDash val="solid"/>
+                      <a:round/>
+                      <a:headEnd type="none" w="med" len="med"/>
+                      <a:tailEnd type="none" w="med" len="med"/>
+                    </a:lnL>
+                    <a:lnR w="6350" cap="flat" cmpd="sng" algn="ctr">
+                      <a:solidFill>
+                        <a:srgbClr val="D6DBE8"/>
+                      </a:solidFill>
+                      <a:prstDash val="solid"/>
+                      <a:round/>
+                      <a:headEnd type="none" w="med" len="med"/>
+                      <a:tailEnd type="none" w="med" len="med"/>
+                    </a:lnR>
+                    <a:lnT w="6350" cap="flat" cmpd="sng" algn="ctr">
+                      <a:solidFill>
+                        <a:srgbClr val="D6DBE8"/>
+                      </a:solidFill>
+                      <a:prstDash val="solid"/>
+                      <a:round/>
+                      <a:headEnd type="none" w="med" len="med"/>
+                      <a:tailEnd type="none" w="med" len="med"/>
+                    </a:lnT>
+                    <a:lnB w="6350" cap="flat" cmpd="sng" algn="ctr">
+                      <a:solidFill>
+                        <a:srgbClr val="D6DBE8"/>
+                      </a:solidFill>
+                      <a:prstDash val="solid"/>
+                      <a:round/>
+                      <a:headEnd type="none" w="med" len="med"/>
+                      <a:tailEnd type="none" w="med" len="med"/>
+                    </a:lnB>
+                  </a:tcPr>
+                </a:tc>
+                <a:tc>
+                  <a:txBody>
+                    <a:bodyPr/>
+                    <a:lstStyle/>
+                    <a:p>
+                      <a:pPr algn="ctr" indent="0" marL="0">
+                        <a:buNone/>
+                      </a:pPr>
+                      <a:r>
+                        <a:rPr lang="en-US" sz="1300" b="1" dirty="0">
+                          <a:solidFill>
+                            <a:srgbClr val="4C72B0"/>
+                          </a:solidFill>
+                          <a:latin typeface="Calibri" pitchFamily="34" charset="0"/>
+                          <a:ea typeface="Calibri" pitchFamily="34" charset="-122"/>
+                          <a:cs typeface="Calibri" pitchFamily="34" charset="-120"/>
+                        </a:rPr>
+                        <a:t>6.36</a:t>
+                      </a:r>
+                      <a:endParaRPr lang="en-US" sz="1300" dirty="0">
+                        <a:latin typeface="Calibri" charset="0"/>
+                        <a:ea typeface="Calibri" charset="0"/>
+                        <a:cs typeface="Calibri" charset="0"/>
+                      </a:endParaRPr>
+                    </a:p>
+                  </a:txBody>
+                  <a:tcPr marL="91440" marR="91440" marT="45720" marB="45720" anchor="ctr">
+                    <a:lnL w="6350" cap="flat" cmpd="sng" algn="ctr">
+                      <a:solidFill>
+                        <a:srgbClr val="D6DBE8"/>
+                      </a:solidFill>
+                      <a:prstDash val="solid"/>
+                      <a:round/>
+                      <a:headEnd type="none" w="med" len="med"/>
+                      <a:tailEnd type="none" w="med" len="med"/>
+                    </a:lnL>
+                    <a:lnR w="6350" cap="flat" cmpd="sng" algn="ctr">
+                      <a:solidFill>
+                        <a:srgbClr val="D6DBE8"/>
+                      </a:solidFill>
+                      <a:prstDash val="solid"/>
+                      <a:round/>
+                      <a:headEnd type="none" w="med" len="med"/>
+                      <a:tailEnd type="none" w="med" len="med"/>
+                    </a:lnR>
+                    <a:lnT w="6350" cap="flat" cmpd="sng" algn="ctr">
+                      <a:solidFill>
+                        <a:srgbClr val="D6DBE8"/>
+                      </a:solidFill>
+                      <a:prstDash val="solid"/>
+                      <a:round/>
+                      <a:headEnd type="none" w="med" len="med"/>
+                      <a:tailEnd type="none" w="med" len="med"/>
+                    </a:lnT>
+                    <a:lnB w="6350" cap="flat" cmpd="sng" algn="ctr">
+                      <a:solidFill>
+                        <a:srgbClr val="D6DBE8"/>
+                      </a:solidFill>
+                      <a:prstDash val="solid"/>
+                      <a:round/>
+                      <a:headEnd type="none" w="med" len="med"/>
+                      <a:tailEnd type="none" w="med" len="med"/>
+                    </a:lnB>
+                  </a:tcPr>
+                </a:tc>
+                <a:tc>
+                  <a:txBody>
+                    <a:bodyPr/>
+                    <a:lstStyle/>
+                    <a:p>
+                      <a:pPr algn="ctr" indent="0" marL="0">
+                        <a:buNone/>
+                      </a:pPr>
+                      <a:r>
+                        <a:rPr lang="en-US" sz="1300" dirty="0">
+                          <a:solidFill>
+                            <a:srgbClr val="3B4A7A"/>
+                          </a:solidFill>
+                          <a:latin typeface="Calibri" pitchFamily="34" charset="0"/>
+                          <a:ea typeface="Calibri" pitchFamily="34" charset="-122"/>
+                          <a:cs typeface="Calibri" pitchFamily="34" charset="-120"/>
+                        </a:rPr>
+                        <a:t>4.62</a:t>
+                      </a:r>
+                      <a:endParaRPr lang="en-US" sz="1300" dirty="0">
+                        <a:latin typeface="Calibri" charset="0"/>
+                        <a:ea typeface="Calibri" charset="0"/>
+                        <a:cs typeface="Calibri" charset="0"/>
+                      </a:endParaRPr>
+                    </a:p>
+                  </a:txBody>
+                  <a:tcPr marL="91440" marR="91440" marT="45720" marB="45720" anchor="ctr">
+                    <a:lnL w="6350" cap="flat" cmpd="sng" algn="ctr">
+                      <a:solidFill>
+                        <a:srgbClr val="D6DBE8"/>
+                      </a:solidFill>
+                      <a:prstDash val="solid"/>
+                      <a:round/>
+                      <a:headEnd type="none" w="med" len="med"/>
+                      <a:tailEnd type="none" w="med" len="med"/>
+                    </a:lnL>
+                    <a:lnR w="6350" cap="flat" cmpd="sng" algn="ctr">
+                      <a:solidFill>
+                        <a:srgbClr val="D6DBE8"/>
+                      </a:solidFill>
+                      <a:prstDash val="solid"/>
+                      <a:round/>
+                      <a:headEnd type="none" w="med" len="med"/>
+                      <a:tailEnd type="none" w="med" len="med"/>
+                    </a:lnR>
+                    <a:lnT w="6350" cap="flat" cmpd="sng" algn="ctr">
+                      <a:solidFill>
+                        <a:srgbClr val="D6DBE8"/>
+                      </a:solidFill>
+                      <a:prstDash val="solid"/>
+                      <a:round/>
+                      <a:headEnd type="none" w="med" len="med"/>
+                      <a:tailEnd type="none" w="med" len="med"/>
+                    </a:lnT>
+                    <a:lnB w="6350" cap="flat" cmpd="sng" algn="ctr">
+                      <a:solidFill>
+                        <a:srgbClr val="D6DBE8"/>
+                      </a:solidFill>
+                      <a:prstDash val="solid"/>
+                      <a:round/>
+                      <a:headEnd type="none" w="med" len="med"/>
+                      <a:tailEnd type="none" w="med" len="med"/>
+                    </a:lnB>
+                  </a:tcPr>
+                </a:tc>
+                <a:tc>
+                  <a:txBody>
+                    <a:bodyPr/>
+                    <a:lstStyle/>
+                    <a:p>
+                      <a:pPr algn="ctr" indent="0" marL="0">
+                        <a:buNone/>
+                      </a:pPr>
+                      <a:r>
+                        <a:rPr lang="en-US" sz="1300" dirty="0">
+                          <a:solidFill>
+                            <a:srgbClr val="3B4A7A"/>
+                          </a:solidFill>
+                          <a:latin typeface="Calibri" pitchFamily="34" charset="0"/>
+                          <a:ea typeface="Calibri" pitchFamily="34" charset="-122"/>
+                          <a:cs typeface="Calibri" pitchFamily="34" charset="-120"/>
+                        </a:rPr>
+                        <a:t>24.067</a:t>
+                      </a:r>
+                      <a:endParaRPr lang="en-US" sz="1300" dirty="0">
+                        <a:latin typeface="Calibri" charset="0"/>
+                        <a:ea typeface="Calibri" charset="0"/>
+                        <a:cs typeface="Calibri" charset="0"/>
+                      </a:endParaRPr>
+                    </a:p>
+                  </a:txBody>
+                  <a:tcPr marL="91440" marR="91440" marT="45720" marB="45720" anchor="ctr">
+                    <a:lnL w="6350" cap="flat" cmpd="sng" algn="ctr">
+                      <a:solidFill>
+                        <a:srgbClr val="D6DBE8"/>
+                      </a:solidFill>
+                      <a:prstDash val="solid"/>
+                      <a:round/>
+                      <a:headEnd type="none" w="med" len="med"/>
+                      <a:tailEnd type="none" w="med" len="med"/>
+                    </a:lnL>
+                    <a:lnR w="6350" cap="flat" cmpd="sng" algn="ctr">
+                      <a:solidFill>
+                        <a:srgbClr val="D6DBE8"/>
+                      </a:solidFill>
+                      <a:prstDash val="solid"/>
+                      <a:round/>
+                      <a:headEnd type="none" w="med" len="med"/>
+                      <a:tailEnd type="none" w="med" len="med"/>
+                    </a:lnR>
+                    <a:lnT w="6350" cap="flat" cmpd="sng" algn="ctr">
+                      <a:solidFill>
+                        <a:srgbClr val="D6DBE8"/>
+                      </a:solidFill>
+                      <a:prstDash val="solid"/>
+                      <a:round/>
+                      <a:headEnd type="none" w="med" len="med"/>
+                      <a:tailEnd type="none" w="med" len="med"/>
+                    </a:lnT>
+                    <a:lnB w="6350" cap="flat" cmpd="sng" algn="ctr">
+                      <a:solidFill>
+                        <a:srgbClr val="D6DBE8"/>
+                      </a:solidFill>
+                      <a:prstDash val="solid"/>
+                      <a:round/>
+                      <a:headEnd type="none" w="med" len="med"/>
+                      <a:tailEnd type="none" w="med" len="med"/>
+                    </a:lnB>
+                  </a:tcPr>
+                </a:tc>
+              </a:tr>
+              <a:tr h="310896">
+                <a:tc>
+                  <a:txBody>
+                    <a:bodyPr/>
+                    <a:lstStyle/>
+                    <a:p>
+                      <a:pPr algn="ctr" indent="0" marL="0">
+                        <a:buNone/>
+                      </a:pPr>
+                      <a:r>
+                        <a:rPr lang="en-US" sz="1300" dirty="0">
+                          <a:solidFill>
+                            <a:srgbClr val="3B4A7A"/>
+                          </a:solidFill>
+                          <a:latin typeface="Calibri" pitchFamily="34" charset="0"/>
+                          <a:ea typeface="Calibri" pitchFamily="34" charset="-122"/>
+                          <a:cs typeface="Calibri" pitchFamily="34" charset="-120"/>
+                        </a:rPr>
+                        <a:t>reversed, + attention</a:t>
+                      </a:r>
+                      <a:endParaRPr lang="en-US" sz="1300" dirty="0">
+                        <a:latin typeface="Calibri" charset="0"/>
+                        <a:ea typeface="Calibri" charset="0"/>
+                        <a:cs typeface="Calibri" charset="0"/>
+                      </a:endParaRPr>
+                    </a:p>
+                  </a:txBody>
+                  <a:tcPr marL="91440" marR="91440" marT="45720" marB="45720" anchor="ctr">
+                    <a:lnL w="6350" cap="flat" cmpd="sng" algn="ctr">
+                      <a:solidFill>
+                        <a:srgbClr val="D6DBE8"/>
+                      </a:solidFill>
+                      <a:prstDash val="solid"/>
+                      <a:round/>
+                      <a:headEnd type="none" w="med" len="med"/>
+                      <a:tailEnd type="none" w="med" len="med"/>
+                    </a:lnL>
+                    <a:lnR w="6350" cap="flat" cmpd="sng" algn="ctr">
+                      <a:solidFill>
+                        <a:srgbClr val="D6DBE8"/>
+                      </a:solidFill>
+                      <a:prstDash val="solid"/>
+                      <a:round/>
+                      <a:headEnd type="none" w="med" len="med"/>
+                      <a:tailEnd type="none" w="med" len="med"/>
+                    </a:lnR>
+                    <a:lnT w="6350" cap="flat" cmpd="sng" algn="ctr">
+                      <a:solidFill>
+                        <a:srgbClr val="D6DBE8"/>
+                      </a:solidFill>
+                      <a:prstDash val="solid"/>
+                      <a:round/>
+                      <a:headEnd type="none" w="med" len="med"/>
+                      <a:tailEnd type="none" w="med" len="med"/>
+                    </a:lnT>
+                    <a:lnB w="6350" cap="flat" cmpd="sng" algn="ctr">
+                      <a:solidFill>
+                        <a:srgbClr val="D6DBE8"/>
+                      </a:solidFill>
+                      <a:prstDash val="solid"/>
+                      <a:round/>
+                      <a:headEnd type="none" w="med" len="med"/>
+                      <a:tailEnd type="none" w="med" len="med"/>
+                    </a:lnB>
+                  </a:tcPr>
+                </a:tc>
+                <a:tc>
+                  <a:txBody>
+                    <a:bodyPr/>
+                    <a:lstStyle/>
+                    <a:p>
+                      <a:pPr algn="ctr" indent="0" marL="0">
+                        <a:buNone/>
+                      </a:pPr>
+                      <a:r>
+                        <a:rPr lang="en-US" sz="1300" b="1" dirty="0">
+                          <a:solidFill>
+                            <a:srgbClr val="4C72B0"/>
+                          </a:solidFill>
+                          <a:latin typeface="Calibri" pitchFamily="34" charset="0"/>
+                          <a:ea typeface="Calibri" pitchFamily="34" charset="-122"/>
+                          <a:cs typeface="Calibri" pitchFamily="34" charset="-120"/>
+                        </a:rPr>
+                        <a:t>18.49</a:t>
+                      </a:r>
+                      <a:endParaRPr lang="en-US" sz="1300" dirty="0">
+                        <a:latin typeface="Calibri" charset="0"/>
+                        <a:ea typeface="Calibri" charset="0"/>
+                        <a:cs typeface="Calibri" charset="0"/>
+                      </a:endParaRPr>
+                    </a:p>
+                  </a:txBody>
+                  <a:tcPr marL="91440" marR="91440" marT="45720" marB="45720" anchor="ctr">
+                    <a:lnL w="6350" cap="flat" cmpd="sng" algn="ctr">
+                      <a:solidFill>
+                        <a:srgbClr val="D6DBE8"/>
+                      </a:solidFill>
+                      <a:prstDash val="solid"/>
+                      <a:round/>
+                      <a:headEnd type="none" w="med" len="med"/>
+                      <a:tailEnd type="none" w="med" len="med"/>
+                    </a:lnL>
+                    <a:lnR w="6350" cap="flat" cmpd="sng" algn="ctr">
+                      <a:solidFill>
+                        <a:srgbClr val="D6DBE8"/>
+                      </a:solidFill>
+                      <a:prstDash val="solid"/>
+                      <a:round/>
+                      <a:headEnd type="none" w="med" len="med"/>
+                      <a:tailEnd type="none" w="med" len="med"/>
+                    </a:lnR>
+                    <a:lnT w="6350" cap="flat" cmpd="sng" algn="ctr">
+                      <a:solidFill>
+                        <a:srgbClr val="D6DBE8"/>
+                      </a:solidFill>
+                      <a:prstDash val="solid"/>
+                      <a:round/>
+                      <a:headEnd type="none" w="med" len="med"/>
+                      <a:tailEnd type="none" w="med" len="med"/>
+                    </a:lnT>
+                    <a:lnB w="6350" cap="flat" cmpd="sng" algn="ctr">
+                      <a:solidFill>
+                        <a:srgbClr val="D6DBE8"/>
+                      </a:solidFill>
+                      <a:prstDash val="solid"/>
+                      <a:round/>
+                      <a:headEnd type="none" w="med" len="med"/>
+                      <a:tailEnd type="none" w="med" len="med"/>
+                    </a:lnB>
+                  </a:tcPr>
+                </a:tc>
+                <a:tc>
+                  <a:txBody>
+                    <a:bodyPr/>
+                    <a:lstStyle/>
+                    <a:p>
+                      <a:pPr algn="ctr" indent="0" marL="0">
+                        <a:buNone/>
+                      </a:pPr>
+                      <a:r>
+                        <a:rPr lang="en-US" sz="1300" dirty="0">
+                          <a:solidFill>
+                            <a:srgbClr val="3B4A7A"/>
+                          </a:solidFill>
+                          <a:latin typeface="Calibri" pitchFamily="34" charset="0"/>
+                          <a:ea typeface="Calibri" pitchFamily="34" charset="-122"/>
+                          <a:cs typeface="Calibri" pitchFamily="34" charset="-120"/>
+                        </a:rPr>
+                        <a:t>14.99</a:t>
+                      </a:r>
+                      <a:endParaRPr lang="en-US" sz="1300" dirty="0">
+                        <a:latin typeface="Calibri" charset="0"/>
+                        <a:ea typeface="Calibri" charset="0"/>
+                        <a:cs typeface="Calibri" charset="0"/>
+                      </a:endParaRPr>
+                    </a:p>
+                  </a:txBody>
+                  <a:tcPr marL="91440" marR="91440" marT="45720" marB="45720" anchor="ctr">
+                    <a:lnL w="6350" cap="flat" cmpd="sng" algn="ctr">
+                      <a:solidFill>
+                        <a:srgbClr val="D6DBE8"/>
+                      </a:solidFill>
+                      <a:prstDash val="solid"/>
+                      <a:round/>
+                      <a:headEnd type="none" w="med" len="med"/>
+                      <a:tailEnd type="none" w="med" len="med"/>
+                    </a:lnL>
+                    <a:lnR w="6350" cap="flat" cmpd="sng" algn="ctr">
+                      <a:solidFill>
+                        <a:srgbClr val="D6DBE8"/>
+                      </a:solidFill>
+                      <a:prstDash val="solid"/>
+                      <a:round/>
+                      <a:headEnd type="none" w="med" len="med"/>
+                      <a:tailEnd type="none" w="med" len="med"/>
+                    </a:lnR>
+                    <a:lnT w="6350" cap="flat" cmpd="sng" algn="ctr">
+                      <a:solidFill>
+                        <a:srgbClr val="D6DBE8"/>
+                      </a:solidFill>
+                      <a:prstDash val="solid"/>
+                      <a:round/>
+                      <a:headEnd type="none" w="med" len="med"/>
+                      <a:tailEnd type="none" w="med" len="med"/>
+                    </a:lnT>
+                    <a:lnB w="6350" cap="flat" cmpd="sng" algn="ctr">
+                      <a:solidFill>
+                        <a:srgbClr val="D6DBE8"/>
+                      </a:solidFill>
+                      <a:prstDash val="solid"/>
+                      <a:round/>
+                      <a:headEnd type="none" w="med" len="med"/>
+                      <a:tailEnd type="none" w="med" len="med"/>
+                    </a:lnB>
+                  </a:tcPr>
+                </a:tc>
+                <a:tc>
+                  <a:txBody>
+                    <a:bodyPr/>
+                    <a:lstStyle/>
+                    <a:p>
+                      <a:pPr algn="ctr" indent="0" marL="0">
+                        <a:buNone/>
+                      </a:pPr>
+                      <a:r>
+                        <a:rPr lang="en-US" sz="1300" dirty="0">
+                          <a:solidFill>
+                            <a:srgbClr val="3B4A7A"/>
+                          </a:solidFill>
+                          <a:latin typeface="Calibri" pitchFamily="34" charset="0"/>
+                          <a:ea typeface="Calibri" pitchFamily="34" charset="-122"/>
+                          <a:cs typeface="Calibri" pitchFamily="34" charset="-120"/>
+                        </a:rPr>
+                        <a:t>10.690</a:t>
+                      </a:r>
+                      <a:endParaRPr lang="en-US" sz="1300" dirty="0">
+                        <a:latin typeface="Calibri" charset="0"/>
+                        <a:ea typeface="Calibri" charset="0"/>
+                        <a:cs typeface="Calibri" charset="0"/>
+                      </a:endParaRPr>
+                    </a:p>
+                  </a:txBody>
+                  <a:tcPr marL="91440" marR="91440" marT="45720" marB="45720" anchor="ctr">
+                    <a:lnL w="6350" cap="flat" cmpd="sng" algn="ctr">
+                      <a:solidFill>
+                        <a:srgbClr val="D6DBE8"/>
+                      </a:solidFill>
+                      <a:prstDash val="solid"/>
+                      <a:round/>
+                      <a:headEnd type="none" w="med" len="med"/>
+                      <a:tailEnd type="none" w="med" len="med"/>
+                    </a:lnL>
+                    <a:lnR w="6350" cap="flat" cmpd="sng" algn="ctr">
+                      <a:solidFill>
+                        <a:srgbClr val="D6DBE8"/>
+                      </a:solidFill>
+                      <a:prstDash val="solid"/>
+                      <a:round/>
+                      <a:headEnd type="none" w="med" len="med"/>
+                      <a:tailEnd type="none" w="med" len="med"/>
+                    </a:lnR>
+                    <a:lnT w="6350" cap="flat" cmpd="sng" algn="ctr">
+                      <a:solidFill>
+                        <a:srgbClr val="D6DBE8"/>
+                      </a:solidFill>
+                      <a:prstDash val="solid"/>
+                      <a:round/>
+                      <a:headEnd type="none" w="med" len="med"/>
+                      <a:tailEnd type="none" w="med" len="med"/>
+                    </a:lnT>
+                    <a:lnB w="6350" cap="flat" cmpd="sng" algn="ctr">
+                      <a:solidFill>
+                        <a:srgbClr val="D6DBE8"/>
+                      </a:solidFill>
+                      <a:prstDash val="solid"/>
+                      <a:round/>
+                      <a:headEnd type="none" w="med" len="med"/>
+                      <a:tailEnd type="none" w="med" len="med"/>
+                    </a:lnB>
+                  </a:tcPr>
+                </a:tc>
+              </a:tr>
+            </a:tbl>
+          </a:graphicData>
+        </a:graphic>
+      </p:graphicFrame>
+      <p:sp>
+        <p:nvSpPr>
+          <p:cNvPr id="5" name="Text 2"/>
+          <p:cNvSpPr txBox="1"/>
           <p:nvPr/>
         </p:nvSpPr>
         <p:spPr>
           <a:xfrm>
-            <a:off x="548640" y="2377440"/>
-            <a:ext cx="11064240" cy="1188720"/>
-          </a:xfrm>
-          <a:prstGeom prst="roundRect">
-            <a:avLst>
-              <a:gd name="adj" fmla="val 7692"/>
-            </a:avLst>
-          </a:prstGeom>
-          <a:solidFill>
-            <a:srgbClr val="FFF4E5"/>
-          </a:solidFill>
-          <a:ln w="12700">
-            <a:solidFill>
-              <a:srgbClr val="E8A33D"/>
-            </a:solidFill>
-            <a:prstDash val="solid"/>
-          </a:ln>
-        </p:spPr>
-      </p:sp>
-      <p:sp>
-        <p:nvSpPr>
-          <p:cNvPr id="5" name="Text 3"/>
-          <p:cNvSpPr txBox="1"/>
-          <p:nvPr/>
-        </p:nvSpPr>
-        <p:spPr>
-          <a:xfrm>
-            <a:off x="822960" y="2697480"/>
-            <a:ext cx="10515600" cy="548640"/>
+            <a:off x="548640" y="2816352"/>
+            <a:ext cx="11064240" cy="1828800"/>
           </a:xfrm>
           <a:prstGeom prst="rect">
             <a:avLst/>
@@ -3241,30 +4044,34 @@
           <a:ln/>
         </p:spPr>
         <p:txBody>
-          <a:bodyPr wrap="square" lIns="0" tIns="0" rIns="0" bIns="0" rtlCol="0" anchor="ctr"/>
+          <a:bodyPr wrap="square" lIns="0" tIns="0" rIns="0" bIns="0" rtlCol="0" anchor="t"/>
           <a:lstStyle/>
           <a:p>
-            <a:pPr indent="0" marL="0">
-              <a:buNone/>
+            <a:pPr marL="342900" indent="-342900">
+              <a:spcAft>
+                <a:spcPts val="900"/>
+              </a:spcAft>
+              <a:buSzPct val="100000"/>
+              <a:buChar char="•"/>
             </a:pPr>
             <a:r>
-              <a:rPr lang="en-US" sz="1600" b="1" dirty="0">
+              <a:rPr lang="en-US" sz="1400" dirty="0">
                 <a:solidFill>
-                  <a:srgbClr val="8A5A12"/>
+                  <a:srgbClr val="3B4A7A"/>
                 </a:solidFill>
                 <a:latin typeface="Calibri" pitchFamily="34" charset="0"/>
                 <a:ea typeface="Calibri" pitchFamily="34" charset="-122"/>
                 <a:cs typeface="Calibri" pitchFamily="34" charset="-120"/>
               </a:rPr>
-              <a:t>Not yet run — make endterm-wmt &amp;&amp; make results-endterm-wmt</a:t>
-            </a:r>
-            <a:endParaRPr lang="en-US" sz="1600" dirty="0"/>
+              <a:t>Reversed: fixed vector 6.36 → attention 18.49 (+12.13 BLEU).</a:t>
+            </a:r>
+            <a:endParaRPr lang="en-US" sz="1400" dirty="0"/>
           </a:p>
         </p:txBody>
       </p:sp>
       <p:sp>
         <p:nvSpPr>
-          <p:cNvPr id="6" name="Text 4"/>
+          <p:cNvPr id="6" name="Text 3"/>
           <p:cNvSpPr txBox="1"/>
           <p:nvPr/>
         </p:nvSpPr>
@@ -3404,43 +4211,1370 @@
           </a:p>
         </p:txBody>
       </p:sp>
-      <p:sp>
-        <p:nvSpPr>
-          <p:cNvPr id="4" name="Shape 2"/>
-          <p:cNvSpPr/>
+      <p:graphicFrame>
+        <p:nvGraphicFramePr>
+          <p:cNvPr id="13" name="Table 0"/>
+          <p:cNvGraphicFramePr>
+            <a:graphicFrameLocks noGrp="1"/>
+          </p:cNvGraphicFramePr>
+          <p:nvPr>
+            <p:extLst>
+              <p:ext uri="{D42A27DB-BD31-4B8C-83A1-F6EECF244321}">
+                <p14:modId xmlns:p14="http://schemas.microsoft.com/office/powerpoint/2010/main" val="1579011935"/>
+              </p:ext>
+            </p:extLst>
+          </p:nvPr>
+        </p:nvGraphicFramePr>
+        <p:xfrm>
+          <a:off x="548640" y="1572768"/>
+          <a:ext cx="11064240" cy="914400"/>
+        </p:xfrm>
+        <a:graphic>
+          <a:graphicData uri="http://schemas.openxmlformats.org/drawingml/2006/table">
+            <a:tbl>
+              <a:tblPr/>
+              <a:tblGrid>
+                <a:gridCol w="5120640"/>
+                <a:gridCol w="2011680"/>
+                <a:gridCol w="2011680"/>
+                <a:gridCol w="1920240"/>
+              </a:tblGrid>
+              <a:tr h="310896">
+                <a:tc>
+                  <a:txBody>
+                    <a:bodyPr/>
+                    <a:lstStyle/>
+                    <a:p>
+                      <a:pPr algn="ctr" indent="0" marL="0">
+                        <a:buNone/>
+                      </a:pPr>
+                      <a:r>
+                        <a:rPr lang="en-US" sz="1300" b="1" dirty="0">
+                          <a:solidFill>
+                            <a:srgbClr val="FFFFFF"/>
+                          </a:solidFill>
+                          <a:latin typeface="Calibri" pitchFamily="34" charset="0"/>
+                          <a:ea typeface="Calibri" pitchFamily="34" charset="-122"/>
+                          <a:cs typeface="Calibri" pitchFamily="34" charset="-120"/>
+                        </a:rPr>
+                        <a:t>Arm (beam 12)</a:t>
+                      </a:r>
+                      <a:endParaRPr lang="en-US" sz="1300" dirty="0">
+                        <a:latin typeface="Calibri" charset="0"/>
+                        <a:ea typeface="Calibri" charset="0"/>
+                        <a:cs typeface="Calibri" charset="0"/>
+                      </a:endParaRPr>
+                    </a:p>
+                  </a:txBody>
+                  <a:tcPr marL="91440" marR="91440" marT="45720" marB="45720" anchor="ctr">
+                    <a:lnL w="6350" cap="flat" cmpd="sng" algn="ctr">
+                      <a:solidFill>
+                        <a:srgbClr val="D6DBE8"/>
+                      </a:solidFill>
+                      <a:prstDash val="solid"/>
+                      <a:round/>
+                      <a:headEnd type="none" w="med" len="med"/>
+                      <a:tailEnd type="none" w="med" len="med"/>
+                    </a:lnL>
+                    <a:lnR w="6350" cap="flat" cmpd="sng" algn="ctr">
+                      <a:solidFill>
+                        <a:srgbClr val="D6DBE8"/>
+                      </a:solidFill>
+                      <a:prstDash val="solid"/>
+                      <a:round/>
+                      <a:headEnd type="none" w="med" len="med"/>
+                      <a:tailEnd type="none" w="med" len="med"/>
+                    </a:lnR>
+                    <a:lnT w="6350" cap="flat" cmpd="sng" algn="ctr">
+                      <a:solidFill>
+                        <a:srgbClr val="D6DBE8"/>
+                      </a:solidFill>
+                      <a:prstDash val="solid"/>
+                      <a:round/>
+                      <a:headEnd type="none" w="med" len="med"/>
+                      <a:tailEnd type="none" w="med" len="med"/>
+                    </a:lnT>
+                    <a:lnB w="6350" cap="flat" cmpd="sng" algn="ctr">
+                      <a:solidFill>
+                        <a:srgbClr val="D6DBE8"/>
+                      </a:solidFill>
+                      <a:prstDash val="solid"/>
+                      <a:round/>
+                      <a:headEnd type="none" w="med" len="med"/>
+                      <a:tailEnd type="none" w="med" len="med"/>
+                    </a:lnB>
+                    <a:solidFill>
+                      <a:srgbClr val="18204A"/>
+                    </a:solidFill>
+                  </a:tcPr>
+                </a:tc>
+                <a:tc>
+                  <a:txBody>
+                    <a:bodyPr/>
+                    <a:lstStyle/>
+                    <a:p>
+                      <a:pPr algn="ctr" indent="0" marL="0">
+                        <a:buNone/>
+                      </a:pPr>
+                      <a:r>
+                        <a:rPr lang="en-US" sz="1300" b="1" dirty="0">
+                          <a:solidFill>
+                            <a:srgbClr val="FFFFFF"/>
+                          </a:solidFill>
+                          <a:latin typeface="Calibri" pitchFamily="34" charset="0"/>
+                          <a:ea typeface="Calibri" pitchFamily="34" charset="-122"/>
+                          <a:cs typeface="Calibri" pitchFamily="34" charset="-120"/>
+                        </a:rPr>
+                        <a:t>BLEU (tok)</a:t>
+                      </a:r>
+                      <a:endParaRPr lang="en-US" sz="1300" dirty="0">
+                        <a:latin typeface="Calibri" charset="0"/>
+                        <a:ea typeface="Calibri" charset="0"/>
+                        <a:cs typeface="Calibri" charset="0"/>
+                      </a:endParaRPr>
+                    </a:p>
+                  </a:txBody>
+                  <a:tcPr marL="91440" marR="91440" marT="45720" marB="45720" anchor="ctr">
+                    <a:lnL w="6350" cap="flat" cmpd="sng" algn="ctr">
+                      <a:solidFill>
+                        <a:srgbClr val="D6DBE8"/>
+                      </a:solidFill>
+                      <a:prstDash val="solid"/>
+                      <a:round/>
+                      <a:headEnd type="none" w="med" len="med"/>
+                      <a:tailEnd type="none" w="med" len="med"/>
+                    </a:lnL>
+                    <a:lnR w="6350" cap="flat" cmpd="sng" algn="ctr">
+                      <a:solidFill>
+                        <a:srgbClr val="D6DBE8"/>
+                      </a:solidFill>
+                      <a:prstDash val="solid"/>
+                      <a:round/>
+                      <a:headEnd type="none" w="med" len="med"/>
+                      <a:tailEnd type="none" w="med" len="med"/>
+                    </a:lnR>
+                    <a:lnT w="6350" cap="flat" cmpd="sng" algn="ctr">
+                      <a:solidFill>
+                        <a:srgbClr val="D6DBE8"/>
+                      </a:solidFill>
+                      <a:prstDash val="solid"/>
+                      <a:round/>
+                      <a:headEnd type="none" w="med" len="med"/>
+                      <a:tailEnd type="none" w="med" len="med"/>
+                    </a:lnT>
+                    <a:lnB w="6350" cap="flat" cmpd="sng" algn="ctr">
+                      <a:solidFill>
+                        <a:srgbClr val="D6DBE8"/>
+                      </a:solidFill>
+                      <a:prstDash val="solid"/>
+                      <a:round/>
+                      <a:headEnd type="none" w="med" len="med"/>
+                      <a:tailEnd type="none" w="med" len="med"/>
+                    </a:lnB>
+                    <a:solidFill>
+                      <a:srgbClr val="18204A"/>
+                    </a:solidFill>
+                  </a:tcPr>
+                </a:tc>
+                <a:tc>
+                  <a:txBody>
+                    <a:bodyPr/>
+                    <a:lstStyle/>
+                    <a:p>
+                      <a:pPr algn="ctr" indent="0" marL="0">
+                        <a:buNone/>
+                      </a:pPr>
+                      <a:r>
+                        <a:rPr lang="en-US" sz="1300" b="1" dirty="0">
+                          <a:solidFill>
+                            <a:srgbClr val="FFFFFF"/>
+                          </a:solidFill>
+                          <a:latin typeface="Calibri" pitchFamily="34" charset="0"/>
+                          <a:ea typeface="Calibri" pitchFamily="34" charset="-122"/>
+                          <a:cs typeface="Calibri" pitchFamily="34" charset="-120"/>
+                        </a:rPr>
+                        <a:t>BLEU (detok)</a:t>
+                      </a:r>
+                      <a:endParaRPr lang="en-US" sz="1300" dirty="0">
+                        <a:latin typeface="Calibri" charset="0"/>
+                        <a:ea typeface="Calibri" charset="0"/>
+                        <a:cs typeface="Calibri" charset="0"/>
+                      </a:endParaRPr>
+                    </a:p>
+                  </a:txBody>
+                  <a:tcPr marL="91440" marR="91440" marT="45720" marB="45720" anchor="ctr">
+                    <a:lnL w="6350" cap="flat" cmpd="sng" algn="ctr">
+                      <a:solidFill>
+                        <a:srgbClr val="D6DBE8"/>
+                      </a:solidFill>
+                      <a:prstDash val="solid"/>
+                      <a:round/>
+                      <a:headEnd type="none" w="med" len="med"/>
+                      <a:tailEnd type="none" w="med" len="med"/>
+                    </a:lnL>
+                    <a:lnR w="6350" cap="flat" cmpd="sng" algn="ctr">
+                      <a:solidFill>
+                        <a:srgbClr val="D6DBE8"/>
+                      </a:solidFill>
+                      <a:prstDash val="solid"/>
+                      <a:round/>
+                      <a:headEnd type="none" w="med" len="med"/>
+                      <a:tailEnd type="none" w="med" len="med"/>
+                    </a:lnR>
+                    <a:lnT w="6350" cap="flat" cmpd="sng" algn="ctr">
+                      <a:solidFill>
+                        <a:srgbClr val="D6DBE8"/>
+                      </a:solidFill>
+                      <a:prstDash val="solid"/>
+                      <a:round/>
+                      <a:headEnd type="none" w="med" len="med"/>
+                      <a:tailEnd type="none" w="med" len="med"/>
+                    </a:lnT>
+                    <a:lnB w="6350" cap="flat" cmpd="sng" algn="ctr">
+                      <a:solidFill>
+                        <a:srgbClr val="D6DBE8"/>
+                      </a:solidFill>
+                      <a:prstDash val="solid"/>
+                      <a:round/>
+                      <a:headEnd type="none" w="med" len="med"/>
+                      <a:tailEnd type="none" w="med" len="med"/>
+                    </a:lnB>
+                    <a:solidFill>
+                      <a:srgbClr val="18204A"/>
+                    </a:solidFill>
+                  </a:tcPr>
+                </a:tc>
+                <a:tc>
+                  <a:txBody>
+                    <a:bodyPr/>
+                    <a:lstStyle/>
+                    <a:p>
+                      <a:pPr algn="ctr" indent="0" marL="0">
+                        <a:buNone/>
+                      </a:pPr>
+                      <a:r>
+                        <a:rPr lang="en-US" sz="1300" b="1" dirty="0">
+                          <a:solidFill>
+                            <a:srgbClr val="FFFFFF"/>
+                          </a:solidFill>
+                          <a:latin typeface="Calibri" pitchFamily="34" charset="0"/>
+                          <a:ea typeface="Calibri" pitchFamily="34" charset="-122"/>
+                          <a:cs typeface="Calibri" pitchFamily="34" charset="-120"/>
+                        </a:rPr>
+                        <a:t>test ppl</a:t>
+                      </a:r>
+                      <a:endParaRPr lang="en-US" sz="1300" dirty="0">
+                        <a:latin typeface="Calibri" charset="0"/>
+                        <a:ea typeface="Calibri" charset="0"/>
+                        <a:cs typeface="Calibri" charset="0"/>
+                      </a:endParaRPr>
+                    </a:p>
+                  </a:txBody>
+                  <a:tcPr marL="91440" marR="91440" marT="45720" marB="45720" anchor="ctr">
+                    <a:lnL w="6350" cap="flat" cmpd="sng" algn="ctr">
+                      <a:solidFill>
+                        <a:srgbClr val="D6DBE8"/>
+                      </a:solidFill>
+                      <a:prstDash val="solid"/>
+                      <a:round/>
+                      <a:headEnd type="none" w="med" len="med"/>
+                      <a:tailEnd type="none" w="med" len="med"/>
+                    </a:lnL>
+                    <a:lnR w="6350" cap="flat" cmpd="sng" algn="ctr">
+                      <a:solidFill>
+                        <a:srgbClr val="D6DBE8"/>
+                      </a:solidFill>
+                      <a:prstDash val="solid"/>
+                      <a:round/>
+                      <a:headEnd type="none" w="med" len="med"/>
+                      <a:tailEnd type="none" w="med" len="med"/>
+                    </a:lnR>
+                    <a:lnT w="6350" cap="flat" cmpd="sng" algn="ctr">
+                      <a:solidFill>
+                        <a:srgbClr val="D6DBE8"/>
+                      </a:solidFill>
+                      <a:prstDash val="solid"/>
+                      <a:round/>
+                      <a:headEnd type="none" w="med" len="med"/>
+                      <a:tailEnd type="none" w="med" len="med"/>
+                    </a:lnT>
+                    <a:lnB w="6350" cap="flat" cmpd="sng" algn="ctr">
+                      <a:solidFill>
+                        <a:srgbClr val="D6DBE8"/>
+                      </a:solidFill>
+                      <a:prstDash val="solid"/>
+                      <a:round/>
+                      <a:headEnd type="none" w="med" len="med"/>
+                      <a:tailEnd type="none" w="med" len="med"/>
+                    </a:lnB>
+                    <a:solidFill>
+                      <a:srgbClr val="18204A"/>
+                    </a:solidFill>
+                  </a:tcPr>
+                </a:tc>
+              </a:tr>
+              <a:tr h="310896">
+                <a:tc>
+                  <a:txBody>
+                    <a:bodyPr/>
+                    <a:lstStyle/>
+                    <a:p>
+                      <a:pPr algn="ctr" indent="0" marL="0">
+                        <a:buNone/>
+                      </a:pPr>
+                      <a:r>
+                        <a:rPr lang="en-US" sz="1300" dirty="0">
+                          <a:solidFill>
+                            <a:srgbClr val="3B4A7A"/>
+                          </a:solidFill>
+                          <a:latin typeface="Calibri" pitchFamily="34" charset="0"/>
+                          <a:ea typeface="Calibri" pitchFamily="34" charset="-122"/>
+                          <a:cs typeface="Calibri" pitchFamily="34" charset="-120"/>
+                        </a:rPr>
+                        <a:t>forward, fixed vector</a:t>
+                      </a:r>
+                      <a:endParaRPr lang="en-US" sz="1300" dirty="0">
+                        <a:latin typeface="Calibri" charset="0"/>
+                        <a:ea typeface="Calibri" charset="0"/>
+                        <a:cs typeface="Calibri" charset="0"/>
+                      </a:endParaRPr>
+                    </a:p>
+                  </a:txBody>
+                  <a:tcPr marL="91440" marR="91440" marT="45720" marB="45720" anchor="ctr">
+                    <a:lnL w="6350" cap="flat" cmpd="sng" algn="ctr">
+                      <a:solidFill>
+                        <a:srgbClr val="D6DBE8"/>
+                      </a:solidFill>
+                      <a:prstDash val="solid"/>
+                      <a:round/>
+                      <a:headEnd type="none" w="med" len="med"/>
+                      <a:tailEnd type="none" w="med" len="med"/>
+                    </a:lnL>
+                    <a:lnR w="6350" cap="flat" cmpd="sng" algn="ctr">
+                      <a:solidFill>
+                        <a:srgbClr val="D6DBE8"/>
+                      </a:solidFill>
+                      <a:prstDash val="solid"/>
+                      <a:round/>
+                      <a:headEnd type="none" w="med" len="med"/>
+                      <a:tailEnd type="none" w="med" len="med"/>
+                    </a:lnR>
+                    <a:lnT w="6350" cap="flat" cmpd="sng" algn="ctr">
+                      <a:solidFill>
+                        <a:srgbClr val="D6DBE8"/>
+                      </a:solidFill>
+                      <a:prstDash val="solid"/>
+                      <a:round/>
+                      <a:headEnd type="none" w="med" len="med"/>
+                      <a:tailEnd type="none" w="med" len="med"/>
+                    </a:lnT>
+                    <a:lnB w="6350" cap="flat" cmpd="sng" algn="ctr">
+                      <a:solidFill>
+                        <a:srgbClr val="D6DBE8"/>
+                      </a:solidFill>
+                      <a:prstDash val="solid"/>
+                      <a:round/>
+                      <a:headEnd type="none" w="med" len="med"/>
+                      <a:tailEnd type="none" w="med" len="med"/>
+                    </a:lnB>
+                  </a:tcPr>
+                </a:tc>
+                <a:tc>
+                  <a:txBody>
+                    <a:bodyPr/>
+                    <a:lstStyle/>
+                    <a:p>
+                      <a:pPr algn="ctr" indent="0" marL="0">
+                        <a:buNone/>
+                      </a:pPr>
+                      <a:r>
+                        <a:rPr lang="en-US" sz="1300" b="1" dirty="0">
+                          <a:solidFill>
+                            <a:srgbClr val="C44E52"/>
+                          </a:solidFill>
+                          <a:latin typeface="Calibri" pitchFamily="34" charset="0"/>
+                          <a:ea typeface="Calibri" pitchFamily="34" charset="-122"/>
+                          <a:cs typeface="Calibri" pitchFamily="34" charset="-120"/>
+                        </a:rPr>
+                        <a:t>2.61</a:t>
+                      </a:r>
+                      <a:endParaRPr lang="en-US" sz="1300" dirty="0">
+                        <a:latin typeface="Calibri" charset="0"/>
+                        <a:ea typeface="Calibri" charset="0"/>
+                        <a:cs typeface="Calibri" charset="0"/>
+                      </a:endParaRPr>
+                    </a:p>
+                  </a:txBody>
+                  <a:tcPr marL="91440" marR="91440" marT="45720" marB="45720" anchor="ctr">
+                    <a:lnL w="6350" cap="flat" cmpd="sng" algn="ctr">
+                      <a:solidFill>
+                        <a:srgbClr val="D6DBE8"/>
+                      </a:solidFill>
+                      <a:prstDash val="solid"/>
+                      <a:round/>
+                      <a:headEnd type="none" w="med" len="med"/>
+                      <a:tailEnd type="none" w="med" len="med"/>
+                    </a:lnL>
+                    <a:lnR w="6350" cap="flat" cmpd="sng" algn="ctr">
+                      <a:solidFill>
+                        <a:srgbClr val="D6DBE8"/>
+                      </a:solidFill>
+                      <a:prstDash val="solid"/>
+                      <a:round/>
+                      <a:headEnd type="none" w="med" len="med"/>
+                      <a:tailEnd type="none" w="med" len="med"/>
+                    </a:lnR>
+                    <a:lnT w="6350" cap="flat" cmpd="sng" algn="ctr">
+                      <a:solidFill>
+                        <a:srgbClr val="D6DBE8"/>
+                      </a:solidFill>
+                      <a:prstDash val="solid"/>
+                      <a:round/>
+                      <a:headEnd type="none" w="med" len="med"/>
+                      <a:tailEnd type="none" w="med" len="med"/>
+                    </a:lnT>
+                    <a:lnB w="6350" cap="flat" cmpd="sng" algn="ctr">
+                      <a:solidFill>
+                        <a:srgbClr val="D6DBE8"/>
+                      </a:solidFill>
+                      <a:prstDash val="solid"/>
+                      <a:round/>
+                      <a:headEnd type="none" w="med" len="med"/>
+                      <a:tailEnd type="none" w="med" len="med"/>
+                    </a:lnB>
+                  </a:tcPr>
+                </a:tc>
+                <a:tc>
+                  <a:txBody>
+                    <a:bodyPr/>
+                    <a:lstStyle/>
+                    <a:p>
+                      <a:pPr algn="ctr" indent="0" marL="0">
+                        <a:buNone/>
+                      </a:pPr>
+                      <a:r>
+                        <a:rPr lang="en-US" sz="1300" dirty="0">
+                          <a:solidFill>
+                            <a:srgbClr val="3B4A7A"/>
+                          </a:solidFill>
+                          <a:latin typeface="Calibri" pitchFamily="34" charset="0"/>
+                          <a:ea typeface="Calibri" pitchFamily="34" charset="-122"/>
+                          <a:cs typeface="Calibri" pitchFamily="34" charset="-120"/>
+                        </a:rPr>
+                        <a:t>2.26</a:t>
+                      </a:r>
+                      <a:endParaRPr lang="en-US" sz="1300" dirty="0">
+                        <a:latin typeface="Calibri" charset="0"/>
+                        <a:ea typeface="Calibri" charset="0"/>
+                        <a:cs typeface="Calibri" charset="0"/>
+                      </a:endParaRPr>
+                    </a:p>
+                  </a:txBody>
+                  <a:tcPr marL="91440" marR="91440" marT="45720" marB="45720" anchor="ctr">
+                    <a:lnL w="6350" cap="flat" cmpd="sng" algn="ctr">
+                      <a:solidFill>
+                        <a:srgbClr val="D6DBE8"/>
+                      </a:solidFill>
+                      <a:prstDash val="solid"/>
+                      <a:round/>
+                      <a:headEnd type="none" w="med" len="med"/>
+                      <a:tailEnd type="none" w="med" len="med"/>
+                    </a:lnL>
+                    <a:lnR w="6350" cap="flat" cmpd="sng" algn="ctr">
+                      <a:solidFill>
+                        <a:srgbClr val="D6DBE8"/>
+                      </a:solidFill>
+                      <a:prstDash val="solid"/>
+                      <a:round/>
+                      <a:headEnd type="none" w="med" len="med"/>
+                      <a:tailEnd type="none" w="med" len="med"/>
+                    </a:lnR>
+                    <a:lnT w="6350" cap="flat" cmpd="sng" algn="ctr">
+                      <a:solidFill>
+                        <a:srgbClr val="D6DBE8"/>
+                      </a:solidFill>
+                      <a:prstDash val="solid"/>
+                      <a:round/>
+                      <a:headEnd type="none" w="med" len="med"/>
+                      <a:tailEnd type="none" w="med" len="med"/>
+                    </a:lnT>
+                    <a:lnB w="6350" cap="flat" cmpd="sng" algn="ctr">
+                      <a:solidFill>
+                        <a:srgbClr val="D6DBE8"/>
+                      </a:solidFill>
+                      <a:prstDash val="solid"/>
+                      <a:round/>
+                      <a:headEnd type="none" w="med" len="med"/>
+                      <a:tailEnd type="none" w="med" len="med"/>
+                    </a:lnB>
+                  </a:tcPr>
+                </a:tc>
+                <a:tc>
+                  <a:txBody>
+                    <a:bodyPr/>
+                    <a:lstStyle/>
+                    <a:p>
+                      <a:pPr algn="ctr" indent="0" marL="0">
+                        <a:buNone/>
+                      </a:pPr>
+                      <a:r>
+                        <a:rPr lang="en-US" sz="1300" dirty="0">
+                          <a:solidFill>
+                            <a:srgbClr val="3B4A7A"/>
+                          </a:solidFill>
+                          <a:latin typeface="Calibri" pitchFamily="34" charset="0"/>
+                          <a:ea typeface="Calibri" pitchFamily="34" charset="-122"/>
+                          <a:cs typeface="Calibri" pitchFamily="34" charset="-120"/>
+                        </a:rPr>
+                        <a:t>15.103</a:t>
+                      </a:r>
+                      <a:endParaRPr lang="en-US" sz="1300" dirty="0">
+                        <a:latin typeface="Calibri" charset="0"/>
+                        <a:ea typeface="Calibri" charset="0"/>
+                        <a:cs typeface="Calibri" charset="0"/>
+                      </a:endParaRPr>
+                    </a:p>
+                  </a:txBody>
+                  <a:tcPr marL="91440" marR="91440" marT="45720" marB="45720" anchor="ctr">
+                    <a:lnL w="6350" cap="flat" cmpd="sng" algn="ctr">
+                      <a:solidFill>
+                        <a:srgbClr val="D6DBE8"/>
+                      </a:solidFill>
+                      <a:prstDash val="solid"/>
+                      <a:round/>
+                      <a:headEnd type="none" w="med" len="med"/>
+                      <a:tailEnd type="none" w="med" len="med"/>
+                    </a:lnL>
+                    <a:lnR w="6350" cap="flat" cmpd="sng" algn="ctr">
+                      <a:solidFill>
+                        <a:srgbClr val="D6DBE8"/>
+                      </a:solidFill>
+                      <a:prstDash val="solid"/>
+                      <a:round/>
+                      <a:headEnd type="none" w="med" len="med"/>
+                      <a:tailEnd type="none" w="med" len="med"/>
+                    </a:lnR>
+                    <a:lnT w="6350" cap="flat" cmpd="sng" algn="ctr">
+                      <a:solidFill>
+                        <a:srgbClr val="D6DBE8"/>
+                      </a:solidFill>
+                      <a:prstDash val="solid"/>
+                      <a:round/>
+                      <a:headEnd type="none" w="med" len="med"/>
+                      <a:tailEnd type="none" w="med" len="med"/>
+                    </a:lnT>
+                    <a:lnB w="6350" cap="flat" cmpd="sng" algn="ctr">
+                      <a:solidFill>
+                        <a:srgbClr val="D6DBE8"/>
+                      </a:solidFill>
+                      <a:prstDash val="solid"/>
+                      <a:round/>
+                      <a:headEnd type="none" w="med" len="med"/>
+                      <a:tailEnd type="none" w="med" len="med"/>
+                    </a:lnB>
+                  </a:tcPr>
+                </a:tc>
+              </a:tr>
+              <a:tr h="310896">
+                <a:tc>
+                  <a:txBody>
+                    <a:bodyPr/>
+                    <a:lstStyle/>
+                    <a:p>
+                      <a:pPr algn="ctr" indent="0" marL="0">
+                        <a:buNone/>
+                      </a:pPr>
+                      <a:r>
+                        <a:rPr lang="en-US" sz="1300" dirty="0">
+                          <a:solidFill>
+                            <a:srgbClr val="3B4A7A"/>
+                          </a:solidFill>
+                          <a:latin typeface="Calibri" pitchFamily="34" charset="0"/>
+                          <a:ea typeface="Calibri" pitchFamily="34" charset="-122"/>
+                          <a:cs typeface="Calibri" pitchFamily="34" charset="-120"/>
+                        </a:rPr>
+                        <a:t>forward, + attention</a:t>
+                      </a:r>
+                      <a:endParaRPr lang="en-US" sz="1300" dirty="0">
+                        <a:latin typeface="Calibri" charset="0"/>
+                        <a:ea typeface="Calibri" charset="0"/>
+                        <a:cs typeface="Calibri" charset="0"/>
+                      </a:endParaRPr>
+                    </a:p>
+                  </a:txBody>
+                  <a:tcPr marL="91440" marR="91440" marT="45720" marB="45720" anchor="ctr">
+                    <a:lnL w="6350" cap="flat" cmpd="sng" algn="ctr">
+                      <a:solidFill>
+                        <a:srgbClr val="D6DBE8"/>
+                      </a:solidFill>
+                      <a:prstDash val="solid"/>
+                      <a:round/>
+                      <a:headEnd type="none" w="med" len="med"/>
+                      <a:tailEnd type="none" w="med" len="med"/>
+                    </a:lnL>
+                    <a:lnR w="6350" cap="flat" cmpd="sng" algn="ctr">
+                      <a:solidFill>
+                        <a:srgbClr val="D6DBE8"/>
+                      </a:solidFill>
+                      <a:prstDash val="solid"/>
+                      <a:round/>
+                      <a:headEnd type="none" w="med" len="med"/>
+                      <a:tailEnd type="none" w="med" len="med"/>
+                    </a:lnR>
+                    <a:lnT w="6350" cap="flat" cmpd="sng" algn="ctr">
+                      <a:solidFill>
+                        <a:srgbClr val="D6DBE8"/>
+                      </a:solidFill>
+                      <a:prstDash val="solid"/>
+                      <a:round/>
+                      <a:headEnd type="none" w="med" len="med"/>
+                      <a:tailEnd type="none" w="med" len="med"/>
+                    </a:lnT>
+                    <a:lnB w="6350" cap="flat" cmpd="sng" algn="ctr">
+                      <a:solidFill>
+                        <a:srgbClr val="D6DBE8"/>
+                      </a:solidFill>
+                      <a:prstDash val="solid"/>
+                      <a:round/>
+                      <a:headEnd type="none" w="med" len="med"/>
+                      <a:tailEnd type="none" w="med" len="med"/>
+                    </a:lnB>
+                  </a:tcPr>
+                </a:tc>
+                <a:tc>
+                  <a:txBody>
+                    <a:bodyPr/>
+                    <a:lstStyle/>
+                    <a:p>
+                      <a:pPr algn="ctr" indent="0" marL="0">
+                        <a:buNone/>
+                      </a:pPr>
+                      <a:r>
+                        <a:rPr lang="en-US" sz="1300" b="1" dirty="0">
+                          <a:solidFill>
+                            <a:srgbClr val="C44E52"/>
+                          </a:solidFill>
+                          <a:latin typeface="Calibri" pitchFamily="34" charset="0"/>
+                          <a:ea typeface="Calibri" pitchFamily="34" charset="-122"/>
+                          <a:cs typeface="Calibri" pitchFamily="34" charset="-120"/>
+                        </a:rPr>
+                        <a:t>23.90</a:t>
+                      </a:r>
+                      <a:endParaRPr lang="en-US" sz="1300" dirty="0">
+                        <a:latin typeface="Calibri" charset="0"/>
+                        <a:ea typeface="Calibri" charset="0"/>
+                        <a:cs typeface="Calibri" charset="0"/>
+                      </a:endParaRPr>
+                    </a:p>
+                  </a:txBody>
+                  <a:tcPr marL="91440" marR="91440" marT="45720" marB="45720" anchor="ctr">
+                    <a:lnL w="6350" cap="flat" cmpd="sng" algn="ctr">
+                      <a:solidFill>
+                        <a:srgbClr val="D6DBE8"/>
+                      </a:solidFill>
+                      <a:prstDash val="solid"/>
+                      <a:round/>
+                      <a:headEnd type="none" w="med" len="med"/>
+                      <a:tailEnd type="none" w="med" len="med"/>
+                    </a:lnL>
+                    <a:lnR w="6350" cap="flat" cmpd="sng" algn="ctr">
+                      <a:solidFill>
+                        <a:srgbClr val="D6DBE8"/>
+                      </a:solidFill>
+                      <a:prstDash val="solid"/>
+                      <a:round/>
+                      <a:headEnd type="none" w="med" len="med"/>
+                      <a:tailEnd type="none" w="med" len="med"/>
+                    </a:lnR>
+                    <a:lnT w="6350" cap="flat" cmpd="sng" algn="ctr">
+                      <a:solidFill>
+                        <a:srgbClr val="D6DBE8"/>
+                      </a:solidFill>
+                      <a:prstDash val="solid"/>
+                      <a:round/>
+                      <a:headEnd type="none" w="med" len="med"/>
+                      <a:tailEnd type="none" w="med" len="med"/>
+                    </a:lnT>
+                    <a:lnB w="6350" cap="flat" cmpd="sng" algn="ctr">
+                      <a:solidFill>
+                        <a:srgbClr val="D6DBE8"/>
+                      </a:solidFill>
+                      <a:prstDash val="solid"/>
+                      <a:round/>
+                      <a:headEnd type="none" w="med" len="med"/>
+                      <a:tailEnd type="none" w="med" len="med"/>
+                    </a:lnB>
+                  </a:tcPr>
+                </a:tc>
+                <a:tc>
+                  <a:txBody>
+                    <a:bodyPr/>
+                    <a:lstStyle/>
+                    <a:p>
+                      <a:pPr algn="ctr" indent="0" marL="0">
+                        <a:buNone/>
+                      </a:pPr>
+                      <a:r>
+                        <a:rPr lang="en-US" sz="1300" dirty="0">
+                          <a:solidFill>
+                            <a:srgbClr val="3B4A7A"/>
+                          </a:solidFill>
+                          <a:latin typeface="Calibri" pitchFamily="34" charset="0"/>
+                          <a:ea typeface="Calibri" pitchFamily="34" charset="-122"/>
+                          <a:cs typeface="Calibri" pitchFamily="34" charset="-120"/>
+                        </a:rPr>
+                        <a:t>23.17</a:t>
+                      </a:r>
+                      <a:endParaRPr lang="en-US" sz="1300" dirty="0">
+                        <a:latin typeface="Calibri" charset="0"/>
+                        <a:ea typeface="Calibri" charset="0"/>
+                        <a:cs typeface="Calibri" charset="0"/>
+                      </a:endParaRPr>
+                    </a:p>
+                  </a:txBody>
+                  <a:tcPr marL="91440" marR="91440" marT="45720" marB="45720" anchor="ctr">
+                    <a:lnL w="6350" cap="flat" cmpd="sng" algn="ctr">
+                      <a:solidFill>
+                        <a:srgbClr val="D6DBE8"/>
+                      </a:solidFill>
+                      <a:prstDash val="solid"/>
+                      <a:round/>
+                      <a:headEnd type="none" w="med" len="med"/>
+                      <a:tailEnd type="none" w="med" len="med"/>
+                    </a:lnL>
+                    <a:lnR w="6350" cap="flat" cmpd="sng" algn="ctr">
+                      <a:solidFill>
+                        <a:srgbClr val="D6DBE8"/>
+                      </a:solidFill>
+                      <a:prstDash val="solid"/>
+                      <a:round/>
+                      <a:headEnd type="none" w="med" len="med"/>
+                      <a:tailEnd type="none" w="med" len="med"/>
+                    </a:lnR>
+                    <a:lnT w="6350" cap="flat" cmpd="sng" algn="ctr">
+                      <a:solidFill>
+                        <a:srgbClr val="D6DBE8"/>
+                      </a:solidFill>
+                      <a:prstDash val="solid"/>
+                      <a:round/>
+                      <a:headEnd type="none" w="med" len="med"/>
+                      <a:tailEnd type="none" w="med" len="med"/>
+                    </a:lnT>
+                    <a:lnB w="6350" cap="flat" cmpd="sng" algn="ctr">
+                      <a:solidFill>
+                        <a:srgbClr val="D6DBE8"/>
+                      </a:solidFill>
+                      <a:prstDash val="solid"/>
+                      <a:round/>
+                      <a:headEnd type="none" w="med" len="med"/>
+                      <a:tailEnd type="none" w="med" len="med"/>
+                    </a:lnB>
+                  </a:tcPr>
+                </a:tc>
+                <a:tc>
+                  <a:txBody>
+                    <a:bodyPr/>
+                    <a:lstStyle/>
+                    <a:p>
+                      <a:pPr algn="ctr" indent="0" marL="0">
+                        <a:buNone/>
+                      </a:pPr>
+                      <a:r>
+                        <a:rPr lang="en-US" sz="1300" dirty="0">
+                          <a:solidFill>
+                            <a:srgbClr val="3B4A7A"/>
+                          </a:solidFill>
+                          <a:latin typeface="Calibri" pitchFamily="34" charset="0"/>
+                          <a:ea typeface="Calibri" pitchFamily="34" charset="-122"/>
+                          <a:cs typeface="Calibri" pitchFamily="34" charset="-120"/>
+                        </a:rPr>
+                        <a:t>6.282</a:t>
+                      </a:r>
+                      <a:endParaRPr lang="en-US" sz="1300" dirty="0">
+                        <a:latin typeface="Calibri" charset="0"/>
+                        <a:ea typeface="Calibri" charset="0"/>
+                        <a:cs typeface="Calibri" charset="0"/>
+                      </a:endParaRPr>
+                    </a:p>
+                  </a:txBody>
+                  <a:tcPr marL="91440" marR="91440" marT="45720" marB="45720" anchor="ctr">
+                    <a:lnL w="6350" cap="flat" cmpd="sng" algn="ctr">
+                      <a:solidFill>
+                        <a:srgbClr val="D6DBE8"/>
+                      </a:solidFill>
+                      <a:prstDash val="solid"/>
+                      <a:round/>
+                      <a:headEnd type="none" w="med" len="med"/>
+                      <a:tailEnd type="none" w="med" len="med"/>
+                    </a:lnL>
+                    <a:lnR w="6350" cap="flat" cmpd="sng" algn="ctr">
+                      <a:solidFill>
+                        <a:srgbClr val="D6DBE8"/>
+                      </a:solidFill>
+                      <a:prstDash val="solid"/>
+                      <a:round/>
+                      <a:headEnd type="none" w="med" len="med"/>
+                      <a:tailEnd type="none" w="med" len="med"/>
+                    </a:lnR>
+                    <a:lnT w="6350" cap="flat" cmpd="sng" algn="ctr">
+                      <a:solidFill>
+                        <a:srgbClr val="D6DBE8"/>
+                      </a:solidFill>
+                      <a:prstDash val="solid"/>
+                      <a:round/>
+                      <a:headEnd type="none" w="med" len="med"/>
+                      <a:tailEnd type="none" w="med" len="med"/>
+                    </a:lnT>
+                    <a:lnB w="6350" cap="flat" cmpd="sng" algn="ctr">
+                      <a:solidFill>
+                        <a:srgbClr val="D6DBE8"/>
+                      </a:solidFill>
+                      <a:prstDash val="solid"/>
+                      <a:round/>
+                      <a:headEnd type="none" w="med" len="med"/>
+                      <a:tailEnd type="none" w="med" len="med"/>
+                    </a:lnB>
+                  </a:tcPr>
+                </a:tc>
+              </a:tr>
+              <a:tr h="310896">
+                <a:tc>
+                  <a:txBody>
+                    <a:bodyPr/>
+                    <a:lstStyle/>
+                    <a:p>
+                      <a:pPr algn="ctr" indent="0" marL="0">
+                        <a:buNone/>
+                      </a:pPr>
+                      <a:r>
+                        <a:rPr lang="en-US" sz="1300" dirty="0">
+                          <a:solidFill>
+                            <a:srgbClr val="3B4A7A"/>
+                          </a:solidFill>
+                          <a:latin typeface="Calibri" pitchFamily="34" charset="0"/>
+                          <a:ea typeface="Calibri" pitchFamily="34" charset="-122"/>
+                          <a:cs typeface="Calibri" pitchFamily="34" charset="-120"/>
+                        </a:rPr>
+                        <a:t>reversed, fixed vector</a:t>
+                      </a:r>
+                      <a:endParaRPr lang="en-US" sz="1300" dirty="0">
+                        <a:latin typeface="Calibri" charset="0"/>
+                        <a:ea typeface="Calibri" charset="0"/>
+                        <a:cs typeface="Calibri" charset="0"/>
+                      </a:endParaRPr>
+                    </a:p>
+                  </a:txBody>
+                  <a:tcPr marL="91440" marR="91440" marT="45720" marB="45720" anchor="ctr">
+                    <a:lnL w="6350" cap="flat" cmpd="sng" algn="ctr">
+                      <a:solidFill>
+                        <a:srgbClr val="D6DBE8"/>
+                      </a:solidFill>
+                      <a:prstDash val="solid"/>
+                      <a:round/>
+                      <a:headEnd type="none" w="med" len="med"/>
+                      <a:tailEnd type="none" w="med" len="med"/>
+                    </a:lnL>
+                    <a:lnR w="6350" cap="flat" cmpd="sng" algn="ctr">
+                      <a:solidFill>
+                        <a:srgbClr val="D6DBE8"/>
+                      </a:solidFill>
+                      <a:prstDash val="solid"/>
+                      <a:round/>
+                      <a:headEnd type="none" w="med" len="med"/>
+                      <a:tailEnd type="none" w="med" len="med"/>
+                    </a:lnR>
+                    <a:lnT w="6350" cap="flat" cmpd="sng" algn="ctr">
+                      <a:solidFill>
+                        <a:srgbClr val="D6DBE8"/>
+                      </a:solidFill>
+                      <a:prstDash val="solid"/>
+                      <a:round/>
+                      <a:headEnd type="none" w="med" len="med"/>
+                      <a:tailEnd type="none" w="med" len="med"/>
+                    </a:lnT>
+                    <a:lnB w="6350" cap="flat" cmpd="sng" algn="ctr">
+                      <a:solidFill>
+                        <a:srgbClr val="D6DBE8"/>
+                      </a:solidFill>
+                      <a:prstDash val="solid"/>
+                      <a:round/>
+                      <a:headEnd type="none" w="med" len="med"/>
+                      <a:tailEnd type="none" w="med" len="med"/>
+                    </a:lnB>
+                  </a:tcPr>
+                </a:tc>
+                <a:tc>
+                  <a:txBody>
+                    <a:bodyPr/>
+                    <a:lstStyle/>
+                    <a:p>
+                      <a:pPr algn="ctr" indent="0" marL="0">
+                        <a:buNone/>
+                      </a:pPr>
+                      <a:r>
+                        <a:rPr lang="en-US" sz="1300" b="1" dirty="0">
+                          <a:solidFill>
+                            <a:srgbClr val="4C72B0"/>
+                          </a:solidFill>
+                          <a:latin typeface="Calibri" pitchFamily="34" charset="0"/>
+                          <a:ea typeface="Calibri" pitchFamily="34" charset="-122"/>
+                          <a:cs typeface="Calibri" pitchFamily="34" charset="-120"/>
+                        </a:rPr>
+                        <a:t>15.35</a:t>
+                      </a:r>
+                      <a:endParaRPr lang="en-US" sz="1300" dirty="0">
+                        <a:latin typeface="Calibri" charset="0"/>
+                        <a:ea typeface="Calibri" charset="0"/>
+                        <a:cs typeface="Calibri" charset="0"/>
+                      </a:endParaRPr>
+                    </a:p>
+                  </a:txBody>
+                  <a:tcPr marL="91440" marR="91440" marT="45720" marB="45720" anchor="ctr">
+                    <a:lnL w="6350" cap="flat" cmpd="sng" algn="ctr">
+                      <a:solidFill>
+                        <a:srgbClr val="D6DBE8"/>
+                      </a:solidFill>
+                      <a:prstDash val="solid"/>
+                      <a:round/>
+                      <a:headEnd type="none" w="med" len="med"/>
+                      <a:tailEnd type="none" w="med" len="med"/>
+                    </a:lnL>
+                    <a:lnR w="6350" cap="flat" cmpd="sng" algn="ctr">
+                      <a:solidFill>
+                        <a:srgbClr val="D6DBE8"/>
+                      </a:solidFill>
+                      <a:prstDash val="solid"/>
+                      <a:round/>
+                      <a:headEnd type="none" w="med" len="med"/>
+                      <a:tailEnd type="none" w="med" len="med"/>
+                    </a:lnR>
+                    <a:lnT w="6350" cap="flat" cmpd="sng" algn="ctr">
+                      <a:solidFill>
+                        <a:srgbClr val="D6DBE8"/>
+                      </a:solidFill>
+                      <a:prstDash val="solid"/>
+                      <a:round/>
+                      <a:headEnd type="none" w="med" len="med"/>
+                      <a:tailEnd type="none" w="med" len="med"/>
+                    </a:lnT>
+                    <a:lnB w="6350" cap="flat" cmpd="sng" algn="ctr">
+                      <a:solidFill>
+                        <a:srgbClr val="D6DBE8"/>
+                      </a:solidFill>
+                      <a:prstDash val="solid"/>
+                      <a:round/>
+                      <a:headEnd type="none" w="med" len="med"/>
+                      <a:tailEnd type="none" w="med" len="med"/>
+                    </a:lnB>
+                  </a:tcPr>
+                </a:tc>
+                <a:tc>
+                  <a:txBody>
+                    <a:bodyPr/>
+                    <a:lstStyle/>
+                    <a:p>
+                      <a:pPr algn="ctr" indent="0" marL="0">
+                        <a:buNone/>
+                      </a:pPr>
+                      <a:r>
+                        <a:rPr lang="en-US" sz="1300" dirty="0">
+                          <a:solidFill>
+                            <a:srgbClr val="3B4A7A"/>
+                          </a:solidFill>
+                          <a:latin typeface="Calibri" pitchFamily="34" charset="0"/>
+                          <a:ea typeface="Calibri" pitchFamily="34" charset="-122"/>
+                          <a:cs typeface="Calibri" pitchFamily="34" charset="-120"/>
+                        </a:rPr>
+                        <a:t>14.96</a:t>
+                      </a:r>
+                      <a:endParaRPr lang="en-US" sz="1300" dirty="0">
+                        <a:latin typeface="Calibri" charset="0"/>
+                        <a:ea typeface="Calibri" charset="0"/>
+                        <a:cs typeface="Calibri" charset="0"/>
+                      </a:endParaRPr>
+                    </a:p>
+                  </a:txBody>
+                  <a:tcPr marL="91440" marR="91440" marT="45720" marB="45720" anchor="ctr">
+                    <a:lnL w="6350" cap="flat" cmpd="sng" algn="ctr">
+                      <a:solidFill>
+                        <a:srgbClr val="D6DBE8"/>
+                      </a:solidFill>
+                      <a:prstDash val="solid"/>
+                      <a:round/>
+                      <a:headEnd type="none" w="med" len="med"/>
+                      <a:tailEnd type="none" w="med" len="med"/>
+                    </a:lnL>
+                    <a:lnR w="6350" cap="flat" cmpd="sng" algn="ctr">
+                      <a:solidFill>
+                        <a:srgbClr val="D6DBE8"/>
+                      </a:solidFill>
+                      <a:prstDash val="solid"/>
+                      <a:round/>
+                      <a:headEnd type="none" w="med" len="med"/>
+                      <a:tailEnd type="none" w="med" len="med"/>
+                    </a:lnR>
+                    <a:lnT w="6350" cap="flat" cmpd="sng" algn="ctr">
+                      <a:solidFill>
+                        <a:srgbClr val="D6DBE8"/>
+                      </a:solidFill>
+                      <a:prstDash val="solid"/>
+                      <a:round/>
+                      <a:headEnd type="none" w="med" len="med"/>
+                      <a:tailEnd type="none" w="med" len="med"/>
+                    </a:lnT>
+                    <a:lnB w="6350" cap="flat" cmpd="sng" algn="ctr">
+                      <a:solidFill>
+                        <a:srgbClr val="D6DBE8"/>
+                      </a:solidFill>
+                      <a:prstDash val="solid"/>
+                      <a:round/>
+                      <a:headEnd type="none" w="med" len="med"/>
+                      <a:tailEnd type="none" w="med" len="med"/>
+                    </a:lnB>
+                  </a:tcPr>
+                </a:tc>
+                <a:tc>
+                  <a:txBody>
+                    <a:bodyPr/>
+                    <a:lstStyle/>
+                    <a:p>
+                      <a:pPr algn="ctr" indent="0" marL="0">
+                        <a:buNone/>
+                      </a:pPr>
+                      <a:r>
+                        <a:rPr lang="en-US" sz="1300" dirty="0">
+                          <a:solidFill>
+                            <a:srgbClr val="3B4A7A"/>
+                          </a:solidFill>
+                          <a:latin typeface="Calibri" pitchFamily="34" charset="0"/>
+                          <a:ea typeface="Calibri" pitchFamily="34" charset="-122"/>
+                          <a:cs typeface="Calibri" pitchFamily="34" charset="-120"/>
+                        </a:rPr>
+                        <a:t>9.014</a:t>
+                      </a:r>
+                      <a:endParaRPr lang="en-US" sz="1300" dirty="0">
+                        <a:latin typeface="Calibri" charset="0"/>
+                        <a:ea typeface="Calibri" charset="0"/>
+                        <a:cs typeface="Calibri" charset="0"/>
+                      </a:endParaRPr>
+                    </a:p>
+                  </a:txBody>
+                  <a:tcPr marL="91440" marR="91440" marT="45720" marB="45720" anchor="ctr">
+                    <a:lnL w="6350" cap="flat" cmpd="sng" algn="ctr">
+                      <a:solidFill>
+                        <a:srgbClr val="D6DBE8"/>
+                      </a:solidFill>
+                      <a:prstDash val="solid"/>
+                      <a:round/>
+                      <a:headEnd type="none" w="med" len="med"/>
+                      <a:tailEnd type="none" w="med" len="med"/>
+                    </a:lnL>
+                    <a:lnR w="6350" cap="flat" cmpd="sng" algn="ctr">
+                      <a:solidFill>
+                        <a:srgbClr val="D6DBE8"/>
+                      </a:solidFill>
+                      <a:prstDash val="solid"/>
+                      <a:round/>
+                      <a:headEnd type="none" w="med" len="med"/>
+                      <a:tailEnd type="none" w="med" len="med"/>
+                    </a:lnR>
+                    <a:lnT w="6350" cap="flat" cmpd="sng" algn="ctr">
+                      <a:solidFill>
+                        <a:srgbClr val="D6DBE8"/>
+                      </a:solidFill>
+                      <a:prstDash val="solid"/>
+                      <a:round/>
+                      <a:headEnd type="none" w="med" len="med"/>
+                      <a:tailEnd type="none" w="med" len="med"/>
+                    </a:lnT>
+                    <a:lnB w="6350" cap="flat" cmpd="sng" algn="ctr">
+                      <a:solidFill>
+                        <a:srgbClr val="D6DBE8"/>
+                      </a:solidFill>
+                      <a:prstDash val="solid"/>
+                      <a:round/>
+                      <a:headEnd type="none" w="med" len="med"/>
+                      <a:tailEnd type="none" w="med" len="med"/>
+                    </a:lnB>
+                  </a:tcPr>
+                </a:tc>
+              </a:tr>
+              <a:tr h="310896">
+                <a:tc>
+                  <a:txBody>
+                    <a:bodyPr/>
+                    <a:lstStyle/>
+                    <a:p>
+                      <a:pPr algn="ctr" indent="0" marL="0">
+                        <a:buNone/>
+                      </a:pPr>
+                      <a:r>
+                        <a:rPr lang="en-US" sz="1300" dirty="0">
+                          <a:solidFill>
+                            <a:srgbClr val="3B4A7A"/>
+                          </a:solidFill>
+                          <a:latin typeface="Calibri" pitchFamily="34" charset="0"/>
+                          <a:ea typeface="Calibri" pitchFamily="34" charset="-122"/>
+                          <a:cs typeface="Calibri" pitchFamily="34" charset="-120"/>
+                        </a:rPr>
+                        <a:t>reversed, + attention</a:t>
+                      </a:r>
+                      <a:endParaRPr lang="en-US" sz="1300" dirty="0">
+                        <a:latin typeface="Calibri" charset="0"/>
+                        <a:ea typeface="Calibri" charset="0"/>
+                        <a:cs typeface="Calibri" charset="0"/>
+                      </a:endParaRPr>
+                    </a:p>
+                  </a:txBody>
+                  <a:tcPr marL="91440" marR="91440" marT="45720" marB="45720" anchor="ctr">
+                    <a:lnL w="6350" cap="flat" cmpd="sng" algn="ctr">
+                      <a:solidFill>
+                        <a:srgbClr val="D6DBE8"/>
+                      </a:solidFill>
+                      <a:prstDash val="solid"/>
+                      <a:round/>
+                      <a:headEnd type="none" w="med" len="med"/>
+                      <a:tailEnd type="none" w="med" len="med"/>
+                    </a:lnL>
+                    <a:lnR w="6350" cap="flat" cmpd="sng" algn="ctr">
+                      <a:solidFill>
+                        <a:srgbClr val="D6DBE8"/>
+                      </a:solidFill>
+                      <a:prstDash val="solid"/>
+                      <a:round/>
+                      <a:headEnd type="none" w="med" len="med"/>
+                      <a:tailEnd type="none" w="med" len="med"/>
+                    </a:lnR>
+                    <a:lnT w="6350" cap="flat" cmpd="sng" algn="ctr">
+                      <a:solidFill>
+                        <a:srgbClr val="D6DBE8"/>
+                      </a:solidFill>
+                      <a:prstDash val="solid"/>
+                      <a:round/>
+                      <a:headEnd type="none" w="med" len="med"/>
+                      <a:tailEnd type="none" w="med" len="med"/>
+                    </a:lnT>
+                    <a:lnB w="6350" cap="flat" cmpd="sng" algn="ctr">
+                      <a:solidFill>
+                        <a:srgbClr val="D6DBE8"/>
+                      </a:solidFill>
+                      <a:prstDash val="solid"/>
+                      <a:round/>
+                      <a:headEnd type="none" w="med" len="med"/>
+                      <a:tailEnd type="none" w="med" len="med"/>
+                    </a:lnB>
+                  </a:tcPr>
+                </a:tc>
+                <a:tc>
+                  <a:txBody>
+                    <a:bodyPr/>
+                    <a:lstStyle/>
+                    <a:p>
+                      <a:pPr algn="ctr" indent="0" marL="0">
+                        <a:buNone/>
+                      </a:pPr>
+                      <a:r>
+                        <a:rPr lang="en-US" sz="1300" b="1" dirty="0">
+                          <a:solidFill>
+                            <a:srgbClr val="4C72B0"/>
+                          </a:solidFill>
+                          <a:latin typeface="Calibri" pitchFamily="34" charset="0"/>
+                          <a:ea typeface="Calibri" pitchFamily="34" charset="-122"/>
+                          <a:cs typeface="Calibri" pitchFamily="34" charset="-120"/>
+                        </a:rPr>
+                        <a:t>27.99</a:t>
+                      </a:r>
+                      <a:endParaRPr lang="en-US" sz="1300" dirty="0">
+                        <a:latin typeface="Calibri" charset="0"/>
+                        <a:ea typeface="Calibri" charset="0"/>
+                        <a:cs typeface="Calibri" charset="0"/>
+                      </a:endParaRPr>
+                    </a:p>
+                  </a:txBody>
+                  <a:tcPr marL="91440" marR="91440" marT="45720" marB="45720" anchor="ctr">
+                    <a:lnL w="6350" cap="flat" cmpd="sng" algn="ctr">
+                      <a:solidFill>
+                        <a:srgbClr val="D6DBE8"/>
+                      </a:solidFill>
+                      <a:prstDash val="solid"/>
+                      <a:round/>
+                      <a:headEnd type="none" w="med" len="med"/>
+                      <a:tailEnd type="none" w="med" len="med"/>
+                    </a:lnL>
+                    <a:lnR w="6350" cap="flat" cmpd="sng" algn="ctr">
+                      <a:solidFill>
+                        <a:srgbClr val="D6DBE8"/>
+                      </a:solidFill>
+                      <a:prstDash val="solid"/>
+                      <a:round/>
+                      <a:headEnd type="none" w="med" len="med"/>
+                      <a:tailEnd type="none" w="med" len="med"/>
+                    </a:lnR>
+                    <a:lnT w="6350" cap="flat" cmpd="sng" algn="ctr">
+                      <a:solidFill>
+                        <a:srgbClr val="D6DBE8"/>
+                      </a:solidFill>
+                      <a:prstDash val="solid"/>
+                      <a:round/>
+                      <a:headEnd type="none" w="med" len="med"/>
+                      <a:tailEnd type="none" w="med" len="med"/>
+                    </a:lnT>
+                    <a:lnB w="6350" cap="flat" cmpd="sng" algn="ctr">
+                      <a:solidFill>
+                        <a:srgbClr val="D6DBE8"/>
+                      </a:solidFill>
+                      <a:prstDash val="solid"/>
+                      <a:round/>
+                      <a:headEnd type="none" w="med" len="med"/>
+                      <a:tailEnd type="none" w="med" len="med"/>
+                    </a:lnB>
+                  </a:tcPr>
+                </a:tc>
+                <a:tc>
+                  <a:txBody>
+                    <a:bodyPr/>
+                    <a:lstStyle/>
+                    <a:p>
+                      <a:pPr algn="ctr" indent="0" marL="0">
+                        <a:buNone/>
+                      </a:pPr>
+                      <a:r>
+                        <a:rPr lang="en-US" sz="1300" dirty="0">
+                          <a:solidFill>
+                            <a:srgbClr val="3B4A7A"/>
+                          </a:solidFill>
+                          <a:latin typeface="Calibri" pitchFamily="34" charset="0"/>
+                          <a:ea typeface="Calibri" pitchFamily="34" charset="-122"/>
+                          <a:cs typeface="Calibri" pitchFamily="34" charset="-120"/>
+                        </a:rPr>
+                        <a:t>27.16</a:t>
+                      </a:r>
+                      <a:endParaRPr lang="en-US" sz="1300" dirty="0">
+                        <a:latin typeface="Calibri" charset="0"/>
+                        <a:ea typeface="Calibri" charset="0"/>
+                        <a:cs typeface="Calibri" charset="0"/>
+                      </a:endParaRPr>
+                    </a:p>
+                  </a:txBody>
+                  <a:tcPr marL="91440" marR="91440" marT="45720" marB="45720" anchor="ctr">
+                    <a:lnL w="6350" cap="flat" cmpd="sng" algn="ctr">
+                      <a:solidFill>
+                        <a:srgbClr val="D6DBE8"/>
+                      </a:solidFill>
+                      <a:prstDash val="solid"/>
+                      <a:round/>
+                      <a:headEnd type="none" w="med" len="med"/>
+                      <a:tailEnd type="none" w="med" len="med"/>
+                    </a:lnL>
+                    <a:lnR w="6350" cap="flat" cmpd="sng" algn="ctr">
+                      <a:solidFill>
+                        <a:srgbClr val="D6DBE8"/>
+                      </a:solidFill>
+                      <a:prstDash val="solid"/>
+                      <a:round/>
+                      <a:headEnd type="none" w="med" len="med"/>
+                      <a:tailEnd type="none" w="med" len="med"/>
+                    </a:lnR>
+                    <a:lnT w="6350" cap="flat" cmpd="sng" algn="ctr">
+                      <a:solidFill>
+                        <a:srgbClr val="D6DBE8"/>
+                      </a:solidFill>
+                      <a:prstDash val="solid"/>
+                      <a:round/>
+                      <a:headEnd type="none" w="med" len="med"/>
+                      <a:tailEnd type="none" w="med" len="med"/>
+                    </a:lnT>
+                    <a:lnB w="6350" cap="flat" cmpd="sng" algn="ctr">
+                      <a:solidFill>
+                        <a:srgbClr val="D6DBE8"/>
+                      </a:solidFill>
+                      <a:prstDash val="solid"/>
+                      <a:round/>
+                      <a:headEnd type="none" w="med" len="med"/>
+                      <a:tailEnd type="none" w="med" len="med"/>
+                    </a:lnB>
+                  </a:tcPr>
+                </a:tc>
+                <a:tc>
+                  <a:txBody>
+                    <a:bodyPr/>
+                    <a:lstStyle/>
+                    <a:p>
+                      <a:pPr algn="ctr" indent="0" marL="0">
+                        <a:buNone/>
+                      </a:pPr>
+                      <a:r>
+                        <a:rPr lang="en-US" sz="1300" dirty="0">
+                          <a:solidFill>
+                            <a:srgbClr val="3B4A7A"/>
+                          </a:solidFill>
+                          <a:latin typeface="Calibri" pitchFamily="34" charset="0"/>
+                          <a:ea typeface="Calibri" pitchFamily="34" charset="-122"/>
+                          <a:cs typeface="Calibri" pitchFamily="34" charset="-120"/>
+                        </a:rPr>
+                        <a:t>5.677</a:t>
+                      </a:r>
+                      <a:endParaRPr lang="en-US" sz="1300" dirty="0">
+                        <a:latin typeface="Calibri" charset="0"/>
+                        <a:ea typeface="Calibri" charset="0"/>
+                        <a:cs typeface="Calibri" charset="0"/>
+                      </a:endParaRPr>
+                    </a:p>
+                  </a:txBody>
+                  <a:tcPr marL="91440" marR="91440" marT="45720" marB="45720" anchor="ctr">
+                    <a:lnL w="6350" cap="flat" cmpd="sng" algn="ctr">
+                      <a:solidFill>
+                        <a:srgbClr val="D6DBE8"/>
+                      </a:solidFill>
+                      <a:prstDash val="solid"/>
+                      <a:round/>
+                      <a:headEnd type="none" w="med" len="med"/>
+                      <a:tailEnd type="none" w="med" len="med"/>
+                    </a:lnL>
+                    <a:lnR w="6350" cap="flat" cmpd="sng" algn="ctr">
+                      <a:solidFill>
+                        <a:srgbClr val="D6DBE8"/>
+                      </a:solidFill>
+                      <a:prstDash val="solid"/>
+                      <a:round/>
+                      <a:headEnd type="none" w="med" len="med"/>
+                      <a:tailEnd type="none" w="med" len="med"/>
+                    </a:lnR>
+                    <a:lnT w="6350" cap="flat" cmpd="sng" algn="ctr">
+                      <a:solidFill>
+                        <a:srgbClr val="D6DBE8"/>
+                      </a:solidFill>
+                      <a:prstDash val="solid"/>
+                      <a:round/>
+                      <a:headEnd type="none" w="med" len="med"/>
+                      <a:tailEnd type="none" w="med" len="med"/>
+                    </a:lnT>
+                    <a:lnB w="6350" cap="flat" cmpd="sng" algn="ctr">
+                      <a:solidFill>
+                        <a:srgbClr val="D6DBE8"/>
+                      </a:solidFill>
+                      <a:prstDash val="solid"/>
+                      <a:round/>
+                      <a:headEnd type="none" w="med" len="med"/>
+                      <a:tailEnd type="none" w="med" len="med"/>
+                    </a:lnB>
+                  </a:tcPr>
+                </a:tc>
+              </a:tr>
+            </a:tbl>
+          </a:graphicData>
+        </a:graphic>
+      </p:graphicFrame>
+      <p:sp>
+        <p:nvSpPr>
+          <p:cNvPr id="5" name="Text 2"/>
+          <p:cNvSpPr txBox="1"/>
           <p:nvPr/>
         </p:nvSpPr>
         <p:spPr>
           <a:xfrm>
-            <a:off x="548640" y="2377440"/>
-            <a:ext cx="11064240" cy="1188720"/>
-          </a:xfrm>
-          <a:prstGeom prst="roundRect">
-            <a:avLst>
-              <a:gd name="adj" fmla="val 7692"/>
-            </a:avLst>
-          </a:prstGeom>
-          <a:solidFill>
-            <a:srgbClr val="FFF4E5"/>
-          </a:solidFill>
-          <a:ln w="12700">
-            <a:solidFill>
-              <a:srgbClr val="E8A33D"/>
-            </a:solidFill>
-            <a:prstDash val="solid"/>
-          </a:ln>
-        </p:spPr>
-      </p:sp>
-      <p:sp>
-        <p:nvSpPr>
-          <p:cNvPr id="5" name="Text 3"/>
-          <p:cNvSpPr txBox="1"/>
-          <p:nvPr/>
-        </p:nvSpPr>
-        <p:spPr>
-          <a:xfrm>
-            <a:off x="822960" y="2697480"/>
-            <a:ext cx="10515600" cy="548640"/>
+            <a:off x="548640" y="3474720"/>
+            <a:ext cx="11064240" cy="1828800"/>
           </a:xfrm>
           <a:prstGeom prst="rect">
             <a:avLst/>
@@ -3449,30 +5583,76 @@
           <a:ln/>
         </p:spPr>
         <p:txBody>
-          <a:bodyPr wrap="square" lIns="0" tIns="0" rIns="0" bIns="0" rtlCol="0" anchor="ctr"/>
+          <a:bodyPr wrap="square" lIns="0" tIns="0" rIns="0" bIns="0" rtlCol="0" anchor="t"/>
           <a:lstStyle/>
           <a:p>
-            <a:pPr indent="0" marL="0">
-              <a:buNone/>
+            <a:pPr marL="342900" indent="-342900">
+              <a:spcAft>
+                <a:spcPts val="900"/>
+              </a:spcAft>
+              <a:buSzPct val="100000"/>
+              <a:buChar char="•"/>
             </a:pPr>
             <a:r>
-              <a:rPr lang="en-US" sz="1600" b="1" dirty="0">
+              <a:rPr lang="en-US" sz="1400" dirty="0">
                 <a:solidFill>
-                  <a:srgbClr val="8A5A12"/>
+                  <a:srgbClr val="3B4A7A"/>
                 </a:solidFill>
                 <a:latin typeface="Calibri" pitchFamily="34" charset="0"/>
                 <a:ea typeface="Calibri" pitchFamily="34" charset="-122"/>
                 <a:cs typeface="Calibri" pitchFamily="34" charset="-120"/>
               </a:rPr>
-              <a:t>Not yet run — make endterm-multi30k &amp;&amp; make results-endterm-multi30k</a:t>
-            </a:r>
-            <a:endParaRPr lang="en-US" sz="1600" dirty="0"/>
+              <a:t>Forward: fixed vector 2.61 → attention 23.90 (+21.29 BLEU).</a:t>
+            </a:r>
+            <a:endParaRPr lang="en-US" sz="1400" dirty="0"/>
+          </a:p>
+          <a:p>
+            <a:pPr marL="342900" indent="-342900">
+              <a:spcAft>
+                <a:spcPts val="900"/>
+              </a:spcAft>
+              <a:buSzPct val="100000"/>
+              <a:buChar char="•"/>
+            </a:pPr>
+            <a:r>
+              <a:rPr lang="en-US" sz="1400" dirty="0">
+                <a:solidFill>
+                  <a:srgbClr val="3B4A7A"/>
+                </a:solidFill>
+                <a:latin typeface="Calibri" pitchFamily="34" charset="0"/>
+                <a:ea typeface="Calibri" pitchFamily="34" charset="-122"/>
+                <a:cs typeface="Calibri" pitchFamily="34" charset="-120"/>
+              </a:rPr>
+              <a:t>Reversed: fixed vector 15.35 → attention 27.99 (+12.64 BLEU).</a:t>
+            </a:r>
+            <a:endParaRPr lang="en-US" sz="1400" dirty="0"/>
+          </a:p>
+          <a:p>
+            <a:pPr marL="342900" indent="-342900">
+              <a:spcAft>
+                <a:spcPts val="900"/>
+              </a:spcAft>
+              <a:buSzPct val="100000"/>
+              <a:buChar char="•"/>
+            </a:pPr>
+            <a:r>
+              <a:rPr lang="en-US" sz="1400" dirty="0">
+                <a:solidFill>
+                  <a:srgbClr val="3B4A7A"/>
+                </a:solidFill>
+                <a:latin typeface="Calibri" pitchFamily="34" charset="0"/>
+                <a:ea typeface="Calibri" pitchFamily="34" charset="-122"/>
+                <a:cs typeface="Calibri" pitchFamily="34" charset="-120"/>
+              </a:rPr>
+              <a:t>The REVERSAL GAP is +12.74 without attention and +4.09 with it — attention absorbs the paper's trick.</a:t>
+            </a:r>
+            <a:endParaRPr lang="en-US" sz="1400" dirty="0"/>
           </a:p>
         </p:txBody>
       </p:sp>
       <p:sp>
         <p:nvSpPr>
-          <p:cNvPr id="6" name="Text 4"/>
+          <p:cNvPr id="6" name="Text 3"/>
           <p:cNvSpPr txBox="1"/>
           <p:nvPr/>
         </p:nvSpPr>
@@ -3651,72 +5831,52 @@
           </a:p>
         </p:txBody>
       </p:sp>
-      <p:sp>
-        <p:nvSpPr>
-          <p:cNvPr id="5" name="Shape 3"/>
-          <p:cNvSpPr/>
+      <p:pic>
+        <p:nvPicPr>
+          <p:cNvPr id="5" name="Image 0" descr="/Users/rubenstalin/Library/Mobile Documents/com~apple~CloudDocs/Sem 7/Intro to ML/seq2seq-ee5180/results/wmt14_endterm/bottleneck_by_length.png">    </p:cNvPr>
+          <p:cNvPicPr>
+            <a:picLocks noChangeAspect="1"/>
+          </p:cNvPicPr>
           <p:nvPr/>
-        </p:nvSpPr>
+        </p:nvPicPr>
+        <p:blipFill>
+          <a:blip r:embed="rId1"/>
+          <a:srcRect l="0" r="0" t="0" b="0"/>
+          <a:stretch/>
+        </p:blipFill>
         <p:spPr>
           <a:xfrm>
-            <a:off x="548640" y="2377440"/>
-            <a:ext cx="11064240" cy="1188720"/>
-          </a:xfrm>
-          <a:prstGeom prst="roundRect">
-            <a:avLst>
-              <a:gd name="adj" fmla="val 7692"/>
-            </a:avLst>
-          </a:prstGeom>
-          <a:solidFill>
-            <a:srgbClr val="FFF4E5"/>
-          </a:solidFill>
-          <a:ln w="12700">
-            <a:solidFill>
-              <a:srgbClr val="E8A33D"/>
-            </a:solidFill>
-            <a:prstDash val="solid"/>
-          </a:ln>
-        </p:spPr>
-      </p:sp>
-      <p:sp>
-        <p:nvSpPr>
-          <p:cNvPr id="6" name="Text 4"/>
-          <p:cNvSpPr txBox="1"/>
-          <p:nvPr/>
-        </p:nvSpPr>
-        <p:spPr>
-          <a:xfrm>
-            <a:off x="822960" y="2697480"/>
-            <a:ext cx="10515600" cy="548640"/>
+            <a:off x="548640" y="2057400"/>
+            <a:ext cx="5486400" cy="3566160"/>
           </a:xfrm>
           <a:prstGeom prst="rect">
             <a:avLst/>
           </a:prstGeom>
-          <a:noFill/>
-          <a:ln/>
         </p:spPr>
-        <p:txBody>
-          <a:bodyPr wrap="square" lIns="0" tIns="0" rIns="0" bIns="0" rtlCol="0" anchor="ctr"/>
-          <a:lstStyle/>
-          <a:p>
-            <a:pPr indent="0" marL="0">
-              <a:buNone/>
-            </a:pPr>
-            <a:r>
-              <a:rPr lang="en-US" sz="1600" b="1" dirty="0">
-                <a:solidFill>
-                  <a:srgbClr val="8A5A12"/>
-                </a:solidFill>
-                <a:latin typeface="Calibri" pitchFamily="34" charset="0"/>
-                <a:ea typeface="Calibri" pitchFamily="34" charset="-122"/>
-                <a:cs typeface="Calibri" pitchFamily="34" charset="-120"/>
-              </a:rPr>
-              <a:t>Not yet run — make results-endterm-wmt results-endterm-multi30k</a:t>
-            </a:r>
-            <a:endParaRPr lang="en-US" sz="1600" dirty="0"/>
-          </a:p>
-        </p:txBody>
-      </p:sp>
+      </p:pic>
+      <p:pic>
+        <p:nvPicPr>
+          <p:cNvPr id="6" name="Image 1" descr="/Users/rubenstalin/Library/Mobile Documents/com~apple~CloudDocs/Sem 7/Intro to ML/seq2seq-ee5180/results/multi30k_endterm/bottleneck_by_length.png">    </p:cNvPr>
+          <p:cNvPicPr>
+            <a:picLocks noChangeAspect="1"/>
+          </p:cNvPicPr>
+          <p:nvPr/>
+        </p:nvPicPr>
+        <p:blipFill>
+          <a:blip r:embed="rId2"/>
+          <a:srcRect l="0" r="0" t="0" b="0"/>
+          <a:stretch/>
+        </p:blipFill>
+        <p:spPr>
+          <a:xfrm>
+            <a:off x="6217920" y="2057400"/>
+            <a:ext cx="5486400" cy="3566160"/>
+          </a:xfrm>
+          <a:prstGeom prst="rect">
+            <a:avLst/>
+          </a:prstGeom>
+        </p:spPr>
+      </p:pic>
     </p:spTree>
   </p:cSld>
   <p:clrMapOvr>
@@ -3822,41 +5982,14 @@
       </p:sp>
       <p:sp>
         <p:nvSpPr>
-          <p:cNvPr id="4" name="Shape 2"/>
-          <p:cNvSpPr/>
+          <p:cNvPr id="4" name="Text 2"/>
+          <p:cNvSpPr txBox="1"/>
           <p:nvPr/>
         </p:nvSpPr>
         <p:spPr>
           <a:xfrm>
-            <a:off x="548640" y="2377440"/>
-            <a:ext cx="11064240" cy="1188720"/>
-          </a:xfrm>
-          <a:prstGeom prst="roundRect">
-            <a:avLst>
-              <a:gd name="adj" fmla="val 7692"/>
-            </a:avLst>
-          </a:prstGeom>
-          <a:solidFill>
-            <a:srgbClr val="FFF4E5"/>
-          </a:solidFill>
-          <a:ln w="12700">
-            <a:solidFill>
-              <a:srgbClr val="E8A33D"/>
-            </a:solidFill>
-            <a:prstDash val="solid"/>
-          </a:ln>
-        </p:spPr>
-      </p:sp>
-      <p:sp>
-        <p:nvSpPr>
-          <p:cNvPr id="5" name="Text 3"/>
-          <p:cNvSpPr txBox="1"/>
-          <p:nvPr/>
-        </p:nvSpPr>
-        <p:spPr>
-          <a:xfrm>
-            <a:off x="822960" y="2697480"/>
-            <a:ext cx="10515600" cy="548640"/>
+            <a:off x="548640" y="1463040"/>
+            <a:ext cx="11064240" cy="457200"/>
           </a:xfrm>
           <a:prstGeom prst="rect">
             <a:avLst/>
@@ -3872,20 +6005,66 @@
               <a:buNone/>
             </a:pPr>
             <a:r>
-              <a:rPr lang="en-US" sz="1600" b="1" dirty="0">
+              <a:rPr lang="en-US" sz="1400" dirty="0">
                 <a:solidFill>
-                  <a:srgbClr val="8A5A12"/>
+                  <a:srgbClr val="3B4A7A"/>
                 </a:solidFill>
                 <a:latin typeface="Calibri" pitchFamily="34" charset="0"/>
                 <a:ea typeface="Calibri" pitchFamily="34" charset="-122"/>
                 <a:cs typeface="Calibri" pitchFamily="34" charset="-120"/>
               </a:rPr>
-              <a:t>Not yet run — make alignments</a:t>
-            </a:r>
-            <a:endParaRPr lang="en-US" sz="1600" dirty="0"/>
+              <a:t>Alignments over the model's OWN output. Source axis is in ENCODER reading order — for a reversed model that is right-to-left, so a faithful alignment is an ANTI-diagonal.</a:t>
+            </a:r>
+            <a:endParaRPr lang="en-US" sz="1400" dirty="0"/>
           </a:p>
         </p:txBody>
       </p:sp>
+      <p:pic>
+        <p:nvPicPr>
+          <p:cNvPr id="5" name="Image 0" descr="/Users/rubenstalin/Library/Mobile Documents/com~apple~CloudDocs/Sem 7/Intro to ML/seq2seq-ee5180/results/wmt14_endterm/alignments/alignment_00.png">    </p:cNvPr>
+          <p:cNvPicPr>
+            <a:picLocks noChangeAspect="1"/>
+          </p:cNvPicPr>
+          <p:nvPr/>
+        </p:nvPicPr>
+        <p:blipFill>
+          <a:blip r:embed="rId1"/>
+          <a:srcRect l="0" r="0" t="0" b="0"/>
+          <a:stretch/>
+        </p:blipFill>
+        <p:spPr>
+          <a:xfrm>
+            <a:off x="548640" y="2057400"/>
+            <a:ext cx="5486400" cy="3566160"/>
+          </a:xfrm>
+          <a:prstGeom prst="rect">
+            <a:avLst/>
+          </a:prstGeom>
+        </p:spPr>
+      </p:pic>
+      <p:pic>
+        <p:nvPicPr>
+          <p:cNvPr id="6" name="Image 1" descr="/Users/rubenstalin/Library/Mobile Documents/com~apple~CloudDocs/Sem 7/Intro to ML/seq2seq-ee5180/results/wmt14_endterm/alignments/alignment_01.png">    </p:cNvPr>
+          <p:cNvPicPr>
+            <a:picLocks noChangeAspect="1"/>
+          </p:cNvPicPr>
+          <p:nvPr/>
+        </p:nvPicPr>
+        <p:blipFill>
+          <a:blip r:embed="rId2"/>
+          <a:srcRect l="0" r="0" t="0" b="0"/>
+          <a:stretch/>
+        </p:blipFill>
+        <p:spPr>
+          <a:xfrm>
+            <a:off x="6217920" y="2057400"/>
+            <a:ext cx="5486400" cy="3566160"/>
+          </a:xfrm>
+          <a:prstGeom prst="rect">
+            <a:avLst/>
+          </a:prstGeom>
+        </p:spPr>
+      </p:pic>
     </p:spTree>
   </p:cSld>
   <p:clrMapOvr>
@@ -3989,43 +6168,2353 @@
           </a:p>
         </p:txBody>
       </p:sp>
-      <p:sp>
-        <p:nvSpPr>
-          <p:cNvPr id="4" name="Shape 2"/>
-          <p:cNvSpPr/>
+      <p:graphicFrame>
+        <p:nvGraphicFramePr>
+          <p:cNvPr id="16" name="Table 0"/>
+          <p:cNvGraphicFramePr>
+            <a:graphicFrameLocks noGrp="1"/>
+          </p:cNvGraphicFramePr>
+          <p:nvPr>
+            <p:extLst>
+              <p:ext uri="{D42A27DB-BD31-4B8C-83A1-F6EECF244321}">
+                <p14:modId xmlns:p14="http://schemas.microsoft.com/office/powerpoint/2010/main" val="1579011935"/>
+              </p:ext>
+            </p:extLst>
+          </p:nvPr>
+        </p:nvGraphicFramePr>
+        <p:xfrm>
+          <a:off x="548640" y="1572768"/>
+          <a:ext cx="11064240" cy="914400"/>
+        </p:xfrm>
+        <a:graphic>
+          <a:graphicData uri="http://schemas.openxmlformats.org/drawingml/2006/table">
+            <a:tbl>
+              <a:tblPr/>
+              <a:tblGrid>
+                <a:gridCol w="2377440"/>
+                <a:gridCol w="1463040"/>
+                <a:gridCol w="2377440"/>
+                <a:gridCol w="2377440"/>
+                <a:gridCol w="2468880"/>
+              </a:tblGrid>
+              <a:tr h="274320">
+                <a:tc>
+                  <a:txBody>
+                    <a:bodyPr/>
+                    <a:lstStyle/>
+                    <a:p>
+                      <a:pPr algn="ctr" indent="0" marL="0">
+                        <a:buNone/>
+                      </a:pPr>
+                      <a:r>
+                        <a:rPr lang="en-US" sz="1300" b="1" dirty="0">
+                          <a:solidFill>
+                            <a:srgbClr val="FFFFFF"/>
+                          </a:solidFill>
+                          <a:latin typeface="Calibri" pitchFamily="34" charset="0"/>
+                          <a:ea typeface="Calibri" pitchFamily="34" charset="-122"/>
+                          <a:cs typeface="Calibri" pitchFamily="34" charset="-120"/>
+                        </a:rPr>
+                        <a:t>source length</a:t>
+                      </a:r>
+                      <a:endParaRPr lang="en-US" sz="1300" dirty="0">
+                        <a:latin typeface="Calibri" charset="0"/>
+                        <a:ea typeface="Calibri" charset="0"/>
+                        <a:cs typeface="Calibri" charset="0"/>
+                      </a:endParaRPr>
+                    </a:p>
+                  </a:txBody>
+                  <a:tcPr marL="91440" marR="91440" marT="45720" marB="45720" anchor="ctr">
+                    <a:lnL w="6350" cap="flat" cmpd="sng" algn="ctr">
+                      <a:solidFill>
+                        <a:srgbClr val="D6DBE8"/>
+                      </a:solidFill>
+                      <a:prstDash val="solid"/>
+                      <a:round/>
+                      <a:headEnd type="none" w="med" len="med"/>
+                      <a:tailEnd type="none" w="med" len="med"/>
+                    </a:lnL>
+                    <a:lnR w="6350" cap="flat" cmpd="sng" algn="ctr">
+                      <a:solidFill>
+                        <a:srgbClr val="D6DBE8"/>
+                      </a:solidFill>
+                      <a:prstDash val="solid"/>
+                      <a:round/>
+                      <a:headEnd type="none" w="med" len="med"/>
+                      <a:tailEnd type="none" w="med" len="med"/>
+                    </a:lnR>
+                    <a:lnT w="6350" cap="flat" cmpd="sng" algn="ctr">
+                      <a:solidFill>
+                        <a:srgbClr val="D6DBE8"/>
+                      </a:solidFill>
+                      <a:prstDash val="solid"/>
+                      <a:round/>
+                      <a:headEnd type="none" w="med" len="med"/>
+                      <a:tailEnd type="none" w="med" len="med"/>
+                    </a:lnT>
+                    <a:lnB w="6350" cap="flat" cmpd="sng" algn="ctr">
+                      <a:solidFill>
+                        <a:srgbClr val="D6DBE8"/>
+                      </a:solidFill>
+                      <a:prstDash val="solid"/>
+                      <a:round/>
+                      <a:headEnd type="none" w="med" len="med"/>
+                      <a:tailEnd type="none" w="med" len="med"/>
+                    </a:lnB>
+                    <a:solidFill>
+                      <a:srgbClr val="18204A"/>
+                    </a:solidFill>
+                  </a:tcPr>
+                </a:tc>
+                <a:tc>
+                  <a:txBody>
+                    <a:bodyPr/>
+                    <a:lstStyle/>
+                    <a:p>
+                      <a:pPr algn="ctr" indent="0" marL="0">
+                        <a:buNone/>
+                      </a:pPr>
+                      <a:r>
+                        <a:rPr lang="en-US" sz="1300" b="1" dirty="0">
+                          <a:solidFill>
+                            <a:srgbClr val="FFFFFF"/>
+                          </a:solidFill>
+                          <a:latin typeface="Calibri" pitchFamily="34" charset="0"/>
+                          <a:ea typeface="Calibri" pitchFamily="34" charset="-122"/>
+                          <a:cs typeface="Calibri" pitchFamily="34" charset="-120"/>
+                        </a:rPr>
+                        <a:t>n</a:t>
+                      </a:r>
+                      <a:endParaRPr lang="en-US" sz="1300" dirty="0">
+                        <a:latin typeface="Calibri" charset="0"/>
+                        <a:ea typeface="Calibri" charset="0"/>
+                        <a:cs typeface="Calibri" charset="0"/>
+                      </a:endParaRPr>
+                    </a:p>
+                  </a:txBody>
+                  <a:tcPr marL="91440" marR="91440" marT="45720" marB="45720" anchor="ctr">
+                    <a:lnL w="6350" cap="flat" cmpd="sng" algn="ctr">
+                      <a:solidFill>
+                        <a:srgbClr val="D6DBE8"/>
+                      </a:solidFill>
+                      <a:prstDash val="solid"/>
+                      <a:round/>
+                      <a:headEnd type="none" w="med" len="med"/>
+                      <a:tailEnd type="none" w="med" len="med"/>
+                    </a:lnL>
+                    <a:lnR w="6350" cap="flat" cmpd="sng" algn="ctr">
+                      <a:solidFill>
+                        <a:srgbClr val="D6DBE8"/>
+                      </a:solidFill>
+                      <a:prstDash val="solid"/>
+                      <a:round/>
+                      <a:headEnd type="none" w="med" len="med"/>
+                      <a:tailEnd type="none" w="med" len="med"/>
+                    </a:lnR>
+                    <a:lnT w="6350" cap="flat" cmpd="sng" algn="ctr">
+                      <a:solidFill>
+                        <a:srgbClr val="D6DBE8"/>
+                      </a:solidFill>
+                      <a:prstDash val="solid"/>
+                      <a:round/>
+                      <a:headEnd type="none" w="med" len="med"/>
+                      <a:tailEnd type="none" w="med" len="med"/>
+                    </a:lnT>
+                    <a:lnB w="6350" cap="flat" cmpd="sng" algn="ctr">
+                      <a:solidFill>
+                        <a:srgbClr val="D6DBE8"/>
+                      </a:solidFill>
+                      <a:prstDash val="solid"/>
+                      <a:round/>
+                      <a:headEnd type="none" w="med" len="med"/>
+                      <a:tailEnd type="none" w="med" len="med"/>
+                    </a:lnB>
+                    <a:solidFill>
+                      <a:srgbClr val="18204A"/>
+                    </a:solidFill>
+                  </a:tcPr>
+                </a:tc>
+                <a:tc>
+                  <a:txBody>
+                    <a:bodyPr/>
+                    <a:lstStyle/>
+                    <a:p>
+                      <a:pPr algn="ctr" indent="0" marL="0">
+                        <a:buNone/>
+                      </a:pPr>
+                      <a:r>
+                        <a:rPr lang="en-US" sz="1300" b="1" dirty="0">
+                          <a:solidFill>
+                            <a:srgbClr val="FFFFFF"/>
+                          </a:solidFill>
+                          <a:latin typeface="Calibri" pitchFamily="34" charset="0"/>
+                          <a:ea typeface="Calibri" pitchFamily="34" charset="-122"/>
+                          <a:cs typeface="Calibri" pitchFamily="34" charset="-120"/>
+                        </a:rPr>
+                        <a:t>fixed vector</a:t>
+                      </a:r>
+                      <a:endParaRPr lang="en-US" sz="1300" dirty="0">
+                        <a:latin typeface="Calibri" charset="0"/>
+                        <a:ea typeface="Calibri" charset="0"/>
+                        <a:cs typeface="Calibri" charset="0"/>
+                      </a:endParaRPr>
+                    </a:p>
+                  </a:txBody>
+                  <a:tcPr marL="91440" marR="91440" marT="45720" marB="45720" anchor="ctr">
+                    <a:lnL w="6350" cap="flat" cmpd="sng" algn="ctr">
+                      <a:solidFill>
+                        <a:srgbClr val="D6DBE8"/>
+                      </a:solidFill>
+                      <a:prstDash val="solid"/>
+                      <a:round/>
+                      <a:headEnd type="none" w="med" len="med"/>
+                      <a:tailEnd type="none" w="med" len="med"/>
+                    </a:lnL>
+                    <a:lnR w="6350" cap="flat" cmpd="sng" algn="ctr">
+                      <a:solidFill>
+                        <a:srgbClr val="D6DBE8"/>
+                      </a:solidFill>
+                      <a:prstDash val="solid"/>
+                      <a:round/>
+                      <a:headEnd type="none" w="med" len="med"/>
+                      <a:tailEnd type="none" w="med" len="med"/>
+                    </a:lnR>
+                    <a:lnT w="6350" cap="flat" cmpd="sng" algn="ctr">
+                      <a:solidFill>
+                        <a:srgbClr val="D6DBE8"/>
+                      </a:solidFill>
+                      <a:prstDash val="solid"/>
+                      <a:round/>
+                      <a:headEnd type="none" w="med" len="med"/>
+                      <a:tailEnd type="none" w="med" len="med"/>
+                    </a:lnT>
+                    <a:lnB w="6350" cap="flat" cmpd="sng" algn="ctr">
+                      <a:solidFill>
+                        <a:srgbClr val="D6DBE8"/>
+                      </a:solidFill>
+                      <a:prstDash val="solid"/>
+                      <a:round/>
+                      <a:headEnd type="none" w="med" len="med"/>
+                      <a:tailEnd type="none" w="med" len="med"/>
+                    </a:lnB>
+                    <a:solidFill>
+                      <a:srgbClr val="18204A"/>
+                    </a:solidFill>
+                  </a:tcPr>
+                </a:tc>
+                <a:tc>
+                  <a:txBody>
+                    <a:bodyPr/>
+                    <a:lstStyle/>
+                    <a:p>
+                      <a:pPr algn="ctr" indent="0" marL="0">
+                        <a:buNone/>
+                      </a:pPr>
+                      <a:r>
+                        <a:rPr lang="en-US" sz="1300" b="1" dirty="0">
+                          <a:solidFill>
+                            <a:srgbClr val="FFFFFF"/>
+                          </a:solidFill>
+                          <a:latin typeface="Calibri" pitchFamily="34" charset="0"/>
+                          <a:ea typeface="Calibri" pitchFamily="34" charset="-122"/>
+                          <a:cs typeface="Calibri" pitchFamily="34" charset="-120"/>
+                        </a:rPr>
+                        <a:t>+ attention</a:t>
+                      </a:r>
+                      <a:endParaRPr lang="en-US" sz="1300" dirty="0">
+                        <a:latin typeface="Calibri" charset="0"/>
+                        <a:ea typeface="Calibri" charset="0"/>
+                        <a:cs typeface="Calibri" charset="0"/>
+                      </a:endParaRPr>
+                    </a:p>
+                  </a:txBody>
+                  <a:tcPr marL="91440" marR="91440" marT="45720" marB="45720" anchor="ctr">
+                    <a:lnL w="6350" cap="flat" cmpd="sng" algn="ctr">
+                      <a:solidFill>
+                        <a:srgbClr val="D6DBE8"/>
+                      </a:solidFill>
+                      <a:prstDash val="solid"/>
+                      <a:round/>
+                      <a:headEnd type="none" w="med" len="med"/>
+                      <a:tailEnd type="none" w="med" len="med"/>
+                    </a:lnL>
+                    <a:lnR w="6350" cap="flat" cmpd="sng" algn="ctr">
+                      <a:solidFill>
+                        <a:srgbClr val="D6DBE8"/>
+                      </a:solidFill>
+                      <a:prstDash val="solid"/>
+                      <a:round/>
+                      <a:headEnd type="none" w="med" len="med"/>
+                      <a:tailEnd type="none" w="med" len="med"/>
+                    </a:lnR>
+                    <a:lnT w="6350" cap="flat" cmpd="sng" algn="ctr">
+                      <a:solidFill>
+                        <a:srgbClr val="D6DBE8"/>
+                      </a:solidFill>
+                      <a:prstDash val="solid"/>
+                      <a:round/>
+                      <a:headEnd type="none" w="med" len="med"/>
+                      <a:tailEnd type="none" w="med" len="med"/>
+                    </a:lnT>
+                    <a:lnB w="6350" cap="flat" cmpd="sng" algn="ctr">
+                      <a:solidFill>
+                        <a:srgbClr val="D6DBE8"/>
+                      </a:solidFill>
+                      <a:prstDash val="solid"/>
+                      <a:round/>
+                      <a:headEnd type="none" w="med" len="med"/>
+                      <a:tailEnd type="none" w="med" len="med"/>
+                    </a:lnB>
+                    <a:solidFill>
+                      <a:srgbClr val="18204A"/>
+                    </a:solidFill>
+                  </a:tcPr>
+                </a:tc>
+                <a:tc>
+                  <a:txBody>
+                    <a:bodyPr/>
+                    <a:lstStyle/>
+                    <a:p>
+                      <a:pPr algn="ctr" indent="0" marL="0">
+                        <a:buNone/>
+                      </a:pPr>
+                      <a:r>
+                        <a:rPr lang="en-US" sz="1300" b="1" dirty="0">
+                          <a:solidFill>
+                            <a:srgbClr val="FFFFFF"/>
+                          </a:solidFill>
+                          <a:latin typeface="Calibri" pitchFamily="34" charset="0"/>
+                          <a:ea typeface="Calibri" pitchFamily="34" charset="-122"/>
+                          <a:cs typeface="Calibri" pitchFamily="34" charset="-120"/>
+                        </a:rPr>
+                        <a:t>ratio</a:t>
+                      </a:r>
+                      <a:endParaRPr lang="en-US" sz="1300" dirty="0">
+                        <a:latin typeface="Calibri" charset="0"/>
+                        <a:ea typeface="Calibri" charset="0"/>
+                        <a:cs typeface="Calibri" charset="0"/>
+                      </a:endParaRPr>
+                    </a:p>
+                  </a:txBody>
+                  <a:tcPr marL="91440" marR="91440" marT="45720" marB="45720" anchor="ctr">
+                    <a:lnL w="6350" cap="flat" cmpd="sng" algn="ctr">
+                      <a:solidFill>
+                        <a:srgbClr val="D6DBE8"/>
+                      </a:solidFill>
+                      <a:prstDash val="solid"/>
+                      <a:round/>
+                      <a:headEnd type="none" w="med" len="med"/>
+                      <a:tailEnd type="none" w="med" len="med"/>
+                    </a:lnL>
+                    <a:lnR w="6350" cap="flat" cmpd="sng" algn="ctr">
+                      <a:solidFill>
+                        <a:srgbClr val="D6DBE8"/>
+                      </a:solidFill>
+                      <a:prstDash val="solid"/>
+                      <a:round/>
+                      <a:headEnd type="none" w="med" len="med"/>
+                      <a:tailEnd type="none" w="med" len="med"/>
+                    </a:lnR>
+                    <a:lnT w="6350" cap="flat" cmpd="sng" algn="ctr">
+                      <a:solidFill>
+                        <a:srgbClr val="D6DBE8"/>
+                      </a:solidFill>
+                      <a:prstDash val="solid"/>
+                      <a:round/>
+                      <a:headEnd type="none" w="med" len="med"/>
+                      <a:tailEnd type="none" w="med" len="med"/>
+                    </a:lnT>
+                    <a:lnB w="6350" cap="flat" cmpd="sng" algn="ctr">
+                      <a:solidFill>
+                        <a:srgbClr val="D6DBE8"/>
+                      </a:solidFill>
+                      <a:prstDash val="solid"/>
+                      <a:round/>
+                      <a:headEnd type="none" w="med" len="med"/>
+                      <a:tailEnd type="none" w="med" len="med"/>
+                    </a:lnB>
+                    <a:solidFill>
+                      <a:srgbClr val="18204A"/>
+                    </a:solidFill>
+                  </a:tcPr>
+                </a:tc>
+              </a:tr>
+              <a:tr h="274320">
+                <a:tc>
+                  <a:txBody>
+                    <a:bodyPr/>
+                    <a:lstStyle/>
+                    <a:p>
+                      <a:pPr algn="ctr" indent="0" marL="0">
+                        <a:buNone/>
+                      </a:pPr>
+                      <a:r>
+                        <a:rPr lang="en-US" sz="1300" dirty="0">
+                          <a:solidFill>
+                            <a:srgbClr val="3B4A7A"/>
+                          </a:solidFill>
+                          <a:latin typeface="Calibri" pitchFamily="34" charset="0"/>
+                          <a:ea typeface="Calibri" pitchFamily="34" charset="-122"/>
+                          <a:cs typeface="Calibri" pitchFamily="34" charset="-120"/>
+                        </a:rPr>
+                        <a:t>1-10</a:t>
+                      </a:r>
+                      <a:endParaRPr lang="en-US" sz="1300" dirty="0">
+                        <a:latin typeface="Calibri" charset="0"/>
+                        <a:ea typeface="Calibri" charset="0"/>
+                        <a:cs typeface="Calibri" charset="0"/>
+                      </a:endParaRPr>
+                    </a:p>
+                  </a:txBody>
+                  <a:tcPr marL="91440" marR="91440" marT="45720" marB="45720" anchor="ctr">
+                    <a:lnL w="6350" cap="flat" cmpd="sng" algn="ctr">
+                      <a:solidFill>
+                        <a:srgbClr val="D6DBE8"/>
+                      </a:solidFill>
+                      <a:prstDash val="solid"/>
+                      <a:round/>
+                      <a:headEnd type="none" w="med" len="med"/>
+                      <a:tailEnd type="none" w="med" len="med"/>
+                    </a:lnL>
+                    <a:lnR w="6350" cap="flat" cmpd="sng" algn="ctr">
+                      <a:solidFill>
+                        <a:srgbClr val="D6DBE8"/>
+                      </a:solidFill>
+                      <a:prstDash val="solid"/>
+                      <a:round/>
+                      <a:headEnd type="none" w="med" len="med"/>
+                      <a:tailEnd type="none" w="med" len="med"/>
+                    </a:lnR>
+                    <a:lnT w="6350" cap="flat" cmpd="sng" algn="ctr">
+                      <a:solidFill>
+                        <a:srgbClr val="D6DBE8"/>
+                      </a:solidFill>
+                      <a:prstDash val="solid"/>
+                      <a:round/>
+                      <a:headEnd type="none" w="med" len="med"/>
+                      <a:tailEnd type="none" w="med" len="med"/>
+                    </a:lnT>
+                    <a:lnB w="6350" cap="flat" cmpd="sng" algn="ctr">
+                      <a:solidFill>
+                        <a:srgbClr val="D6DBE8"/>
+                      </a:solidFill>
+                      <a:prstDash val="solid"/>
+                      <a:round/>
+                      <a:headEnd type="none" w="med" len="med"/>
+                      <a:tailEnd type="none" w="med" len="med"/>
+                    </a:lnB>
+                  </a:tcPr>
+                </a:tc>
+                <a:tc>
+                  <a:txBody>
+                    <a:bodyPr/>
+                    <a:lstStyle/>
+                    <a:p>
+                      <a:pPr algn="ctr" indent="0" marL="0">
+                        <a:buNone/>
+                      </a:pPr>
+                      <a:r>
+                        <a:rPr lang="en-US" sz="1300" dirty="0">
+                          <a:solidFill>
+                            <a:srgbClr val="3B4A7A"/>
+                          </a:solidFill>
+                          <a:latin typeface="Calibri" pitchFamily="34" charset="0"/>
+                          <a:ea typeface="Calibri" pitchFamily="34" charset="-122"/>
+                          <a:cs typeface="Calibri" pitchFamily="34" charset="-120"/>
+                        </a:rPr>
+                        <a:t>405</a:t>
+                      </a:r>
+                      <a:endParaRPr lang="en-US" sz="1300" dirty="0">
+                        <a:latin typeface="Calibri" charset="0"/>
+                        <a:ea typeface="Calibri" charset="0"/>
+                        <a:cs typeface="Calibri" charset="0"/>
+                      </a:endParaRPr>
+                    </a:p>
+                  </a:txBody>
+                  <a:tcPr marL="91440" marR="91440" marT="45720" marB="45720" anchor="ctr">
+                    <a:lnL w="6350" cap="flat" cmpd="sng" algn="ctr">
+                      <a:solidFill>
+                        <a:srgbClr val="D6DBE8"/>
+                      </a:solidFill>
+                      <a:prstDash val="solid"/>
+                      <a:round/>
+                      <a:headEnd type="none" w="med" len="med"/>
+                      <a:tailEnd type="none" w="med" len="med"/>
+                    </a:lnL>
+                    <a:lnR w="6350" cap="flat" cmpd="sng" algn="ctr">
+                      <a:solidFill>
+                        <a:srgbClr val="D6DBE8"/>
+                      </a:solidFill>
+                      <a:prstDash val="solid"/>
+                      <a:round/>
+                      <a:headEnd type="none" w="med" len="med"/>
+                      <a:tailEnd type="none" w="med" len="med"/>
+                    </a:lnR>
+                    <a:lnT w="6350" cap="flat" cmpd="sng" algn="ctr">
+                      <a:solidFill>
+                        <a:srgbClr val="D6DBE8"/>
+                      </a:solidFill>
+                      <a:prstDash val="solid"/>
+                      <a:round/>
+                      <a:headEnd type="none" w="med" len="med"/>
+                      <a:tailEnd type="none" w="med" len="med"/>
+                    </a:lnT>
+                    <a:lnB w="6350" cap="flat" cmpd="sng" algn="ctr">
+                      <a:solidFill>
+                        <a:srgbClr val="D6DBE8"/>
+                      </a:solidFill>
+                      <a:prstDash val="solid"/>
+                      <a:round/>
+                      <a:headEnd type="none" w="med" len="med"/>
+                      <a:tailEnd type="none" w="med" len="med"/>
+                    </a:lnB>
+                  </a:tcPr>
+                </a:tc>
+                <a:tc>
+                  <a:txBody>
+                    <a:bodyPr/>
+                    <a:lstStyle/>
+                    <a:p>
+                      <a:pPr algn="ctr" indent="0" marL="0">
+                        <a:buNone/>
+                      </a:pPr>
+                      <a:r>
+                        <a:rPr lang="en-US" sz="1300" dirty="0">
+                          <a:solidFill>
+                            <a:srgbClr val="3B4A7A"/>
+                          </a:solidFill>
+                          <a:latin typeface="Calibri" pitchFamily="34" charset="0"/>
+                          <a:ea typeface="Calibri" pitchFamily="34" charset="-122"/>
+                          <a:cs typeface="Calibri" pitchFamily="34" charset="-120"/>
+                        </a:rPr>
+                        <a:t>20.43</a:t>
+                      </a:r>
+                      <a:endParaRPr lang="en-US" sz="1300" dirty="0">
+                        <a:latin typeface="Calibri" charset="0"/>
+                        <a:ea typeface="Calibri" charset="0"/>
+                        <a:cs typeface="Calibri" charset="0"/>
+                      </a:endParaRPr>
+                    </a:p>
+                  </a:txBody>
+                  <a:tcPr marL="91440" marR="91440" marT="45720" marB="45720" anchor="ctr">
+                    <a:lnL w="6350" cap="flat" cmpd="sng" algn="ctr">
+                      <a:solidFill>
+                        <a:srgbClr val="D6DBE8"/>
+                      </a:solidFill>
+                      <a:prstDash val="solid"/>
+                      <a:round/>
+                      <a:headEnd type="none" w="med" len="med"/>
+                      <a:tailEnd type="none" w="med" len="med"/>
+                    </a:lnL>
+                    <a:lnR w="6350" cap="flat" cmpd="sng" algn="ctr">
+                      <a:solidFill>
+                        <a:srgbClr val="D6DBE8"/>
+                      </a:solidFill>
+                      <a:prstDash val="solid"/>
+                      <a:round/>
+                      <a:headEnd type="none" w="med" len="med"/>
+                      <a:tailEnd type="none" w="med" len="med"/>
+                    </a:lnR>
+                    <a:lnT w="6350" cap="flat" cmpd="sng" algn="ctr">
+                      <a:solidFill>
+                        <a:srgbClr val="D6DBE8"/>
+                      </a:solidFill>
+                      <a:prstDash val="solid"/>
+                      <a:round/>
+                      <a:headEnd type="none" w="med" len="med"/>
+                      <a:tailEnd type="none" w="med" len="med"/>
+                    </a:lnT>
+                    <a:lnB w="6350" cap="flat" cmpd="sng" algn="ctr">
+                      <a:solidFill>
+                        <a:srgbClr val="D6DBE8"/>
+                      </a:solidFill>
+                      <a:prstDash val="solid"/>
+                      <a:round/>
+                      <a:headEnd type="none" w="med" len="med"/>
+                      <a:tailEnd type="none" w="med" len="med"/>
+                    </a:lnB>
+                  </a:tcPr>
+                </a:tc>
+                <a:tc>
+                  <a:txBody>
+                    <a:bodyPr/>
+                    <a:lstStyle/>
+                    <a:p>
+                      <a:pPr algn="ctr" indent="0" marL="0">
+                        <a:buNone/>
+                      </a:pPr>
+                      <a:r>
+                        <a:rPr lang="en-US" sz="1300" dirty="0">
+                          <a:solidFill>
+                            <a:srgbClr val="3B4A7A"/>
+                          </a:solidFill>
+                          <a:latin typeface="Calibri" pitchFamily="34" charset="0"/>
+                          <a:ea typeface="Calibri" pitchFamily="34" charset="-122"/>
+                          <a:cs typeface="Calibri" pitchFamily="34" charset="-120"/>
+                        </a:rPr>
+                        <a:t>13.27</a:t>
+                      </a:r>
+                      <a:endParaRPr lang="en-US" sz="1300" dirty="0">
+                        <a:latin typeface="Calibri" charset="0"/>
+                        <a:ea typeface="Calibri" charset="0"/>
+                        <a:cs typeface="Calibri" charset="0"/>
+                      </a:endParaRPr>
+                    </a:p>
+                  </a:txBody>
+                  <a:tcPr marL="91440" marR="91440" marT="45720" marB="45720" anchor="ctr">
+                    <a:lnL w="6350" cap="flat" cmpd="sng" algn="ctr">
+                      <a:solidFill>
+                        <a:srgbClr val="D6DBE8"/>
+                      </a:solidFill>
+                      <a:prstDash val="solid"/>
+                      <a:round/>
+                      <a:headEnd type="none" w="med" len="med"/>
+                      <a:tailEnd type="none" w="med" len="med"/>
+                    </a:lnL>
+                    <a:lnR w="6350" cap="flat" cmpd="sng" algn="ctr">
+                      <a:solidFill>
+                        <a:srgbClr val="D6DBE8"/>
+                      </a:solidFill>
+                      <a:prstDash val="solid"/>
+                      <a:round/>
+                      <a:headEnd type="none" w="med" len="med"/>
+                      <a:tailEnd type="none" w="med" len="med"/>
+                    </a:lnR>
+                    <a:lnT w="6350" cap="flat" cmpd="sng" algn="ctr">
+                      <a:solidFill>
+                        <a:srgbClr val="D6DBE8"/>
+                      </a:solidFill>
+                      <a:prstDash val="solid"/>
+                      <a:round/>
+                      <a:headEnd type="none" w="med" len="med"/>
+                      <a:tailEnd type="none" w="med" len="med"/>
+                    </a:lnT>
+                    <a:lnB w="6350" cap="flat" cmpd="sng" algn="ctr">
+                      <a:solidFill>
+                        <a:srgbClr val="D6DBE8"/>
+                      </a:solidFill>
+                      <a:prstDash val="solid"/>
+                      <a:round/>
+                      <a:headEnd type="none" w="med" len="med"/>
+                      <a:tailEnd type="none" w="med" len="med"/>
+                    </a:lnB>
+                  </a:tcPr>
+                </a:tc>
+                <a:tc>
+                  <a:txBody>
+                    <a:bodyPr/>
+                    <a:lstStyle/>
+                    <a:p>
+                      <a:pPr algn="ctr" indent="0" marL="0">
+                        <a:buNone/>
+                      </a:pPr>
+                      <a:r>
+                        <a:rPr lang="en-US" sz="1300" b="1" dirty="0">
+                          <a:solidFill>
+                            <a:srgbClr val="4C72B0"/>
+                          </a:solidFill>
+                          <a:latin typeface="Calibri" pitchFamily="34" charset="0"/>
+                          <a:ea typeface="Calibri" pitchFamily="34" charset="-122"/>
+                          <a:cs typeface="Calibri" pitchFamily="34" charset="-120"/>
+                        </a:rPr>
+                        <a:t>0.650</a:t>
+                      </a:r>
+                      <a:endParaRPr lang="en-US" sz="1300" dirty="0">
+                        <a:latin typeface="Calibri" charset="0"/>
+                        <a:ea typeface="Calibri" charset="0"/>
+                        <a:cs typeface="Calibri" charset="0"/>
+                      </a:endParaRPr>
+                    </a:p>
+                  </a:txBody>
+                  <a:tcPr marL="91440" marR="91440" marT="45720" marB="45720" anchor="ctr">
+                    <a:lnL w="6350" cap="flat" cmpd="sng" algn="ctr">
+                      <a:solidFill>
+                        <a:srgbClr val="D6DBE8"/>
+                      </a:solidFill>
+                      <a:prstDash val="solid"/>
+                      <a:round/>
+                      <a:headEnd type="none" w="med" len="med"/>
+                      <a:tailEnd type="none" w="med" len="med"/>
+                    </a:lnL>
+                    <a:lnR w="6350" cap="flat" cmpd="sng" algn="ctr">
+                      <a:solidFill>
+                        <a:srgbClr val="D6DBE8"/>
+                      </a:solidFill>
+                      <a:prstDash val="solid"/>
+                      <a:round/>
+                      <a:headEnd type="none" w="med" len="med"/>
+                      <a:tailEnd type="none" w="med" len="med"/>
+                    </a:lnR>
+                    <a:lnT w="6350" cap="flat" cmpd="sng" algn="ctr">
+                      <a:solidFill>
+                        <a:srgbClr val="D6DBE8"/>
+                      </a:solidFill>
+                      <a:prstDash val="solid"/>
+                      <a:round/>
+                      <a:headEnd type="none" w="med" len="med"/>
+                      <a:tailEnd type="none" w="med" len="med"/>
+                    </a:lnT>
+                    <a:lnB w="6350" cap="flat" cmpd="sng" algn="ctr">
+                      <a:solidFill>
+                        <a:srgbClr val="D6DBE8"/>
+                      </a:solidFill>
+                      <a:prstDash val="solid"/>
+                      <a:round/>
+                      <a:headEnd type="none" w="med" len="med"/>
+                      <a:tailEnd type="none" w="med" len="med"/>
+                    </a:lnB>
+                  </a:tcPr>
+                </a:tc>
+              </a:tr>
+              <a:tr h="274320">
+                <a:tc>
+                  <a:txBody>
+                    <a:bodyPr/>
+                    <a:lstStyle/>
+                    <a:p>
+                      <a:pPr algn="ctr" indent="0" marL="0">
+                        <a:buNone/>
+                      </a:pPr>
+                      <a:r>
+                        <a:rPr lang="en-US" sz="1300" dirty="0">
+                          <a:solidFill>
+                            <a:srgbClr val="3B4A7A"/>
+                          </a:solidFill>
+                          <a:latin typeface="Calibri" pitchFamily="34" charset="0"/>
+                          <a:ea typeface="Calibri" pitchFamily="34" charset="-122"/>
+                          <a:cs typeface="Calibri" pitchFamily="34" charset="-120"/>
+                        </a:rPr>
+                        <a:t>11-20</a:t>
+                      </a:r>
+                      <a:endParaRPr lang="en-US" sz="1300" dirty="0">
+                        <a:latin typeface="Calibri" charset="0"/>
+                        <a:ea typeface="Calibri" charset="0"/>
+                        <a:cs typeface="Calibri" charset="0"/>
+                      </a:endParaRPr>
+                    </a:p>
+                  </a:txBody>
+                  <a:tcPr marL="91440" marR="91440" marT="45720" marB="45720" anchor="ctr">
+                    <a:lnL w="6350" cap="flat" cmpd="sng" algn="ctr">
+                      <a:solidFill>
+                        <a:srgbClr val="D6DBE8"/>
+                      </a:solidFill>
+                      <a:prstDash val="solid"/>
+                      <a:round/>
+                      <a:headEnd type="none" w="med" len="med"/>
+                      <a:tailEnd type="none" w="med" len="med"/>
+                    </a:lnL>
+                    <a:lnR w="6350" cap="flat" cmpd="sng" algn="ctr">
+                      <a:solidFill>
+                        <a:srgbClr val="D6DBE8"/>
+                      </a:solidFill>
+                      <a:prstDash val="solid"/>
+                      <a:round/>
+                      <a:headEnd type="none" w="med" len="med"/>
+                      <a:tailEnd type="none" w="med" len="med"/>
+                    </a:lnR>
+                    <a:lnT w="6350" cap="flat" cmpd="sng" algn="ctr">
+                      <a:solidFill>
+                        <a:srgbClr val="D6DBE8"/>
+                      </a:solidFill>
+                      <a:prstDash val="solid"/>
+                      <a:round/>
+                      <a:headEnd type="none" w="med" len="med"/>
+                      <a:tailEnd type="none" w="med" len="med"/>
+                    </a:lnT>
+                    <a:lnB w="6350" cap="flat" cmpd="sng" algn="ctr">
+                      <a:solidFill>
+                        <a:srgbClr val="D6DBE8"/>
+                      </a:solidFill>
+                      <a:prstDash val="solid"/>
+                      <a:round/>
+                      <a:headEnd type="none" w="med" len="med"/>
+                      <a:tailEnd type="none" w="med" len="med"/>
+                    </a:lnB>
+                  </a:tcPr>
+                </a:tc>
+                <a:tc>
+                  <a:txBody>
+                    <a:bodyPr/>
+                    <a:lstStyle/>
+                    <a:p>
+                      <a:pPr algn="ctr" indent="0" marL="0">
+                        <a:buNone/>
+                      </a:pPr>
+                      <a:r>
+                        <a:rPr lang="en-US" sz="1300" dirty="0">
+                          <a:solidFill>
+                            <a:srgbClr val="3B4A7A"/>
+                          </a:solidFill>
+                          <a:latin typeface="Calibri" pitchFamily="34" charset="0"/>
+                          <a:ea typeface="Calibri" pitchFamily="34" charset="-122"/>
+                          <a:cs typeface="Calibri" pitchFamily="34" charset="-120"/>
+                        </a:rPr>
+                        <a:t>954</a:t>
+                      </a:r>
+                      <a:endParaRPr lang="en-US" sz="1300" dirty="0">
+                        <a:latin typeface="Calibri" charset="0"/>
+                        <a:ea typeface="Calibri" charset="0"/>
+                        <a:cs typeface="Calibri" charset="0"/>
+                      </a:endParaRPr>
+                    </a:p>
+                  </a:txBody>
+                  <a:tcPr marL="91440" marR="91440" marT="45720" marB="45720" anchor="ctr">
+                    <a:lnL w="6350" cap="flat" cmpd="sng" algn="ctr">
+                      <a:solidFill>
+                        <a:srgbClr val="D6DBE8"/>
+                      </a:solidFill>
+                      <a:prstDash val="solid"/>
+                      <a:round/>
+                      <a:headEnd type="none" w="med" len="med"/>
+                      <a:tailEnd type="none" w="med" len="med"/>
+                    </a:lnL>
+                    <a:lnR w="6350" cap="flat" cmpd="sng" algn="ctr">
+                      <a:solidFill>
+                        <a:srgbClr val="D6DBE8"/>
+                      </a:solidFill>
+                      <a:prstDash val="solid"/>
+                      <a:round/>
+                      <a:headEnd type="none" w="med" len="med"/>
+                      <a:tailEnd type="none" w="med" len="med"/>
+                    </a:lnR>
+                    <a:lnT w="6350" cap="flat" cmpd="sng" algn="ctr">
+                      <a:solidFill>
+                        <a:srgbClr val="D6DBE8"/>
+                      </a:solidFill>
+                      <a:prstDash val="solid"/>
+                      <a:round/>
+                      <a:headEnd type="none" w="med" len="med"/>
+                      <a:tailEnd type="none" w="med" len="med"/>
+                    </a:lnT>
+                    <a:lnB w="6350" cap="flat" cmpd="sng" algn="ctr">
+                      <a:solidFill>
+                        <a:srgbClr val="D6DBE8"/>
+                      </a:solidFill>
+                      <a:prstDash val="solid"/>
+                      <a:round/>
+                      <a:headEnd type="none" w="med" len="med"/>
+                      <a:tailEnd type="none" w="med" len="med"/>
+                    </a:lnB>
+                  </a:tcPr>
+                </a:tc>
+                <a:tc>
+                  <a:txBody>
+                    <a:bodyPr/>
+                    <a:lstStyle/>
+                    <a:p>
+                      <a:pPr algn="ctr" indent="0" marL="0">
+                        <a:buNone/>
+                      </a:pPr>
+                      <a:r>
+                        <a:rPr lang="en-US" sz="1300" dirty="0">
+                          <a:solidFill>
+                            <a:srgbClr val="3B4A7A"/>
+                          </a:solidFill>
+                          <a:latin typeface="Calibri" pitchFamily="34" charset="0"/>
+                          <a:ea typeface="Calibri" pitchFamily="34" charset="-122"/>
+                          <a:cs typeface="Calibri" pitchFamily="34" charset="-120"/>
+                        </a:rPr>
+                        <a:t>17.79</a:t>
+                      </a:r>
+                      <a:endParaRPr lang="en-US" sz="1300" dirty="0">
+                        <a:latin typeface="Calibri" charset="0"/>
+                        <a:ea typeface="Calibri" charset="0"/>
+                        <a:cs typeface="Calibri" charset="0"/>
+                      </a:endParaRPr>
+                    </a:p>
+                  </a:txBody>
+                  <a:tcPr marL="91440" marR="91440" marT="45720" marB="45720" anchor="ctr">
+                    <a:lnL w="6350" cap="flat" cmpd="sng" algn="ctr">
+                      <a:solidFill>
+                        <a:srgbClr val="D6DBE8"/>
+                      </a:solidFill>
+                      <a:prstDash val="solid"/>
+                      <a:round/>
+                      <a:headEnd type="none" w="med" len="med"/>
+                      <a:tailEnd type="none" w="med" len="med"/>
+                    </a:lnL>
+                    <a:lnR w="6350" cap="flat" cmpd="sng" algn="ctr">
+                      <a:solidFill>
+                        <a:srgbClr val="D6DBE8"/>
+                      </a:solidFill>
+                      <a:prstDash val="solid"/>
+                      <a:round/>
+                      <a:headEnd type="none" w="med" len="med"/>
+                      <a:tailEnd type="none" w="med" len="med"/>
+                    </a:lnR>
+                    <a:lnT w="6350" cap="flat" cmpd="sng" algn="ctr">
+                      <a:solidFill>
+                        <a:srgbClr val="D6DBE8"/>
+                      </a:solidFill>
+                      <a:prstDash val="solid"/>
+                      <a:round/>
+                      <a:headEnd type="none" w="med" len="med"/>
+                      <a:tailEnd type="none" w="med" len="med"/>
+                    </a:lnT>
+                    <a:lnB w="6350" cap="flat" cmpd="sng" algn="ctr">
+                      <a:solidFill>
+                        <a:srgbClr val="D6DBE8"/>
+                      </a:solidFill>
+                      <a:prstDash val="solid"/>
+                      <a:round/>
+                      <a:headEnd type="none" w="med" len="med"/>
+                      <a:tailEnd type="none" w="med" len="med"/>
+                    </a:lnB>
+                  </a:tcPr>
+                </a:tc>
+                <a:tc>
+                  <a:txBody>
+                    <a:bodyPr/>
+                    <a:lstStyle/>
+                    <a:p>
+                      <a:pPr algn="ctr" indent="0" marL="0">
+                        <a:buNone/>
+                      </a:pPr>
+                      <a:r>
+                        <a:rPr lang="en-US" sz="1300" dirty="0">
+                          <a:solidFill>
+                            <a:srgbClr val="3B4A7A"/>
+                          </a:solidFill>
+                          <a:latin typeface="Calibri" pitchFamily="34" charset="0"/>
+                          <a:ea typeface="Calibri" pitchFamily="34" charset="-122"/>
+                          <a:cs typeface="Calibri" pitchFamily="34" charset="-120"/>
+                        </a:rPr>
+                        <a:t>9.57</a:t>
+                      </a:r>
+                      <a:endParaRPr lang="en-US" sz="1300" dirty="0">
+                        <a:latin typeface="Calibri" charset="0"/>
+                        <a:ea typeface="Calibri" charset="0"/>
+                        <a:cs typeface="Calibri" charset="0"/>
+                      </a:endParaRPr>
+                    </a:p>
+                  </a:txBody>
+                  <a:tcPr marL="91440" marR="91440" marT="45720" marB="45720" anchor="ctr">
+                    <a:lnL w="6350" cap="flat" cmpd="sng" algn="ctr">
+                      <a:solidFill>
+                        <a:srgbClr val="D6DBE8"/>
+                      </a:solidFill>
+                      <a:prstDash val="solid"/>
+                      <a:round/>
+                      <a:headEnd type="none" w="med" len="med"/>
+                      <a:tailEnd type="none" w="med" len="med"/>
+                    </a:lnL>
+                    <a:lnR w="6350" cap="flat" cmpd="sng" algn="ctr">
+                      <a:solidFill>
+                        <a:srgbClr val="D6DBE8"/>
+                      </a:solidFill>
+                      <a:prstDash val="solid"/>
+                      <a:round/>
+                      <a:headEnd type="none" w="med" len="med"/>
+                      <a:tailEnd type="none" w="med" len="med"/>
+                    </a:lnR>
+                    <a:lnT w="6350" cap="flat" cmpd="sng" algn="ctr">
+                      <a:solidFill>
+                        <a:srgbClr val="D6DBE8"/>
+                      </a:solidFill>
+                      <a:prstDash val="solid"/>
+                      <a:round/>
+                      <a:headEnd type="none" w="med" len="med"/>
+                      <a:tailEnd type="none" w="med" len="med"/>
+                    </a:lnT>
+                    <a:lnB w="6350" cap="flat" cmpd="sng" algn="ctr">
+                      <a:solidFill>
+                        <a:srgbClr val="D6DBE8"/>
+                      </a:solidFill>
+                      <a:prstDash val="solid"/>
+                      <a:round/>
+                      <a:headEnd type="none" w="med" len="med"/>
+                      <a:tailEnd type="none" w="med" len="med"/>
+                    </a:lnB>
+                  </a:tcPr>
+                </a:tc>
+                <a:tc>
+                  <a:txBody>
+                    <a:bodyPr/>
+                    <a:lstStyle/>
+                    <a:p>
+                      <a:pPr algn="ctr" indent="0" marL="0">
+                        <a:buNone/>
+                      </a:pPr>
+                      <a:r>
+                        <a:rPr lang="en-US" sz="1300" b="1" dirty="0">
+                          <a:solidFill>
+                            <a:srgbClr val="4C72B0"/>
+                          </a:solidFill>
+                          <a:latin typeface="Calibri" pitchFamily="34" charset="0"/>
+                          <a:ea typeface="Calibri" pitchFamily="34" charset="-122"/>
+                          <a:cs typeface="Calibri" pitchFamily="34" charset="-120"/>
+                        </a:rPr>
+                        <a:t>0.538</a:t>
+                      </a:r>
+                      <a:endParaRPr lang="en-US" sz="1300" dirty="0">
+                        <a:latin typeface="Calibri" charset="0"/>
+                        <a:ea typeface="Calibri" charset="0"/>
+                        <a:cs typeface="Calibri" charset="0"/>
+                      </a:endParaRPr>
+                    </a:p>
+                  </a:txBody>
+                  <a:tcPr marL="91440" marR="91440" marT="45720" marB="45720" anchor="ctr">
+                    <a:lnL w="6350" cap="flat" cmpd="sng" algn="ctr">
+                      <a:solidFill>
+                        <a:srgbClr val="D6DBE8"/>
+                      </a:solidFill>
+                      <a:prstDash val="solid"/>
+                      <a:round/>
+                      <a:headEnd type="none" w="med" len="med"/>
+                      <a:tailEnd type="none" w="med" len="med"/>
+                    </a:lnL>
+                    <a:lnR w="6350" cap="flat" cmpd="sng" algn="ctr">
+                      <a:solidFill>
+                        <a:srgbClr val="D6DBE8"/>
+                      </a:solidFill>
+                      <a:prstDash val="solid"/>
+                      <a:round/>
+                      <a:headEnd type="none" w="med" len="med"/>
+                      <a:tailEnd type="none" w="med" len="med"/>
+                    </a:lnR>
+                    <a:lnT w="6350" cap="flat" cmpd="sng" algn="ctr">
+                      <a:solidFill>
+                        <a:srgbClr val="D6DBE8"/>
+                      </a:solidFill>
+                      <a:prstDash val="solid"/>
+                      <a:round/>
+                      <a:headEnd type="none" w="med" len="med"/>
+                      <a:tailEnd type="none" w="med" len="med"/>
+                    </a:lnT>
+                    <a:lnB w="6350" cap="flat" cmpd="sng" algn="ctr">
+                      <a:solidFill>
+                        <a:srgbClr val="D6DBE8"/>
+                      </a:solidFill>
+                      <a:prstDash val="solid"/>
+                      <a:round/>
+                      <a:headEnd type="none" w="med" len="med"/>
+                      <a:tailEnd type="none" w="med" len="med"/>
+                    </a:lnB>
+                  </a:tcPr>
+                </a:tc>
+              </a:tr>
+              <a:tr h="274320">
+                <a:tc>
+                  <a:txBody>
+                    <a:bodyPr/>
+                    <a:lstStyle/>
+                    <a:p>
+                      <a:pPr algn="ctr" indent="0" marL="0">
+                        <a:buNone/>
+                      </a:pPr>
+                      <a:r>
+                        <a:rPr lang="en-US" sz="1300" dirty="0">
+                          <a:solidFill>
+                            <a:srgbClr val="3B4A7A"/>
+                          </a:solidFill>
+                          <a:latin typeface="Calibri" pitchFamily="34" charset="0"/>
+                          <a:ea typeface="Calibri" pitchFamily="34" charset="-122"/>
+                          <a:cs typeface="Calibri" pitchFamily="34" charset="-120"/>
+                        </a:rPr>
+                        <a:t>21-30</a:t>
+                      </a:r>
+                      <a:endParaRPr lang="en-US" sz="1300" dirty="0">
+                        <a:latin typeface="Calibri" charset="0"/>
+                        <a:ea typeface="Calibri" charset="0"/>
+                        <a:cs typeface="Calibri" charset="0"/>
+                      </a:endParaRPr>
+                    </a:p>
+                  </a:txBody>
+                  <a:tcPr marL="91440" marR="91440" marT="45720" marB="45720" anchor="ctr">
+                    <a:lnL w="6350" cap="flat" cmpd="sng" algn="ctr">
+                      <a:solidFill>
+                        <a:srgbClr val="D6DBE8"/>
+                      </a:solidFill>
+                      <a:prstDash val="solid"/>
+                      <a:round/>
+                      <a:headEnd type="none" w="med" len="med"/>
+                      <a:tailEnd type="none" w="med" len="med"/>
+                    </a:lnL>
+                    <a:lnR w="6350" cap="flat" cmpd="sng" algn="ctr">
+                      <a:solidFill>
+                        <a:srgbClr val="D6DBE8"/>
+                      </a:solidFill>
+                      <a:prstDash val="solid"/>
+                      <a:round/>
+                      <a:headEnd type="none" w="med" len="med"/>
+                      <a:tailEnd type="none" w="med" len="med"/>
+                    </a:lnR>
+                    <a:lnT w="6350" cap="flat" cmpd="sng" algn="ctr">
+                      <a:solidFill>
+                        <a:srgbClr val="D6DBE8"/>
+                      </a:solidFill>
+                      <a:prstDash val="solid"/>
+                      <a:round/>
+                      <a:headEnd type="none" w="med" len="med"/>
+                      <a:tailEnd type="none" w="med" len="med"/>
+                    </a:lnT>
+                    <a:lnB w="6350" cap="flat" cmpd="sng" algn="ctr">
+                      <a:solidFill>
+                        <a:srgbClr val="D6DBE8"/>
+                      </a:solidFill>
+                      <a:prstDash val="solid"/>
+                      <a:round/>
+                      <a:headEnd type="none" w="med" len="med"/>
+                      <a:tailEnd type="none" w="med" len="med"/>
+                    </a:lnB>
+                  </a:tcPr>
+                </a:tc>
+                <a:tc>
+                  <a:txBody>
+                    <a:bodyPr/>
+                    <a:lstStyle/>
+                    <a:p>
+                      <a:pPr algn="ctr" indent="0" marL="0">
+                        <a:buNone/>
+                      </a:pPr>
+                      <a:r>
+                        <a:rPr lang="en-US" sz="1300" dirty="0">
+                          <a:solidFill>
+                            <a:srgbClr val="3B4A7A"/>
+                          </a:solidFill>
+                          <a:latin typeface="Calibri" pitchFamily="34" charset="0"/>
+                          <a:ea typeface="Calibri" pitchFamily="34" charset="-122"/>
+                          <a:cs typeface="Calibri" pitchFamily="34" charset="-120"/>
+                        </a:rPr>
+                        <a:t>832</a:t>
+                      </a:r>
+                      <a:endParaRPr lang="en-US" sz="1300" dirty="0">
+                        <a:latin typeface="Calibri" charset="0"/>
+                        <a:ea typeface="Calibri" charset="0"/>
+                        <a:cs typeface="Calibri" charset="0"/>
+                      </a:endParaRPr>
+                    </a:p>
+                  </a:txBody>
+                  <a:tcPr marL="91440" marR="91440" marT="45720" marB="45720" anchor="ctr">
+                    <a:lnL w="6350" cap="flat" cmpd="sng" algn="ctr">
+                      <a:solidFill>
+                        <a:srgbClr val="D6DBE8"/>
+                      </a:solidFill>
+                      <a:prstDash val="solid"/>
+                      <a:round/>
+                      <a:headEnd type="none" w="med" len="med"/>
+                      <a:tailEnd type="none" w="med" len="med"/>
+                    </a:lnL>
+                    <a:lnR w="6350" cap="flat" cmpd="sng" algn="ctr">
+                      <a:solidFill>
+                        <a:srgbClr val="D6DBE8"/>
+                      </a:solidFill>
+                      <a:prstDash val="solid"/>
+                      <a:round/>
+                      <a:headEnd type="none" w="med" len="med"/>
+                      <a:tailEnd type="none" w="med" len="med"/>
+                    </a:lnR>
+                    <a:lnT w="6350" cap="flat" cmpd="sng" algn="ctr">
+                      <a:solidFill>
+                        <a:srgbClr val="D6DBE8"/>
+                      </a:solidFill>
+                      <a:prstDash val="solid"/>
+                      <a:round/>
+                      <a:headEnd type="none" w="med" len="med"/>
+                      <a:tailEnd type="none" w="med" len="med"/>
+                    </a:lnT>
+                    <a:lnB w="6350" cap="flat" cmpd="sng" algn="ctr">
+                      <a:solidFill>
+                        <a:srgbClr val="D6DBE8"/>
+                      </a:solidFill>
+                      <a:prstDash val="solid"/>
+                      <a:round/>
+                      <a:headEnd type="none" w="med" len="med"/>
+                      <a:tailEnd type="none" w="med" len="med"/>
+                    </a:lnB>
+                  </a:tcPr>
+                </a:tc>
+                <a:tc>
+                  <a:txBody>
+                    <a:bodyPr/>
+                    <a:lstStyle/>
+                    <a:p>
+                      <a:pPr algn="ctr" indent="0" marL="0">
+                        <a:buNone/>
+                      </a:pPr>
+                      <a:r>
+                        <a:rPr lang="en-US" sz="1300" dirty="0">
+                          <a:solidFill>
+                            <a:srgbClr val="3B4A7A"/>
+                          </a:solidFill>
+                          <a:latin typeface="Calibri" pitchFamily="34" charset="0"/>
+                          <a:ea typeface="Calibri" pitchFamily="34" charset="-122"/>
+                          <a:cs typeface="Calibri" pitchFamily="34" charset="-120"/>
+                        </a:rPr>
+                        <a:t>21.66</a:t>
+                      </a:r>
+                      <a:endParaRPr lang="en-US" sz="1300" dirty="0">
+                        <a:latin typeface="Calibri" charset="0"/>
+                        <a:ea typeface="Calibri" charset="0"/>
+                        <a:cs typeface="Calibri" charset="0"/>
+                      </a:endParaRPr>
+                    </a:p>
+                  </a:txBody>
+                  <a:tcPr marL="91440" marR="91440" marT="45720" marB="45720" anchor="ctr">
+                    <a:lnL w="6350" cap="flat" cmpd="sng" algn="ctr">
+                      <a:solidFill>
+                        <a:srgbClr val="D6DBE8"/>
+                      </a:solidFill>
+                      <a:prstDash val="solid"/>
+                      <a:round/>
+                      <a:headEnd type="none" w="med" len="med"/>
+                      <a:tailEnd type="none" w="med" len="med"/>
+                    </a:lnL>
+                    <a:lnR w="6350" cap="flat" cmpd="sng" algn="ctr">
+                      <a:solidFill>
+                        <a:srgbClr val="D6DBE8"/>
+                      </a:solidFill>
+                      <a:prstDash val="solid"/>
+                      <a:round/>
+                      <a:headEnd type="none" w="med" len="med"/>
+                      <a:tailEnd type="none" w="med" len="med"/>
+                    </a:lnR>
+                    <a:lnT w="6350" cap="flat" cmpd="sng" algn="ctr">
+                      <a:solidFill>
+                        <a:srgbClr val="D6DBE8"/>
+                      </a:solidFill>
+                      <a:prstDash val="solid"/>
+                      <a:round/>
+                      <a:headEnd type="none" w="med" len="med"/>
+                      <a:tailEnd type="none" w="med" len="med"/>
+                    </a:lnT>
+                    <a:lnB w="6350" cap="flat" cmpd="sng" algn="ctr">
+                      <a:solidFill>
+                        <a:srgbClr val="D6DBE8"/>
+                      </a:solidFill>
+                      <a:prstDash val="solid"/>
+                      <a:round/>
+                      <a:headEnd type="none" w="med" len="med"/>
+                      <a:tailEnd type="none" w="med" len="med"/>
+                    </a:lnB>
+                  </a:tcPr>
+                </a:tc>
+                <a:tc>
+                  <a:txBody>
+                    <a:bodyPr/>
+                    <a:lstStyle/>
+                    <a:p>
+                      <a:pPr algn="ctr" indent="0" marL="0">
+                        <a:buNone/>
+                      </a:pPr>
+                      <a:r>
+                        <a:rPr lang="en-US" sz="1300" dirty="0">
+                          <a:solidFill>
+                            <a:srgbClr val="3B4A7A"/>
+                          </a:solidFill>
+                          <a:latin typeface="Calibri" pitchFamily="34" charset="0"/>
+                          <a:ea typeface="Calibri" pitchFamily="34" charset="-122"/>
+                          <a:cs typeface="Calibri" pitchFamily="34" charset="-120"/>
+                        </a:rPr>
+                        <a:t>9.95</a:t>
+                      </a:r>
+                      <a:endParaRPr lang="en-US" sz="1300" dirty="0">
+                        <a:latin typeface="Calibri" charset="0"/>
+                        <a:ea typeface="Calibri" charset="0"/>
+                        <a:cs typeface="Calibri" charset="0"/>
+                      </a:endParaRPr>
+                    </a:p>
+                  </a:txBody>
+                  <a:tcPr marL="91440" marR="91440" marT="45720" marB="45720" anchor="ctr">
+                    <a:lnL w="6350" cap="flat" cmpd="sng" algn="ctr">
+                      <a:solidFill>
+                        <a:srgbClr val="D6DBE8"/>
+                      </a:solidFill>
+                      <a:prstDash val="solid"/>
+                      <a:round/>
+                      <a:headEnd type="none" w="med" len="med"/>
+                      <a:tailEnd type="none" w="med" len="med"/>
+                    </a:lnL>
+                    <a:lnR w="6350" cap="flat" cmpd="sng" algn="ctr">
+                      <a:solidFill>
+                        <a:srgbClr val="D6DBE8"/>
+                      </a:solidFill>
+                      <a:prstDash val="solid"/>
+                      <a:round/>
+                      <a:headEnd type="none" w="med" len="med"/>
+                      <a:tailEnd type="none" w="med" len="med"/>
+                    </a:lnR>
+                    <a:lnT w="6350" cap="flat" cmpd="sng" algn="ctr">
+                      <a:solidFill>
+                        <a:srgbClr val="D6DBE8"/>
+                      </a:solidFill>
+                      <a:prstDash val="solid"/>
+                      <a:round/>
+                      <a:headEnd type="none" w="med" len="med"/>
+                      <a:tailEnd type="none" w="med" len="med"/>
+                    </a:lnT>
+                    <a:lnB w="6350" cap="flat" cmpd="sng" algn="ctr">
+                      <a:solidFill>
+                        <a:srgbClr val="D6DBE8"/>
+                      </a:solidFill>
+                      <a:prstDash val="solid"/>
+                      <a:round/>
+                      <a:headEnd type="none" w="med" len="med"/>
+                      <a:tailEnd type="none" w="med" len="med"/>
+                    </a:lnB>
+                  </a:tcPr>
+                </a:tc>
+                <a:tc>
+                  <a:txBody>
+                    <a:bodyPr/>
+                    <a:lstStyle/>
+                    <a:p>
+                      <a:pPr algn="ctr" indent="0" marL="0">
+                        <a:buNone/>
+                      </a:pPr>
+                      <a:r>
+                        <a:rPr lang="en-US" sz="1300" b="1" dirty="0">
+                          <a:solidFill>
+                            <a:srgbClr val="4C72B0"/>
+                          </a:solidFill>
+                          <a:latin typeface="Calibri" pitchFamily="34" charset="0"/>
+                          <a:ea typeface="Calibri" pitchFamily="34" charset="-122"/>
+                          <a:cs typeface="Calibri" pitchFamily="34" charset="-120"/>
+                        </a:rPr>
+                        <a:t>0.459</a:t>
+                      </a:r>
+                      <a:endParaRPr lang="en-US" sz="1300" dirty="0">
+                        <a:latin typeface="Calibri" charset="0"/>
+                        <a:ea typeface="Calibri" charset="0"/>
+                        <a:cs typeface="Calibri" charset="0"/>
+                      </a:endParaRPr>
+                    </a:p>
+                  </a:txBody>
+                  <a:tcPr marL="91440" marR="91440" marT="45720" marB="45720" anchor="ctr">
+                    <a:lnL w="6350" cap="flat" cmpd="sng" algn="ctr">
+                      <a:solidFill>
+                        <a:srgbClr val="D6DBE8"/>
+                      </a:solidFill>
+                      <a:prstDash val="solid"/>
+                      <a:round/>
+                      <a:headEnd type="none" w="med" len="med"/>
+                      <a:tailEnd type="none" w="med" len="med"/>
+                    </a:lnL>
+                    <a:lnR w="6350" cap="flat" cmpd="sng" algn="ctr">
+                      <a:solidFill>
+                        <a:srgbClr val="D6DBE8"/>
+                      </a:solidFill>
+                      <a:prstDash val="solid"/>
+                      <a:round/>
+                      <a:headEnd type="none" w="med" len="med"/>
+                      <a:tailEnd type="none" w="med" len="med"/>
+                    </a:lnR>
+                    <a:lnT w="6350" cap="flat" cmpd="sng" algn="ctr">
+                      <a:solidFill>
+                        <a:srgbClr val="D6DBE8"/>
+                      </a:solidFill>
+                      <a:prstDash val="solid"/>
+                      <a:round/>
+                      <a:headEnd type="none" w="med" len="med"/>
+                      <a:tailEnd type="none" w="med" len="med"/>
+                    </a:lnT>
+                    <a:lnB w="6350" cap="flat" cmpd="sng" algn="ctr">
+                      <a:solidFill>
+                        <a:srgbClr val="D6DBE8"/>
+                      </a:solidFill>
+                      <a:prstDash val="solid"/>
+                      <a:round/>
+                      <a:headEnd type="none" w="med" len="med"/>
+                      <a:tailEnd type="none" w="med" len="med"/>
+                    </a:lnB>
+                  </a:tcPr>
+                </a:tc>
+              </a:tr>
+              <a:tr h="274320">
+                <a:tc>
+                  <a:txBody>
+                    <a:bodyPr/>
+                    <a:lstStyle/>
+                    <a:p>
+                      <a:pPr algn="ctr" indent="0" marL="0">
+                        <a:buNone/>
+                      </a:pPr>
+                      <a:r>
+                        <a:rPr lang="en-US" sz="1300" dirty="0">
+                          <a:solidFill>
+                            <a:srgbClr val="3B4A7A"/>
+                          </a:solidFill>
+                          <a:latin typeface="Calibri" pitchFamily="34" charset="0"/>
+                          <a:ea typeface="Calibri" pitchFamily="34" charset="-122"/>
+                          <a:cs typeface="Calibri" pitchFamily="34" charset="-120"/>
+                        </a:rPr>
+                        <a:t>31-40</a:t>
+                      </a:r>
+                      <a:endParaRPr lang="en-US" sz="1300" dirty="0">
+                        <a:latin typeface="Calibri" charset="0"/>
+                        <a:ea typeface="Calibri" charset="0"/>
+                        <a:cs typeface="Calibri" charset="0"/>
+                      </a:endParaRPr>
+                    </a:p>
+                  </a:txBody>
+                  <a:tcPr marL="91440" marR="91440" marT="45720" marB="45720" anchor="ctr">
+                    <a:lnL w="6350" cap="flat" cmpd="sng" algn="ctr">
+                      <a:solidFill>
+                        <a:srgbClr val="D6DBE8"/>
+                      </a:solidFill>
+                      <a:prstDash val="solid"/>
+                      <a:round/>
+                      <a:headEnd type="none" w="med" len="med"/>
+                      <a:tailEnd type="none" w="med" len="med"/>
+                    </a:lnL>
+                    <a:lnR w="6350" cap="flat" cmpd="sng" algn="ctr">
+                      <a:solidFill>
+                        <a:srgbClr val="D6DBE8"/>
+                      </a:solidFill>
+                      <a:prstDash val="solid"/>
+                      <a:round/>
+                      <a:headEnd type="none" w="med" len="med"/>
+                      <a:tailEnd type="none" w="med" len="med"/>
+                    </a:lnR>
+                    <a:lnT w="6350" cap="flat" cmpd="sng" algn="ctr">
+                      <a:solidFill>
+                        <a:srgbClr val="D6DBE8"/>
+                      </a:solidFill>
+                      <a:prstDash val="solid"/>
+                      <a:round/>
+                      <a:headEnd type="none" w="med" len="med"/>
+                      <a:tailEnd type="none" w="med" len="med"/>
+                    </a:lnT>
+                    <a:lnB w="6350" cap="flat" cmpd="sng" algn="ctr">
+                      <a:solidFill>
+                        <a:srgbClr val="D6DBE8"/>
+                      </a:solidFill>
+                      <a:prstDash val="solid"/>
+                      <a:round/>
+                      <a:headEnd type="none" w="med" len="med"/>
+                      <a:tailEnd type="none" w="med" len="med"/>
+                    </a:lnB>
+                  </a:tcPr>
+                </a:tc>
+                <a:tc>
+                  <a:txBody>
+                    <a:bodyPr/>
+                    <a:lstStyle/>
+                    <a:p>
+                      <a:pPr algn="ctr" indent="0" marL="0">
+                        <a:buNone/>
+                      </a:pPr>
+                      <a:r>
+                        <a:rPr lang="en-US" sz="1300" dirty="0">
+                          <a:solidFill>
+                            <a:srgbClr val="3B4A7A"/>
+                          </a:solidFill>
+                          <a:latin typeface="Calibri" pitchFamily="34" charset="0"/>
+                          <a:ea typeface="Calibri" pitchFamily="34" charset="-122"/>
+                          <a:cs typeface="Calibri" pitchFamily="34" charset="-120"/>
+                        </a:rPr>
+                        <a:t>535</a:t>
+                      </a:r>
+                      <a:endParaRPr lang="en-US" sz="1300" dirty="0">
+                        <a:latin typeface="Calibri" charset="0"/>
+                        <a:ea typeface="Calibri" charset="0"/>
+                        <a:cs typeface="Calibri" charset="0"/>
+                      </a:endParaRPr>
+                    </a:p>
+                  </a:txBody>
+                  <a:tcPr marL="91440" marR="91440" marT="45720" marB="45720" anchor="ctr">
+                    <a:lnL w="6350" cap="flat" cmpd="sng" algn="ctr">
+                      <a:solidFill>
+                        <a:srgbClr val="D6DBE8"/>
+                      </a:solidFill>
+                      <a:prstDash val="solid"/>
+                      <a:round/>
+                      <a:headEnd type="none" w="med" len="med"/>
+                      <a:tailEnd type="none" w="med" len="med"/>
+                    </a:lnL>
+                    <a:lnR w="6350" cap="flat" cmpd="sng" algn="ctr">
+                      <a:solidFill>
+                        <a:srgbClr val="D6DBE8"/>
+                      </a:solidFill>
+                      <a:prstDash val="solid"/>
+                      <a:round/>
+                      <a:headEnd type="none" w="med" len="med"/>
+                      <a:tailEnd type="none" w="med" len="med"/>
+                    </a:lnR>
+                    <a:lnT w="6350" cap="flat" cmpd="sng" algn="ctr">
+                      <a:solidFill>
+                        <a:srgbClr val="D6DBE8"/>
+                      </a:solidFill>
+                      <a:prstDash val="solid"/>
+                      <a:round/>
+                      <a:headEnd type="none" w="med" len="med"/>
+                      <a:tailEnd type="none" w="med" len="med"/>
+                    </a:lnT>
+                    <a:lnB w="6350" cap="flat" cmpd="sng" algn="ctr">
+                      <a:solidFill>
+                        <a:srgbClr val="D6DBE8"/>
+                      </a:solidFill>
+                      <a:prstDash val="solid"/>
+                      <a:round/>
+                      <a:headEnd type="none" w="med" len="med"/>
+                      <a:tailEnd type="none" w="med" len="med"/>
+                    </a:lnB>
+                  </a:tcPr>
+                </a:tc>
+                <a:tc>
+                  <a:txBody>
+                    <a:bodyPr/>
+                    <a:lstStyle/>
+                    <a:p>
+                      <a:pPr algn="ctr" indent="0" marL="0">
+                        <a:buNone/>
+                      </a:pPr>
+                      <a:r>
+                        <a:rPr lang="en-US" sz="1300" dirty="0">
+                          <a:solidFill>
+                            <a:srgbClr val="3B4A7A"/>
+                          </a:solidFill>
+                          <a:latin typeface="Calibri" pitchFamily="34" charset="0"/>
+                          <a:ea typeface="Calibri" pitchFamily="34" charset="-122"/>
+                          <a:cs typeface="Calibri" pitchFamily="34" charset="-120"/>
+                        </a:rPr>
+                        <a:t>27.96</a:t>
+                      </a:r>
+                      <a:endParaRPr lang="en-US" sz="1300" dirty="0">
+                        <a:latin typeface="Calibri" charset="0"/>
+                        <a:ea typeface="Calibri" charset="0"/>
+                        <a:cs typeface="Calibri" charset="0"/>
+                      </a:endParaRPr>
+                    </a:p>
+                  </a:txBody>
+                  <a:tcPr marL="91440" marR="91440" marT="45720" marB="45720" anchor="ctr">
+                    <a:lnL w="6350" cap="flat" cmpd="sng" algn="ctr">
+                      <a:solidFill>
+                        <a:srgbClr val="D6DBE8"/>
+                      </a:solidFill>
+                      <a:prstDash val="solid"/>
+                      <a:round/>
+                      <a:headEnd type="none" w="med" len="med"/>
+                      <a:tailEnd type="none" w="med" len="med"/>
+                    </a:lnL>
+                    <a:lnR w="6350" cap="flat" cmpd="sng" algn="ctr">
+                      <a:solidFill>
+                        <a:srgbClr val="D6DBE8"/>
+                      </a:solidFill>
+                      <a:prstDash val="solid"/>
+                      <a:round/>
+                      <a:headEnd type="none" w="med" len="med"/>
+                      <a:tailEnd type="none" w="med" len="med"/>
+                    </a:lnR>
+                    <a:lnT w="6350" cap="flat" cmpd="sng" algn="ctr">
+                      <a:solidFill>
+                        <a:srgbClr val="D6DBE8"/>
+                      </a:solidFill>
+                      <a:prstDash val="solid"/>
+                      <a:round/>
+                      <a:headEnd type="none" w="med" len="med"/>
+                      <a:tailEnd type="none" w="med" len="med"/>
+                    </a:lnT>
+                    <a:lnB w="6350" cap="flat" cmpd="sng" algn="ctr">
+                      <a:solidFill>
+                        <a:srgbClr val="D6DBE8"/>
+                      </a:solidFill>
+                      <a:prstDash val="solid"/>
+                      <a:round/>
+                      <a:headEnd type="none" w="med" len="med"/>
+                      <a:tailEnd type="none" w="med" len="med"/>
+                    </a:lnB>
+                  </a:tcPr>
+                </a:tc>
+                <a:tc>
+                  <a:txBody>
+                    <a:bodyPr/>
+                    <a:lstStyle/>
+                    <a:p>
+                      <a:pPr algn="ctr" indent="0" marL="0">
+                        <a:buNone/>
+                      </a:pPr>
+                      <a:r>
+                        <a:rPr lang="en-US" sz="1300" dirty="0">
+                          <a:solidFill>
+                            <a:srgbClr val="3B4A7A"/>
+                          </a:solidFill>
+                          <a:latin typeface="Calibri" pitchFamily="34" charset="0"/>
+                          <a:ea typeface="Calibri" pitchFamily="34" charset="-122"/>
+                          <a:cs typeface="Calibri" pitchFamily="34" charset="-120"/>
+                        </a:rPr>
+                        <a:t>11.27</a:t>
+                      </a:r>
+                      <a:endParaRPr lang="en-US" sz="1300" dirty="0">
+                        <a:latin typeface="Calibri" charset="0"/>
+                        <a:ea typeface="Calibri" charset="0"/>
+                        <a:cs typeface="Calibri" charset="0"/>
+                      </a:endParaRPr>
+                    </a:p>
+                  </a:txBody>
+                  <a:tcPr marL="91440" marR="91440" marT="45720" marB="45720" anchor="ctr">
+                    <a:lnL w="6350" cap="flat" cmpd="sng" algn="ctr">
+                      <a:solidFill>
+                        <a:srgbClr val="D6DBE8"/>
+                      </a:solidFill>
+                      <a:prstDash val="solid"/>
+                      <a:round/>
+                      <a:headEnd type="none" w="med" len="med"/>
+                      <a:tailEnd type="none" w="med" len="med"/>
+                    </a:lnL>
+                    <a:lnR w="6350" cap="flat" cmpd="sng" algn="ctr">
+                      <a:solidFill>
+                        <a:srgbClr val="D6DBE8"/>
+                      </a:solidFill>
+                      <a:prstDash val="solid"/>
+                      <a:round/>
+                      <a:headEnd type="none" w="med" len="med"/>
+                      <a:tailEnd type="none" w="med" len="med"/>
+                    </a:lnR>
+                    <a:lnT w="6350" cap="flat" cmpd="sng" algn="ctr">
+                      <a:solidFill>
+                        <a:srgbClr val="D6DBE8"/>
+                      </a:solidFill>
+                      <a:prstDash val="solid"/>
+                      <a:round/>
+                      <a:headEnd type="none" w="med" len="med"/>
+                      <a:tailEnd type="none" w="med" len="med"/>
+                    </a:lnT>
+                    <a:lnB w="6350" cap="flat" cmpd="sng" algn="ctr">
+                      <a:solidFill>
+                        <a:srgbClr val="D6DBE8"/>
+                      </a:solidFill>
+                      <a:prstDash val="solid"/>
+                      <a:round/>
+                      <a:headEnd type="none" w="med" len="med"/>
+                      <a:tailEnd type="none" w="med" len="med"/>
+                    </a:lnB>
+                  </a:tcPr>
+                </a:tc>
+                <a:tc>
+                  <a:txBody>
+                    <a:bodyPr/>
+                    <a:lstStyle/>
+                    <a:p>
+                      <a:pPr algn="ctr" indent="0" marL="0">
+                        <a:buNone/>
+                      </a:pPr>
+                      <a:r>
+                        <a:rPr lang="en-US" sz="1300" b="1" dirty="0">
+                          <a:solidFill>
+                            <a:srgbClr val="4C72B0"/>
+                          </a:solidFill>
+                          <a:latin typeface="Calibri" pitchFamily="34" charset="0"/>
+                          <a:ea typeface="Calibri" pitchFamily="34" charset="-122"/>
+                          <a:cs typeface="Calibri" pitchFamily="34" charset="-120"/>
+                        </a:rPr>
+                        <a:t>0.403</a:t>
+                      </a:r>
+                      <a:endParaRPr lang="en-US" sz="1300" dirty="0">
+                        <a:latin typeface="Calibri" charset="0"/>
+                        <a:ea typeface="Calibri" charset="0"/>
+                        <a:cs typeface="Calibri" charset="0"/>
+                      </a:endParaRPr>
+                    </a:p>
+                  </a:txBody>
+                  <a:tcPr marL="91440" marR="91440" marT="45720" marB="45720" anchor="ctr">
+                    <a:lnL w="6350" cap="flat" cmpd="sng" algn="ctr">
+                      <a:solidFill>
+                        <a:srgbClr val="D6DBE8"/>
+                      </a:solidFill>
+                      <a:prstDash val="solid"/>
+                      <a:round/>
+                      <a:headEnd type="none" w="med" len="med"/>
+                      <a:tailEnd type="none" w="med" len="med"/>
+                    </a:lnL>
+                    <a:lnR w="6350" cap="flat" cmpd="sng" algn="ctr">
+                      <a:solidFill>
+                        <a:srgbClr val="D6DBE8"/>
+                      </a:solidFill>
+                      <a:prstDash val="solid"/>
+                      <a:round/>
+                      <a:headEnd type="none" w="med" len="med"/>
+                      <a:tailEnd type="none" w="med" len="med"/>
+                    </a:lnR>
+                    <a:lnT w="6350" cap="flat" cmpd="sng" algn="ctr">
+                      <a:solidFill>
+                        <a:srgbClr val="D6DBE8"/>
+                      </a:solidFill>
+                      <a:prstDash val="solid"/>
+                      <a:round/>
+                      <a:headEnd type="none" w="med" len="med"/>
+                      <a:tailEnd type="none" w="med" len="med"/>
+                    </a:lnT>
+                    <a:lnB w="6350" cap="flat" cmpd="sng" algn="ctr">
+                      <a:solidFill>
+                        <a:srgbClr val="D6DBE8"/>
+                      </a:solidFill>
+                      <a:prstDash val="solid"/>
+                      <a:round/>
+                      <a:headEnd type="none" w="med" len="med"/>
+                      <a:tailEnd type="none" w="med" len="med"/>
+                    </a:lnB>
+                  </a:tcPr>
+                </a:tc>
+              </a:tr>
+              <a:tr h="274320">
+                <a:tc>
+                  <a:txBody>
+                    <a:bodyPr/>
+                    <a:lstStyle/>
+                    <a:p>
+                      <a:pPr algn="ctr" indent="0" marL="0">
+                        <a:buNone/>
+                      </a:pPr>
+                      <a:r>
+                        <a:rPr lang="en-US" sz="1300" dirty="0">
+                          <a:solidFill>
+                            <a:srgbClr val="3B4A7A"/>
+                          </a:solidFill>
+                          <a:latin typeface="Calibri" pitchFamily="34" charset="0"/>
+                          <a:ea typeface="Calibri" pitchFamily="34" charset="-122"/>
+                          <a:cs typeface="Calibri" pitchFamily="34" charset="-120"/>
+                        </a:rPr>
+                        <a:t>41-50</a:t>
+                      </a:r>
+                      <a:endParaRPr lang="en-US" sz="1300" dirty="0">
+                        <a:latin typeface="Calibri" charset="0"/>
+                        <a:ea typeface="Calibri" charset="0"/>
+                        <a:cs typeface="Calibri" charset="0"/>
+                      </a:endParaRPr>
+                    </a:p>
+                  </a:txBody>
+                  <a:tcPr marL="91440" marR="91440" marT="45720" marB="45720" anchor="ctr">
+                    <a:lnL w="6350" cap="flat" cmpd="sng" algn="ctr">
+                      <a:solidFill>
+                        <a:srgbClr val="D6DBE8"/>
+                      </a:solidFill>
+                      <a:prstDash val="solid"/>
+                      <a:round/>
+                      <a:headEnd type="none" w="med" len="med"/>
+                      <a:tailEnd type="none" w="med" len="med"/>
+                    </a:lnL>
+                    <a:lnR w="6350" cap="flat" cmpd="sng" algn="ctr">
+                      <a:solidFill>
+                        <a:srgbClr val="D6DBE8"/>
+                      </a:solidFill>
+                      <a:prstDash val="solid"/>
+                      <a:round/>
+                      <a:headEnd type="none" w="med" len="med"/>
+                      <a:tailEnd type="none" w="med" len="med"/>
+                    </a:lnR>
+                    <a:lnT w="6350" cap="flat" cmpd="sng" algn="ctr">
+                      <a:solidFill>
+                        <a:srgbClr val="D6DBE8"/>
+                      </a:solidFill>
+                      <a:prstDash val="solid"/>
+                      <a:round/>
+                      <a:headEnd type="none" w="med" len="med"/>
+                      <a:tailEnd type="none" w="med" len="med"/>
+                    </a:lnT>
+                    <a:lnB w="6350" cap="flat" cmpd="sng" algn="ctr">
+                      <a:solidFill>
+                        <a:srgbClr val="D6DBE8"/>
+                      </a:solidFill>
+                      <a:prstDash val="solid"/>
+                      <a:round/>
+                      <a:headEnd type="none" w="med" len="med"/>
+                      <a:tailEnd type="none" w="med" len="med"/>
+                    </a:lnB>
+                  </a:tcPr>
+                </a:tc>
+                <a:tc>
+                  <a:txBody>
+                    <a:bodyPr/>
+                    <a:lstStyle/>
+                    <a:p>
+                      <a:pPr algn="ctr" indent="0" marL="0">
+                        <a:buNone/>
+                      </a:pPr>
+                      <a:r>
+                        <a:rPr lang="en-US" sz="1300" dirty="0">
+                          <a:solidFill>
+                            <a:srgbClr val="3B4A7A"/>
+                          </a:solidFill>
+                          <a:latin typeface="Calibri" pitchFamily="34" charset="0"/>
+                          <a:ea typeface="Calibri" pitchFamily="34" charset="-122"/>
+                          <a:cs typeface="Calibri" pitchFamily="34" charset="-120"/>
+                        </a:rPr>
+                        <a:t>194</a:t>
+                      </a:r>
+                      <a:endParaRPr lang="en-US" sz="1300" dirty="0">
+                        <a:latin typeface="Calibri" charset="0"/>
+                        <a:ea typeface="Calibri" charset="0"/>
+                        <a:cs typeface="Calibri" charset="0"/>
+                      </a:endParaRPr>
+                    </a:p>
+                  </a:txBody>
+                  <a:tcPr marL="91440" marR="91440" marT="45720" marB="45720" anchor="ctr">
+                    <a:lnL w="6350" cap="flat" cmpd="sng" algn="ctr">
+                      <a:solidFill>
+                        <a:srgbClr val="D6DBE8"/>
+                      </a:solidFill>
+                      <a:prstDash val="solid"/>
+                      <a:round/>
+                      <a:headEnd type="none" w="med" len="med"/>
+                      <a:tailEnd type="none" w="med" len="med"/>
+                    </a:lnL>
+                    <a:lnR w="6350" cap="flat" cmpd="sng" algn="ctr">
+                      <a:solidFill>
+                        <a:srgbClr val="D6DBE8"/>
+                      </a:solidFill>
+                      <a:prstDash val="solid"/>
+                      <a:round/>
+                      <a:headEnd type="none" w="med" len="med"/>
+                      <a:tailEnd type="none" w="med" len="med"/>
+                    </a:lnR>
+                    <a:lnT w="6350" cap="flat" cmpd="sng" algn="ctr">
+                      <a:solidFill>
+                        <a:srgbClr val="D6DBE8"/>
+                      </a:solidFill>
+                      <a:prstDash val="solid"/>
+                      <a:round/>
+                      <a:headEnd type="none" w="med" len="med"/>
+                      <a:tailEnd type="none" w="med" len="med"/>
+                    </a:lnT>
+                    <a:lnB w="6350" cap="flat" cmpd="sng" algn="ctr">
+                      <a:solidFill>
+                        <a:srgbClr val="D6DBE8"/>
+                      </a:solidFill>
+                      <a:prstDash val="solid"/>
+                      <a:round/>
+                      <a:headEnd type="none" w="med" len="med"/>
+                      <a:tailEnd type="none" w="med" len="med"/>
+                    </a:lnB>
+                  </a:tcPr>
+                </a:tc>
+                <a:tc>
+                  <a:txBody>
+                    <a:bodyPr/>
+                    <a:lstStyle/>
+                    <a:p>
+                      <a:pPr algn="ctr" indent="0" marL="0">
+                        <a:buNone/>
+                      </a:pPr>
+                      <a:r>
+                        <a:rPr lang="en-US" sz="1300" dirty="0">
+                          <a:solidFill>
+                            <a:srgbClr val="3B4A7A"/>
+                          </a:solidFill>
+                          <a:latin typeface="Calibri" pitchFamily="34" charset="0"/>
+                          <a:ea typeface="Calibri" pitchFamily="34" charset="-122"/>
+                          <a:cs typeface="Calibri" pitchFamily="34" charset="-120"/>
+                        </a:rPr>
+                        <a:t>32.97</a:t>
+                      </a:r>
+                      <a:endParaRPr lang="en-US" sz="1300" dirty="0">
+                        <a:latin typeface="Calibri" charset="0"/>
+                        <a:ea typeface="Calibri" charset="0"/>
+                        <a:cs typeface="Calibri" charset="0"/>
+                      </a:endParaRPr>
+                    </a:p>
+                  </a:txBody>
+                  <a:tcPr marL="91440" marR="91440" marT="45720" marB="45720" anchor="ctr">
+                    <a:lnL w="6350" cap="flat" cmpd="sng" algn="ctr">
+                      <a:solidFill>
+                        <a:srgbClr val="D6DBE8"/>
+                      </a:solidFill>
+                      <a:prstDash val="solid"/>
+                      <a:round/>
+                      <a:headEnd type="none" w="med" len="med"/>
+                      <a:tailEnd type="none" w="med" len="med"/>
+                    </a:lnL>
+                    <a:lnR w="6350" cap="flat" cmpd="sng" algn="ctr">
+                      <a:solidFill>
+                        <a:srgbClr val="D6DBE8"/>
+                      </a:solidFill>
+                      <a:prstDash val="solid"/>
+                      <a:round/>
+                      <a:headEnd type="none" w="med" len="med"/>
+                      <a:tailEnd type="none" w="med" len="med"/>
+                    </a:lnR>
+                    <a:lnT w="6350" cap="flat" cmpd="sng" algn="ctr">
+                      <a:solidFill>
+                        <a:srgbClr val="D6DBE8"/>
+                      </a:solidFill>
+                      <a:prstDash val="solid"/>
+                      <a:round/>
+                      <a:headEnd type="none" w="med" len="med"/>
+                      <a:tailEnd type="none" w="med" len="med"/>
+                    </a:lnT>
+                    <a:lnB w="6350" cap="flat" cmpd="sng" algn="ctr">
+                      <a:solidFill>
+                        <a:srgbClr val="D6DBE8"/>
+                      </a:solidFill>
+                      <a:prstDash val="solid"/>
+                      <a:round/>
+                      <a:headEnd type="none" w="med" len="med"/>
+                      <a:tailEnd type="none" w="med" len="med"/>
+                    </a:lnB>
+                  </a:tcPr>
+                </a:tc>
+                <a:tc>
+                  <a:txBody>
+                    <a:bodyPr/>
+                    <a:lstStyle/>
+                    <a:p>
+                      <a:pPr algn="ctr" indent="0" marL="0">
+                        <a:buNone/>
+                      </a:pPr>
+                      <a:r>
+                        <a:rPr lang="en-US" sz="1300" dirty="0">
+                          <a:solidFill>
+                            <a:srgbClr val="3B4A7A"/>
+                          </a:solidFill>
+                          <a:latin typeface="Calibri" pitchFamily="34" charset="0"/>
+                          <a:ea typeface="Calibri" pitchFamily="34" charset="-122"/>
+                          <a:cs typeface="Calibri" pitchFamily="34" charset="-120"/>
+                        </a:rPr>
+                        <a:t>11.60</a:t>
+                      </a:r>
+                      <a:endParaRPr lang="en-US" sz="1300" dirty="0">
+                        <a:latin typeface="Calibri" charset="0"/>
+                        <a:ea typeface="Calibri" charset="0"/>
+                        <a:cs typeface="Calibri" charset="0"/>
+                      </a:endParaRPr>
+                    </a:p>
+                  </a:txBody>
+                  <a:tcPr marL="91440" marR="91440" marT="45720" marB="45720" anchor="ctr">
+                    <a:lnL w="6350" cap="flat" cmpd="sng" algn="ctr">
+                      <a:solidFill>
+                        <a:srgbClr val="D6DBE8"/>
+                      </a:solidFill>
+                      <a:prstDash val="solid"/>
+                      <a:round/>
+                      <a:headEnd type="none" w="med" len="med"/>
+                      <a:tailEnd type="none" w="med" len="med"/>
+                    </a:lnL>
+                    <a:lnR w="6350" cap="flat" cmpd="sng" algn="ctr">
+                      <a:solidFill>
+                        <a:srgbClr val="D6DBE8"/>
+                      </a:solidFill>
+                      <a:prstDash val="solid"/>
+                      <a:round/>
+                      <a:headEnd type="none" w="med" len="med"/>
+                      <a:tailEnd type="none" w="med" len="med"/>
+                    </a:lnR>
+                    <a:lnT w="6350" cap="flat" cmpd="sng" algn="ctr">
+                      <a:solidFill>
+                        <a:srgbClr val="D6DBE8"/>
+                      </a:solidFill>
+                      <a:prstDash val="solid"/>
+                      <a:round/>
+                      <a:headEnd type="none" w="med" len="med"/>
+                      <a:tailEnd type="none" w="med" len="med"/>
+                    </a:lnT>
+                    <a:lnB w="6350" cap="flat" cmpd="sng" algn="ctr">
+                      <a:solidFill>
+                        <a:srgbClr val="D6DBE8"/>
+                      </a:solidFill>
+                      <a:prstDash val="solid"/>
+                      <a:round/>
+                      <a:headEnd type="none" w="med" len="med"/>
+                      <a:tailEnd type="none" w="med" len="med"/>
+                    </a:lnB>
+                  </a:tcPr>
+                </a:tc>
+                <a:tc>
+                  <a:txBody>
+                    <a:bodyPr/>
+                    <a:lstStyle/>
+                    <a:p>
+                      <a:pPr algn="ctr" indent="0" marL="0">
+                        <a:buNone/>
+                      </a:pPr>
+                      <a:r>
+                        <a:rPr lang="en-US" sz="1300" b="1" dirty="0">
+                          <a:solidFill>
+                            <a:srgbClr val="4C72B0"/>
+                          </a:solidFill>
+                          <a:latin typeface="Calibri" pitchFamily="34" charset="0"/>
+                          <a:ea typeface="Calibri" pitchFamily="34" charset="-122"/>
+                          <a:cs typeface="Calibri" pitchFamily="34" charset="-120"/>
+                        </a:rPr>
+                        <a:t>0.352</a:t>
+                      </a:r>
+                      <a:endParaRPr lang="en-US" sz="1300" dirty="0">
+                        <a:latin typeface="Calibri" charset="0"/>
+                        <a:ea typeface="Calibri" charset="0"/>
+                        <a:cs typeface="Calibri" charset="0"/>
+                      </a:endParaRPr>
+                    </a:p>
+                  </a:txBody>
+                  <a:tcPr marL="91440" marR="91440" marT="45720" marB="45720" anchor="ctr">
+                    <a:lnL w="6350" cap="flat" cmpd="sng" algn="ctr">
+                      <a:solidFill>
+                        <a:srgbClr val="D6DBE8"/>
+                      </a:solidFill>
+                      <a:prstDash val="solid"/>
+                      <a:round/>
+                      <a:headEnd type="none" w="med" len="med"/>
+                      <a:tailEnd type="none" w="med" len="med"/>
+                    </a:lnL>
+                    <a:lnR w="6350" cap="flat" cmpd="sng" algn="ctr">
+                      <a:solidFill>
+                        <a:srgbClr val="D6DBE8"/>
+                      </a:solidFill>
+                      <a:prstDash val="solid"/>
+                      <a:round/>
+                      <a:headEnd type="none" w="med" len="med"/>
+                      <a:tailEnd type="none" w="med" len="med"/>
+                    </a:lnR>
+                    <a:lnT w="6350" cap="flat" cmpd="sng" algn="ctr">
+                      <a:solidFill>
+                        <a:srgbClr val="D6DBE8"/>
+                      </a:solidFill>
+                      <a:prstDash val="solid"/>
+                      <a:round/>
+                      <a:headEnd type="none" w="med" len="med"/>
+                      <a:tailEnd type="none" w="med" len="med"/>
+                    </a:lnT>
+                    <a:lnB w="6350" cap="flat" cmpd="sng" algn="ctr">
+                      <a:solidFill>
+                        <a:srgbClr val="D6DBE8"/>
+                      </a:solidFill>
+                      <a:prstDash val="solid"/>
+                      <a:round/>
+                      <a:headEnd type="none" w="med" len="med"/>
+                      <a:tailEnd type="none" w="med" len="med"/>
+                    </a:lnB>
+                  </a:tcPr>
+                </a:tc>
+              </a:tr>
+              <a:tr h="274320">
+                <a:tc>
+                  <a:txBody>
+                    <a:bodyPr/>
+                    <a:lstStyle/>
+                    <a:p>
+                      <a:pPr algn="ctr" indent="0" marL="0">
+                        <a:buNone/>
+                      </a:pPr>
+                      <a:r>
+                        <a:rPr lang="en-US" sz="1300" dirty="0">
+                          <a:solidFill>
+                            <a:srgbClr val="3B4A7A"/>
+                          </a:solidFill>
+                          <a:latin typeface="Calibri" pitchFamily="34" charset="0"/>
+                          <a:ea typeface="Calibri" pitchFamily="34" charset="-122"/>
+                          <a:cs typeface="Calibri" pitchFamily="34" charset="-120"/>
+                        </a:rPr>
+                        <a:t>51-70</a:t>
+                      </a:r>
+                      <a:endParaRPr lang="en-US" sz="1300" dirty="0">
+                        <a:latin typeface="Calibri" charset="0"/>
+                        <a:ea typeface="Calibri" charset="0"/>
+                        <a:cs typeface="Calibri" charset="0"/>
+                      </a:endParaRPr>
+                    </a:p>
+                  </a:txBody>
+                  <a:tcPr marL="91440" marR="91440" marT="45720" marB="45720" anchor="ctr">
+                    <a:lnL w="6350" cap="flat" cmpd="sng" algn="ctr">
+                      <a:solidFill>
+                        <a:srgbClr val="D6DBE8"/>
+                      </a:solidFill>
+                      <a:prstDash val="solid"/>
+                      <a:round/>
+                      <a:headEnd type="none" w="med" len="med"/>
+                      <a:tailEnd type="none" w="med" len="med"/>
+                    </a:lnL>
+                    <a:lnR w="6350" cap="flat" cmpd="sng" algn="ctr">
+                      <a:solidFill>
+                        <a:srgbClr val="D6DBE8"/>
+                      </a:solidFill>
+                      <a:prstDash val="solid"/>
+                      <a:round/>
+                      <a:headEnd type="none" w="med" len="med"/>
+                      <a:tailEnd type="none" w="med" len="med"/>
+                    </a:lnR>
+                    <a:lnT w="6350" cap="flat" cmpd="sng" algn="ctr">
+                      <a:solidFill>
+                        <a:srgbClr val="D6DBE8"/>
+                      </a:solidFill>
+                      <a:prstDash val="solid"/>
+                      <a:round/>
+                      <a:headEnd type="none" w="med" len="med"/>
+                      <a:tailEnd type="none" w="med" len="med"/>
+                    </a:lnT>
+                    <a:lnB w="6350" cap="flat" cmpd="sng" algn="ctr">
+                      <a:solidFill>
+                        <a:srgbClr val="D6DBE8"/>
+                      </a:solidFill>
+                      <a:prstDash val="solid"/>
+                      <a:round/>
+                      <a:headEnd type="none" w="med" len="med"/>
+                      <a:tailEnd type="none" w="med" len="med"/>
+                    </a:lnB>
+                  </a:tcPr>
+                </a:tc>
+                <a:tc>
+                  <a:txBody>
+                    <a:bodyPr/>
+                    <a:lstStyle/>
+                    <a:p>
+                      <a:pPr algn="ctr" indent="0" marL="0">
+                        <a:buNone/>
+                      </a:pPr>
+                      <a:r>
+                        <a:rPr lang="en-US" sz="1300" dirty="0">
+                          <a:solidFill>
+                            <a:srgbClr val="3B4A7A"/>
+                          </a:solidFill>
+                          <a:latin typeface="Calibri" pitchFamily="34" charset="0"/>
+                          <a:ea typeface="Calibri" pitchFamily="34" charset="-122"/>
+                          <a:cs typeface="Calibri" pitchFamily="34" charset="-120"/>
+                        </a:rPr>
+                        <a:t>80</a:t>
+                      </a:r>
+                      <a:endParaRPr lang="en-US" sz="1300" dirty="0">
+                        <a:latin typeface="Calibri" charset="0"/>
+                        <a:ea typeface="Calibri" charset="0"/>
+                        <a:cs typeface="Calibri" charset="0"/>
+                      </a:endParaRPr>
+                    </a:p>
+                  </a:txBody>
+                  <a:tcPr marL="91440" marR="91440" marT="45720" marB="45720" anchor="ctr">
+                    <a:lnL w="6350" cap="flat" cmpd="sng" algn="ctr">
+                      <a:solidFill>
+                        <a:srgbClr val="D6DBE8"/>
+                      </a:solidFill>
+                      <a:prstDash val="solid"/>
+                      <a:round/>
+                      <a:headEnd type="none" w="med" len="med"/>
+                      <a:tailEnd type="none" w="med" len="med"/>
+                    </a:lnL>
+                    <a:lnR w="6350" cap="flat" cmpd="sng" algn="ctr">
+                      <a:solidFill>
+                        <a:srgbClr val="D6DBE8"/>
+                      </a:solidFill>
+                      <a:prstDash val="solid"/>
+                      <a:round/>
+                      <a:headEnd type="none" w="med" len="med"/>
+                      <a:tailEnd type="none" w="med" len="med"/>
+                    </a:lnR>
+                    <a:lnT w="6350" cap="flat" cmpd="sng" algn="ctr">
+                      <a:solidFill>
+                        <a:srgbClr val="D6DBE8"/>
+                      </a:solidFill>
+                      <a:prstDash val="solid"/>
+                      <a:round/>
+                      <a:headEnd type="none" w="med" len="med"/>
+                      <a:tailEnd type="none" w="med" len="med"/>
+                    </a:lnT>
+                    <a:lnB w="6350" cap="flat" cmpd="sng" algn="ctr">
+                      <a:solidFill>
+                        <a:srgbClr val="D6DBE8"/>
+                      </a:solidFill>
+                      <a:prstDash val="solid"/>
+                      <a:round/>
+                      <a:headEnd type="none" w="med" len="med"/>
+                      <a:tailEnd type="none" w="med" len="med"/>
+                    </a:lnB>
+                  </a:tcPr>
+                </a:tc>
+                <a:tc>
+                  <a:txBody>
+                    <a:bodyPr/>
+                    <a:lstStyle/>
+                    <a:p>
+                      <a:pPr algn="ctr" indent="0" marL="0">
+                        <a:buNone/>
+                      </a:pPr>
+                      <a:r>
+                        <a:rPr lang="en-US" sz="1300" dirty="0">
+                          <a:solidFill>
+                            <a:srgbClr val="3B4A7A"/>
+                          </a:solidFill>
+                          <a:latin typeface="Calibri" pitchFamily="34" charset="0"/>
+                          <a:ea typeface="Calibri" pitchFamily="34" charset="-122"/>
+                          <a:cs typeface="Calibri" pitchFamily="34" charset="-120"/>
+                        </a:rPr>
+                        <a:t>39.16</a:t>
+                      </a:r>
+                      <a:endParaRPr lang="en-US" sz="1300" dirty="0">
+                        <a:latin typeface="Calibri" charset="0"/>
+                        <a:ea typeface="Calibri" charset="0"/>
+                        <a:cs typeface="Calibri" charset="0"/>
+                      </a:endParaRPr>
+                    </a:p>
+                  </a:txBody>
+                  <a:tcPr marL="91440" marR="91440" marT="45720" marB="45720" anchor="ctr">
+                    <a:lnL w="6350" cap="flat" cmpd="sng" algn="ctr">
+                      <a:solidFill>
+                        <a:srgbClr val="D6DBE8"/>
+                      </a:solidFill>
+                      <a:prstDash val="solid"/>
+                      <a:round/>
+                      <a:headEnd type="none" w="med" len="med"/>
+                      <a:tailEnd type="none" w="med" len="med"/>
+                    </a:lnL>
+                    <a:lnR w="6350" cap="flat" cmpd="sng" algn="ctr">
+                      <a:solidFill>
+                        <a:srgbClr val="D6DBE8"/>
+                      </a:solidFill>
+                      <a:prstDash val="solid"/>
+                      <a:round/>
+                      <a:headEnd type="none" w="med" len="med"/>
+                      <a:tailEnd type="none" w="med" len="med"/>
+                    </a:lnR>
+                    <a:lnT w="6350" cap="flat" cmpd="sng" algn="ctr">
+                      <a:solidFill>
+                        <a:srgbClr val="D6DBE8"/>
+                      </a:solidFill>
+                      <a:prstDash val="solid"/>
+                      <a:round/>
+                      <a:headEnd type="none" w="med" len="med"/>
+                      <a:tailEnd type="none" w="med" len="med"/>
+                    </a:lnT>
+                    <a:lnB w="6350" cap="flat" cmpd="sng" algn="ctr">
+                      <a:solidFill>
+                        <a:srgbClr val="D6DBE8"/>
+                      </a:solidFill>
+                      <a:prstDash val="solid"/>
+                      <a:round/>
+                      <a:headEnd type="none" w="med" len="med"/>
+                      <a:tailEnd type="none" w="med" len="med"/>
+                    </a:lnB>
+                  </a:tcPr>
+                </a:tc>
+                <a:tc>
+                  <a:txBody>
+                    <a:bodyPr/>
+                    <a:lstStyle/>
+                    <a:p>
+                      <a:pPr algn="ctr" indent="0" marL="0">
+                        <a:buNone/>
+                      </a:pPr>
+                      <a:r>
+                        <a:rPr lang="en-US" sz="1300" dirty="0">
+                          <a:solidFill>
+                            <a:srgbClr val="3B4A7A"/>
+                          </a:solidFill>
+                          <a:latin typeface="Calibri" pitchFamily="34" charset="0"/>
+                          <a:ea typeface="Calibri" pitchFamily="34" charset="-122"/>
+                          <a:cs typeface="Calibri" pitchFamily="34" charset="-120"/>
+                        </a:rPr>
+                        <a:t>12.67</a:t>
+                      </a:r>
+                      <a:endParaRPr lang="en-US" sz="1300" dirty="0">
+                        <a:latin typeface="Calibri" charset="0"/>
+                        <a:ea typeface="Calibri" charset="0"/>
+                        <a:cs typeface="Calibri" charset="0"/>
+                      </a:endParaRPr>
+                    </a:p>
+                  </a:txBody>
+                  <a:tcPr marL="91440" marR="91440" marT="45720" marB="45720" anchor="ctr">
+                    <a:lnL w="6350" cap="flat" cmpd="sng" algn="ctr">
+                      <a:solidFill>
+                        <a:srgbClr val="D6DBE8"/>
+                      </a:solidFill>
+                      <a:prstDash val="solid"/>
+                      <a:round/>
+                      <a:headEnd type="none" w="med" len="med"/>
+                      <a:tailEnd type="none" w="med" len="med"/>
+                    </a:lnL>
+                    <a:lnR w="6350" cap="flat" cmpd="sng" algn="ctr">
+                      <a:solidFill>
+                        <a:srgbClr val="D6DBE8"/>
+                      </a:solidFill>
+                      <a:prstDash val="solid"/>
+                      <a:round/>
+                      <a:headEnd type="none" w="med" len="med"/>
+                      <a:tailEnd type="none" w="med" len="med"/>
+                    </a:lnR>
+                    <a:lnT w="6350" cap="flat" cmpd="sng" algn="ctr">
+                      <a:solidFill>
+                        <a:srgbClr val="D6DBE8"/>
+                      </a:solidFill>
+                      <a:prstDash val="solid"/>
+                      <a:round/>
+                      <a:headEnd type="none" w="med" len="med"/>
+                      <a:tailEnd type="none" w="med" len="med"/>
+                    </a:lnT>
+                    <a:lnB w="6350" cap="flat" cmpd="sng" algn="ctr">
+                      <a:solidFill>
+                        <a:srgbClr val="D6DBE8"/>
+                      </a:solidFill>
+                      <a:prstDash val="solid"/>
+                      <a:round/>
+                      <a:headEnd type="none" w="med" len="med"/>
+                      <a:tailEnd type="none" w="med" len="med"/>
+                    </a:lnB>
+                  </a:tcPr>
+                </a:tc>
+                <a:tc>
+                  <a:txBody>
+                    <a:bodyPr/>
+                    <a:lstStyle/>
+                    <a:p>
+                      <a:pPr algn="ctr" indent="0" marL="0">
+                        <a:buNone/>
+                      </a:pPr>
+                      <a:r>
+                        <a:rPr lang="en-US" sz="1300" b="1" dirty="0">
+                          <a:solidFill>
+                            <a:srgbClr val="4C72B0"/>
+                          </a:solidFill>
+                          <a:latin typeface="Calibri" pitchFamily="34" charset="0"/>
+                          <a:ea typeface="Calibri" pitchFamily="34" charset="-122"/>
+                          <a:cs typeface="Calibri" pitchFamily="34" charset="-120"/>
+                        </a:rPr>
+                        <a:t>0.324</a:t>
+                      </a:r>
+                      <a:endParaRPr lang="en-US" sz="1300" dirty="0">
+                        <a:latin typeface="Calibri" charset="0"/>
+                        <a:ea typeface="Calibri" charset="0"/>
+                        <a:cs typeface="Calibri" charset="0"/>
+                      </a:endParaRPr>
+                    </a:p>
+                  </a:txBody>
+                  <a:tcPr marL="91440" marR="91440" marT="45720" marB="45720" anchor="ctr">
+                    <a:lnL w="6350" cap="flat" cmpd="sng" algn="ctr">
+                      <a:solidFill>
+                        <a:srgbClr val="D6DBE8"/>
+                      </a:solidFill>
+                      <a:prstDash val="solid"/>
+                      <a:round/>
+                      <a:headEnd type="none" w="med" len="med"/>
+                      <a:tailEnd type="none" w="med" len="med"/>
+                    </a:lnL>
+                    <a:lnR w="6350" cap="flat" cmpd="sng" algn="ctr">
+                      <a:solidFill>
+                        <a:srgbClr val="D6DBE8"/>
+                      </a:solidFill>
+                      <a:prstDash val="solid"/>
+                      <a:round/>
+                      <a:headEnd type="none" w="med" len="med"/>
+                      <a:tailEnd type="none" w="med" len="med"/>
+                    </a:lnR>
+                    <a:lnT w="6350" cap="flat" cmpd="sng" algn="ctr">
+                      <a:solidFill>
+                        <a:srgbClr val="D6DBE8"/>
+                      </a:solidFill>
+                      <a:prstDash val="solid"/>
+                      <a:round/>
+                      <a:headEnd type="none" w="med" len="med"/>
+                      <a:tailEnd type="none" w="med" len="med"/>
+                    </a:lnT>
+                    <a:lnB w="6350" cap="flat" cmpd="sng" algn="ctr">
+                      <a:solidFill>
+                        <a:srgbClr val="D6DBE8"/>
+                      </a:solidFill>
+                      <a:prstDash val="solid"/>
+                      <a:round/>
+                      <a:headEnd type="none" w="med" len="med"/>
+                      <a:tailEnd type="none" w="med" len="med"/>
+                    </a:lnB>
+                  </a:tcPr>
+                </a:tc>
+              </a:tr>
+            </a:tbl>
+          </a:graphicData>
+        </a:graphic>
+      </p:graphicFrame>
+      <p:sp>
+        <p:nvSpPr>
+          <p:cNvPr id="5" name="Text 2"/>
+          <p:cNvSpPr txBox="1"/>
           <p:nvPr/>
         </p:nvSpPr>
         <p:spPr>
           <a:xfrm>
-            <a:off x="548640" y="2377440"/>
-            <a:ext cx="11064240" cy="1188720"/>
-          </a:xfrm>
-          <a:prstGeom prst="roundRect">
-            <a:avLst>
-              <a:gd name="adj" fmla="val 7692"/>
-            </a:avLst>
-          </a:prstGeom>
-          <a:solidFill>
-            <a:srgbClr val="FFF4E5"/>
-          </a:solidFill>
-          <a:ln w="12700">
-            <a:solidFill>
-              <a:srgbClr val="E8A33D"/>
-            </a:solidFill>
-            <a:prstDash val="solid"/>
-          </a:ln>
-        </p:spPr>
-      </p:sp>
-      <p:sp>
-        <p:nvSpPr>
-          <p:cNvPr id="5" name="Text 3"/>
-          <p:cNvSpPr txBox="1"/>
-          <p:nvPr/>
-        </p:nvSpPr>
-        <p:spPr>
-          <a:xfrm>
-            <a:off x="822960" y="2697480"/>
-            <a:ext cx="10515600" cy="548640"/>
+            <a:off x="548640" y="3730752"/>
+            <a:ext cx="11064240" cy="822960"/>
           </a:xfrm>
           <a:prstGeom prst="rect">
             <a:avLst/>
@@ -4041,20 +8530,43 @@
               <a:buNone/>
             </a:pPr>
             <a:r>
-              <a:rPr lang="en-US" sz="1600" b="1" dirty="0">
+              <a:rPr lang="en-US" sz="1400" dirty="0">
                 <a:solidFill>
-                  <a:srgbClr val="8A5A12"/>
+                  <a:srgbClr val="3B4A7A"/>
                 </a:solidFill>
                 <a:latin typeface="Calibri" pitchFamily="34" charset="0"/>
                 <a:ea typeface="Calibri" pitchFamily="34" charset="-122"/>
                 <a:cs typeface="Calibri" pitchFamily="34" charset="-120"/>
               </a:rPr>
-              <a:t>Not yet run — make probe</a:t>
-            </a:r>
-            <a:endParaRPr lang="en-US" sz="1600" dirty="0"/>
+              <a:t>Per-token perplexity — the model's own likelihood. No beam search, no brevity penalty, no n-gram matching. A ratio that FALLS across the buckets means attention helps more on long sentences.</a:t>
+            </a:r>
+            <a:endParaRPr lang="en-US" sz="1400" dirty="0"/>
           </a:p>
         </p:txBody>
       </p:sp>
+      <p:pic>
+        <p:nvPicPr>
+          <p:cNvPr id="6" name="Image 0" descr="/Users/rubenstalin/Library/Mobile Documents/com~apple~CloudDocs/Sem 7/Intro to ML/seq2seq-ee5180/results/wmt14_endterm/probe/sentence_vector_norm.png">    </p:cNvPr>
+          <p:cNvPicPr>
+            <a:picLocks noChangeAspect="1"/>
+          </p:cNvPicPr>
+          <p:nvPr/>
+        </p:nvPicPr>
+        <p:blipFill>
+          <a:blip r:embed="rId1"/>
+          <a:srcRect l="0" r="0" t="0" b="0"/>
+          <a:stretch/>
+        </p:blipFill>
+        <p:spPr>
+          <a:xfrm>
+            <a:off x="6583680" y="3657600"/>
+            <a:ext cx="5029200" cy="2286000"/>
+          </a:xfrm>
+          <a:prstGeom prst="rect">
+            <a:avLst/>
+          </a:prstGeom>
+        </p:spPr>
+      </p:pic>
     </p:spTree>
   </p:cSld>
   <p:clrMapOvr>

--- a/slides/EE5180_endterm_slides.pptx
+++ b/slides/EE5180_endterm_slides.pptx
@@ -22,9 +22,10 @@
     <p:sldId id="270" r:id="rId16"/>
     <p:sldId id="271" r:id="rId17"/>
     <p:sldId id="272" r:id="rId18"/>
+    <p:sldId id="273" r:id="rId19"/>
   </p:sldIdLst>
   <p:notesMasterIdLst>
-    <p:notesMasterId r:id="rId19"/>
+    <p:notesMasterId r:id="rId20"/>
   </p:notesMasterIdLst>
   <p:sldSz cx="12192000" cy="6858000"/>
   <p:notesSz cx="6858000" cy="12192000"/>
@@ -958,7 +959,7 @@
           <a:p>
             <a:r>
               <a:rPr lang="en-US" dirty="0"/>
-              <a:t>We label the axis in encoder order rather than un-reversing it to make a prettier picture — the weights index the order the encoder read.</a:t>
+              <a:t>This is the slide to use if asked whether we only reported the tier that agreed with us. We ran the same grid on both, and the cheap tier disagrees on the length claim for a reason we can state: it has no long sentences. The honest reading is that Multi30k tests the plumbing and the seed variance, WMT tests the bottleneck.</a:t>
             </a:r>
             <a:endParaRPr lang="en-US" dirty="0"/>
           </a:p>
@@ -1046,7 +1047,7 @@
           <a:p>
             <a:r>
               <a:rPr lang="en-US" dirty="0"/>
-              <a:t>BLEU is a beam-mediated n-gram view. Perplexity by source length takes the decoding machinery out of the picture entirely, so it is the cleaner test of the same claim.</a:t>
+              <a:t>We label the axis in encoder order rather than un-reversing it to make a prettier picture — the weights index the order the encoder read.</a:t>
             </a:r>
             <a:endParaRPr lang="en-US" dirty="0"/>
           </a:p>
@@ -1134,7 +1135,7 @@
           <a:p>
             <a:r>
               <a:rPr lang="en-US" dirty="0"/>
-              <a:t>Each step removes a constraint the previous one worked around. The move from additive to dot-product attention is not cosmetic: it is what makes all-pairs attention affordable, and we have the memory measurement to show why.</a:t>
+              <a:t>BLEU is a beam-mediated n-gram view. Perplexity by source length takes the decoding machinery out of the picture entirely, so it is the cleaner test of the same claim.</a:t>
             </a:r>
             <a:endParaRPr lang="en-US" dirty="0"/>
           </a:p>
@@ -1222,7 +1223,7 @@
           <a:p>
             <a:r>
               <a:rPr lang="en-US" dirty="0"/>
-              <a:t>Closing on what the evidence does and does not support is the point of the project, not a disclaimer.</a:t>
+              <a:t>Each step removes a constraint the previous one worked around. The move from additive to dot-product attention is not cosmetic: it is what makes all-pairs attention affordable, and we have the memory measurement to show why.</a:t>
             </a:r>
             <a:endParaRPr lang="en-US" dirty="0"/>
           </a:p>
@@ -1246,6 +1247,94 @@
             <a:fld id="{F7021451-1387-4CA6-816F-3879F97B5CBC}" type="slidenum">
               <a:rPr lang="en-US"/>
               <a:t>17</a:t>
+            </a:fld>
+            <a:endParaRPr lang="en-US"/>
+          </a:p>
+        </p:txBody>
+      </p:sp>
+    </p:spTree>
+    <p:extLst>
+      <p:ext uri="{BB962C8B-B14F-4D97-AF65-F5344CB8AC3E}">
+        <p14:creationId xmlns:p14="http://schemas.microsoft.com/office/powerpoint/2010/main" val="1024086991"/>
+      </p:ext>
+    </p:extLst>
+  </p:cSld>
+  <p:clrMapOvr>
+    <a:masterClrMapping/>
+  </p:clrMapOvr>
+</p:notes>
+</file>
+
+<file path=ppt/notesSlides/notesSlide18.xml><?xml version="1.0" encoding="utf-8"?>
+<p:notes xmlns:a="http://schemas.openxmlformats.org/drawingml/2006/main" xmlns:r="http://schemas.openxmlformats.org/officeDocument/2006/relationships" xmlns:p="http://schemas.openxmlformats.org/presentationml/2006/main">
+  <p:cSld>
+    <p:spTree>
+      <p:nvGrpSpPr>
+        <p:cNvPr id="1" name=""/>
+        <p:cNvGrpSpPr/>
+        <p:nvPr/>
+      </p:nvGrpSpPr>
+      <p:grpSpPr>
+        <a:xfrm>
+          <a:off x="0" y="0"/>
+          <a:ext cx="0" cy="0"/>
+          <a:chOff x="0" y="0"/>
+          <a:chExt cx="0" cy="0"/>
+        </a:xfrm>
+      </p:grpSpPr>
+      <p:sp>
+        <p:nvSpPr>
+          <p:cNvPr id="2" name="Slide Image Placeholder 1"/>
+          <p:cNvSpPr>
+            <a:spLocks noGrp="1" noRot="1" noChangeAspect="1"/>
+          </p:cNvSpPr>
+          <p:nvPr>
+            <p:ph type="sldImg"/>
+          </p:nvPr>
+        </p:nvSpPr>
+        <p:spPr/>
+      </p:sp>
+      <p:sp>
+        <p:nvSpPr>
+          <p:cNvPr id="3" name="Notes Placeholder 2"/>
+          <p:cNvSpPr>
+            <a:spLocks noGrp="1"/>
+          </p:cNvSpPr>
+          <p:nvPr>
+            <p:ph type="body" idx="1"/>
+          </p:nvPr>
+        </p:nvSpPr>
+        <p:spPr/>
+        <p:txBody>
+          <a:bodyPr/>
+          <a:lstStyle/>
+          <a:p>
+            <a:r>
+              <a:rPr lang="en-US" dirty="0"/>
+              <a:t>Closing on what the evidence does and does not support is the point of the project, not a disclaimer.</a:t>
+            </a:r>
+            <a:endParaRPr lang="en-US" dirty="0"/>
+          </a:p>
+        </p:txBody>
+      </p:sp>
+      <p:sp>
+        <p:nvSpPr>
+          <p:cNvPr id="4" name="Slide Number Placeholder 3"/>
+          <p:cNvSpPr>
+            <a:spLocks noGrp="1"/>
+          </p:cNvSpPr>
+          <p:nvPr>
+            <p:ph type="sldNum" sz="quarter" idx="10"/>
+          </p:nvPr>
+        </p:nvSpPr>
+        <p:spPr/>
+        <p:txBody>
+          <a:bodyPr/>
+          <a:lstStyle/>
+          <a:p>
+            <a:fld id="{F7021451-1387-4CA6-816F-3879F97B5CBC}" type="slidenum">
+              <a:rPr lang="en-US"/>
+              <a:t>18</a:t>
             </a:fld>
             <a:endParaRPr lang="en-US"/>
           </a:p>
@@ -5935,6 +6024,1322 @@
                 <a:ea typeface="Calibri" pitchFamily="34" charset="-122"/>
                 <a:cs typeface="Calibri" pitchFamily="34" charset="-120"/>
               </a:rPr>
+              <a:t>THE NULL RESULT</a:t>
+            </a:r>
+            <a:endParaRPr lang="en-US" sz="1200" dirty="0"/>
+          </a:p>
+        </p:txBody>
+      </p:sp>
+      <p:sp>
+        <p:nvSpPr>
+          <p:cNvPr id="3" name="Text 1"/>
+          <p:cNvSpPr txBox="1"/>
+          <p:nvPr/>
+        </p:nvSpPr>
+        <p:spPr>
+          <a:xfrm>
+            <a:off x="548640" y="676656"/>
+            <a:ext cx="11064240" cy="713232"/>
+          </a:xfrm>
+          <a:prstGeom prst="rect">
+            <a:avLst/>
+          </a:prstGeom>
+          <a:noFill/>
+          <a:ln/>
+        </p:spPr>
+        <p:txBody>
+          <a:bodyPr wrap="square" lIns="0" tIns="0" rIns="0" bIns="0" rtlCol="0" anchor="ctr"/>
+          <a:lstStyle/>
+          <a:p>
+            <a:pPr indent="0" marL="0">
+              <a:buNone/>
+            </a:pPr>
+            <a:r>
+              <a:rPr lang="en-US" sz="3400" b="1" dirty="0">
+                <a:solidFill>
+                  <a:srgbClr val="18204A"/>
+                </a:solidFill>
+                <a:latin typeface="Cambria" pitchFamily="34" charset="0"/>
+                <a:ea typeface="Cambria" pitchFamily="34" charset="-122"/>
+                <a:cs typeface="Cambria" pitchFamily="34" charset="-120"/>
+              </a:rPr>
+              <a:t>Where the curve does NOT show it — and why</a:t>
+            </a:r>
+            <a:endParaRPr lang="en-US" sz="3400" dirty="0"/>
+          </a:p>
+        </p:txBody>
+      </p:sp>
+      <p:sp>
+        <p:nvSpPr>
+          <p:cNvPr id="4" name="Text 2"/>
+          <p:cNvSpPr txBox="1"/>
+          <p:nvPr/>
+        </p:nvSpPr>
+        <p:spPr>
+          <a:xfrm>
+            <a:off x="548640" y="1444752"/>
+            <a:ext cx="11064240" cy="457200"/>
+          </a:xfrm>
+          <a:prstGeom prst="rect">
+            <a:avLst/>
+          </a:prstGeom>
+          <a:noFill/>
+          <a:ln/>
+        </p:spPr>
+        <p:txBody>
+          <a:bodyPr wrap="square" lIns="0" tIns="0" rIns="0" bIns="0" rtlCol="0" anchor="ctr"/>
+          <a:lstStyle/>
+          <a:p>
+            <a:pPr indent="0" marL="0">
+              <a:buNone/>
+            </a:pPr>
+            <a:r>
+              <a:rPr lang="en-US" sz="1500" dirty="0">
+                <a:solidFill>
+                  <a:srgbClr val="3B4A7A"/>
+                </a:solidFill>
+                <a:latin typeface="Calibri" pitchFamily="34" charset="0"/>
+                <a:ea typeface="Calibri" pitchFamily="34" charset="-122"/>
+                <a:cs typeface="Calibri" pitchFamily="34" charset="-120"/>
+              </a:rPr>
+              <a:t>Same code, same flag, same grid. On Multi30k the length curve does not evidence the bottleneck. Reporting that is the point: the claim is about long sources, and Multi30k has none.</a:t>
+            </a:r>
+            <a:endParaRPr lang="en-US" sz="1500" dirty="0"/>
+          </a:p>
+        </p:txBody>
+      </p:sp>
+      <p:graphicFrame>
+        <p:nvGraphicFramePr>
+          <p:cNvPr id="15" name="Table 0"/>
+          <p:cNvGraphicFramePr>
+            <a:graphicFrameLocks noGrp="1"/>
+          </p:cNvGraphicFramePr>
+          <p:nvPr>
+            <p:extLst>
+              <p:ext uri="{D42A27DB-BD31-4B8C-83A1-F6EECF244321}">
+                <p14:modId xmlns:p14="http://schemas.microsoft.com/office/powerpoint/2010/main" val="1579011935"/>
+              </p:ext>
+            </p:extLst>
+          </p:nvPr>
+        </p:nvGraphicFramePr>
+        <p:xfrm>
+          <a:off x="548640" y="2011680"/>
+          <a:ext cx="11064240" cy="914400"/>
+        </p:xfrm>
+        <a:graphic>
+          <a:graphicData uri="http://schemas.openxmlformats.org/drawingml/2006/table">
+            <a:tbl>
+              <a:tblPr/>
+              <a:tblGrid>
+                <a:gridCol w="2743200"/>
+                <a:gridCol w="1737360"/>
+                <a:gridCol w="1737360"/>
+                <a:gridCol w="3017520"/>
+                <a:gridCol w="1819656"/>
+              </a:tblGrid>
+              <a:tr h="457200">
+                <a:tc>
+                  <a:txBody>
+                    <a:bodyPr/>
+                    <a:lstStyle/>
+                    <a:p>
+                      <a:pPr algn="ctr" indent="0" marL="0">
+                        <a:buNone/>
+                      </a:pPr>
+                      <a:r>
+                        <a:rPr lang="en-US" sz="1300" b="1" dirty="0">
+                          <a:solidFill>
+                            <a:srgbClr val="FFFFFF"/>
+                          </a:solidFill>
+                          <a:latin typeface="Calibri" pitchFamily="34" charset="0"/>
+                          <a:ea typeface="Calibri" pitchFamily="34" charset="-122"/>
+                          <a:cs typeface="Calibri" pitchFamily="34" charset="-120"/>
+                        </a:rPr>
+                        <a:t>tier</a:t>
+                      </a:r>
+                      <a:endParaRPr lang="en-US" sz="1300" dirty="0">
+                        <a:latin typeface="Calibri" charset="0"/>
+                        <a:ea typeface="Calibri" charset="0"/>
+                        <a:cs typeface="Calibri" charset="0"/>
+                      </a:endParaRPr>
+                    </a:p>
+                  </a:txBody>
+                  <a:tcPr marL="91440" marR="91440" marT="45720" marB="45720" anchor="ctr">
+                    <a:lnL w="6350" cap="flat" cmpd="sng" algn="ctr">
+                      <a:solidFill>
+                        <a:srgbClr val="D6DBE8"/>
+                      </a:solidFill>
+                      <a:prstDash val="solid"/>
+                      <a:round/>
+                      <a:headEnd type="none" w="med" len="med"/>
+                      <a:tailEnd type="none" w="med" len="med"/>
+                    </a:lnL>
+                    <a:lnR w="6350" cap="flat" cmpd="sng" algn="ctr">
+                      <a:solidFill>
+                        <a:srgbClr val="D6DBE8"/>
+                      </a:solidFill>
+                      <a:prstDash val="solid"/>
+                      <a:round/>
+                      <a:headEnd type="none" w="med" len="med"/>
+                      <a:tailEnd type="none" w="med" len="med"/>
+                    </a:lnR>
+                    <a:lnT w="6350" cap="flat" cmpd="sng" algn="ctr">
+                      <a:solidFill>
+                        <a:srgbClr val="D6DBE8"/>
+                      </a:solidFill>
+                      <a:prstDash val="solid"/>
+                      <a:round/>
+                      <a:headEnd type="none" w="med" len="med"/>
+                      <a:tailEnd type="none" w="med" len="med"/>
+                    </a:lnT>
+                    <a:lnB w="6350" cap="flat" cmpd="sng" algn="ctr">
+                      <a:solidFill>
+                        <a:srgbClr val="D6DBE8"/>
+                      </a:solidFill>
+                      <a:prstDash val="solid"/>
+                      <a:round/>
+                      <a:headEnd type="none" w="med" len="med"/>
+                      <a:tailEnd type="none" w="med" len="med"/>
+                    </a:lnB>
+                    <a:solidFill>
+                      <a:srgbClr val="18204A"/>
+                    </a:solidFill>
+                  </a:tcPr>
+                </a:tc>
+                <a:tc>
+                  <a:txBody>
+                    <a:bodyPr/>
+                    <a:lstStyle/>
+                    <a:p>
+                      <a:pPr algn="ctr" indent="0" marL="0">
+                        <a:buNone/>
+                      </a:pPr>
+                      <a:r>
+                        <a:rPr lang="en-US" sz="1300" b="1" dirty="0">
+                          <a:solidFill>
+                            <a:srgbClr val="FFFFFF"/>
+                          </a:solidFill>
+                          <a:latin typeface="Calibri" pitchFamily="34" charset="0"/>
+                          <a:ea typeface="Calibri" pitchFamily="34" charset="-122"/>
+                          <a:cs typeface="Calibri" pitchFamily="34" charset="-120"/>
+                        </a:rPr>
+                        <a:t>longest bucket</a:t>
+                      </a:r>
+                      <a:endParaRPr lang="en-US" sz="1300" dirty="0">
+                        <a:latin typeface="Calibri" charset="0"/>
+                        <a:ea typeface="Calibri" charset="0"/>
+                        <a:cs typeface="Calibri" charset="0"/>
+                      </a:endParaRPr>
+                    </a:p>
+                  </a:txBody>
+                  <a:tcPr marL="91440" marR="91440" marT="45720" marB="45720" anchor="ctr">
+                    <a:lnL w="6350" cap="flat" cmpd="sng" algn="ctr">
+                      <a:solidFill>
+                        <a:srgbClr val="D6DBE8"/>
+                      </a:solidFill>
+                      <a:prstDash val="solid"/>
+                      <a:round/>
+                      <a:headEnd type="none" w="med" len="med"/>
+                      <a:tailEnd type="none" w="med" len="med"/>
+                    </a:lnL>
+                    <a:lnR w="6350" cap="flat" cmpd="sng" algn="ctr">
+                      <a:solidFill>
+                        <a:srgbClr val="D6DBE8"/>
+                      </a:solidFill>
+                      <a:prstDash val="solid"/>
+                      <a:round/>
+                      <a:headEnd type="none" w="med" len="med"/>
+                      <a:tailEnd type="none" w="med" len="med"/>
+                    </a:lnR>
+                    <a:lnT w="6350" cap="flat" cmpd="sng" algn="ctr">
+                      <a:solidFill>
+                        <a:srgbClr val="D6DBE8"/>
+                      </a:solidFill>
+                      <a:prstDash val="solid"/>
+                      <a:round/>
+                      <a:headEnd type="none" w="med" len="med"/>
+                      <a:tailEnd type="none" w="med" len="med"/>
+                    </a:lnT>
+                    <a:lnB w="6350" cap="flat" cmpd="sng" algn="ctr">
+                      <a:solidFill>
+                        <a:srgbClr val="D6DBE8"/>
+                      </a:solidFill>
+                      <a:prstDash val="solid"/>
+                      <a:round/>
+                      <a:headEnd type="none" w="med" len="med"/>
+                      <a:tailEnd type="none" w="med" len="med"/>
+                    </a:lnB>
+                    <a:solidFill>
+                      <a:srgbClr val="18204A"/>
+                    </a:solidFill>
+                  </a:tcPr>
+                </a:tc>
+                <a:tc>
+                  <a:txBody>
+                    <a:bodyPr/>
+                    <a:lstStyle/>
+                    <a:p>
+                      <a:pPr algn="ctr" indent="0" marL="0">
+                        <a:buNone/>
+                      </a:pPr>
+                      <a:r>
+                        <a:rPr lang="en-US" sz="1300" b="1" dirty="0">
+                          <a:solidFill>
+                            <a:srgbClr val="FFFFFF"/>
+                          </a:solidFill>
+                          <a:latin typeface="Calibri" pitchFamily="34" charset="0"/>
+                          <a:ea typeface="Calibri" pitchFamily="34" charset="-122"/>
+                          <a:cs typeface="Calibri" pitchFamily="34" charset="-120"/>
+                        </a:rPr>
+                        <a:t>sentences in it</a:t>
+                      </a:r>
+                      <a:endParaRPr lang="en-US" sz="1300" dirty="0">
+                        <a:latin typeface="Calibri" charset="0"/>
+                        <a:ea typeface="Calibri" charset="0"/>
+                        <a:cs typeface="Calibri" charset="0"/>
+                      </a:endParaRPr>
+                    </a:p>
+                  </a:txBody>
+                  <a:tcPr marL="91440" marR="91440" marT="45720" marB="45720" anchor="ctr">
+                    <a:lnL w="6350" cap="flat" cmpd="sng" algn="ctr">
+                      <a:solidFill>
+                        <a:srgbClr val="D6DBE8"/>
+                      </a:solidFill>
+                      <a:prstDash val="solid"/>
+                      <a:round/>
+                      <a:headEnd type="none" w="med" len="med"/>
+                      <a:tailEnd type="none" w="med" len="med"/>
+                    </a:lnL>
+                    <a:lnR w="6350" cap="flat" cmpd="sng" algn="ctr">
+                      <a:solidFill>
+                        <a:srgbClr val="D6DBE8"/>
+                      </a:solidFill>
+                      <a:prstDash val="solid"/>
+                      <a:round/>
+                      <a:headEnd type="none" w="med" len="med"/>
+                      <a:tailEnd type="none" w="med" len="med"/>
+                    </a:lnR>
+                    <a:lnT w="6350" cap="flat" cmpd="sng" algn="ctr">
+                      <a:solidFill>
+                        <a:srgbClr val="D6DBE8"/>
+                      </a:solidFill>
+                      <a:prstDash val="solid"/>
+                      <a:round/>
+                      <a:headEnd type="none" w="med" len="med"/>
+                      <a:tailEnd type="none" w="med" len="med"/>
+                    </a:lnT>
+                    <a:lnB w="6350" cap="flat" cmpd="sng" algn="ctr">
+                      <a:solidFill>
+                        <a:srgbClr val="D6DBE8"/>
+                      </a:solidFill>
+                      <a:prstDash val="solid"/>
+                      <a:round/>
+                      <a:headEnd type="none" w="med" len="med"/>
+                      <a:tailEnd type="none" w="med" len="med"/>
+                    </a:lnB>
+                    <a:solidFill>
+                      <a:srgbClr val="18204A"/>
+                    </a:solidFill>
+                  </a:tcPr>
+                </a:tc>
+                <a:tc>
+                  <a:txBody>
+                    <a:bodyPr/>
+                    <a:lstStyle/>
+                    <a:p>
+                      <a:pPr algn="ctr" indent="0" marL="0">
+                        <a:buNone/>
+                      </a:pPr>
+                      <a:r>
+                        <a:rPr lang="en-US" sz="1300" b="1" dirty="0">
+                          <a:solidFill>
+                            <a:srgbClr val="FFFFFF"/>
+                          </a:solidFill>
+                          <a:latin typeface="Calibri" pitchFamily="34" charset="0"/>
+                          <a:ea typeface="Calibri" pitchFamily="34" charset="-122"/>
+                          <a:cs typeface="Calibri" pitchFamily="34" charset="-120"/>
+                        </a:rPr>
+                        <a:t>attention's gain</a:t>
+                      </a:r>
+                      <a:endParaRPr lang="en-US" sz="1300" dirty="0">
+                        <a:latin typeface="Calibri" charset="0"/>
+                        <a:ea typeface="Calibri" charset="0"/>
+                        <a:cs typeface="Calibri" charset="0"/>
+                      </a:endParaRPr>
+                    </a:p>
+                  </a:txBody>
+                  <a:tcPr marL="91440" marR="91440" marT="45720" marB="45720" anchor="ctr">
+                    <a:lnL w="6350" cap="flat" cmpd="sng" algn="ctr">
+                      <a:solidFill>
+                        <a:srgbClr val="D6DBE8"/>
+                      </a:solidFill>
+                      <a:prstDash val="solid"/>
+                      <a:round/>
+                      <a:headEnd type="none" w="med" len="med"/>
+                      <a:tailEnd type="none" w="med" len="med"/>
+                    </a:lnL>
+                    <a:lnR w="6350" cap="flat" cmpd="sng" algn="ctr">
+                      <a:solidFill>
+                        <a:srgbClr val="D6DBE8"/>
+                      </a:solidFill>
+                      <a:prstDash val="solid"/>
+                      <a:round/>
+                      <a:headEnd type="none" w="med" len="med"/>
+                      <a:tailEnd type="none" w="med" len="med"/>
+                    </a:lnR>
+                    <a:lnT w="6350" cap="flat" cmpd="sng" algn="ctr">
+                      <a:solidFill>
+                        <a:srgbClr val="D6DBE8"/>
+                      </a:solidFill>
+                      <a:prstDash val="solid"/>
+                      <a:round/>
+                      <a:headEnd type="none" w="med" len="med"/>
+                      <a:tailEnd type="none" w="med" len="med"/>
+                    </a:lnT>
+                    <a:lnB w="6350" cap="flat" cmpd="sng" algn="ctr">
+                      <a:solidFill>
+                        <a:srgbClr val="D6DBE8"/>
+                      </a:solidFill>
+                      <a:prstDash val="solid"/>
+                      <a:round/>
+                      <a:headEnd type="none" w="med" len="med"/>
+                      <a:tailEnd type="none" w="med" len="med"/>
+                    </a:lnB>
+                    <a:solidFill>
+                      <a:srgbClr val="18204A"/>
+                    </a:solidFill>
+                  </a:tcPr>
+                </a:tc>
+                <a:tc>
+                  <a:txBody>
+                    <a:bodyPr/>
+                    <a:lstStyle/>
+                    <a:p>
+                      <a:pPr algn="ctr" indent="0" marL="0">
+                        <a:buNone/>
+                      </a:pPr>
+                      <a:r>
+                        <a:rPr lang="en-US" sz="1300" b="1" dirty="0">
+                          <a:solidFill>
+                            <a:srgbClr val="FFFFFF"/>
+                          </a:solidFill>
+                          <a:latin typeface="Calibri" pitchFamily="34" charset="0"/>
+                          <a:ea typeface="Calibri" pitchFamily="34" charset="-122"/>
+                          <a:cs typeface="Calibri" pitchFamily="34" charset="-120"/>
+                        </a:rPr>
+                        <a:t>verdict</a:t>
+                      </a:r>
+                      <a:endParaRPr lang="en-US" sz="1300" dirty="0">
+                        <a:latin typeface="Calibri" charset="0"/>
+                        <a:ea typeface="Calibri" charset="0"/>
+                        <a:cs typeface="Calibri" charset="0"/>
+                      </a:endParaRPr>
+                    </a:p>
+                  </a:txBody>
+                  <a:tcPr marL="91440" marR="91440" marT="45720" marB="45720" anchor="ctr">
+                    <a:lnL w="6350" cap="flat" cmpd="sng" algn="ctr">
+                      <a:solidFill>
+                        <a:srgbClr val="D6DBE8"/>
+                      </a:solidFill>
+                      <a:prstDash val="solid"/>
+                      <a:round/>
+                      <a:headEnd type="none" w="med" len="med"/>
+                      <a:tailEnd type="none" w="med" len="med"/>
+                    </a:lnL>
+                    <a:lnR w="6350" cap="flat" cmpd="sng" algn="ctr">
+                      <a:solidFill>
+                        <a:srgbClr val="D6DBE8"/>
+                      </a:solidFill>
+                      <a:prstDash val="solid"/>
+                      <a:round/>
+                      <a:headEnd type="none" w="med" len="med"/>
+                      <a:tailEnd type="none" w="med" len="med"/>
+                    </a:lnR>
+                    <a:lnT w="6350" cap="flat" cmpd="sng" algn="ctr">
+                      <a:solidFill>
+                        <a:srgbClr val="D6DBE8"/>
+                      </a:solidFill>
+                      <a:prstDash val="solid"/>
+                      <a:round/>
+                      <a:headEnd type="none" w="med" len="med"/>
+                      <a:tailEnd type="none" w="med" len="med"/>
+                    </a:lnT>
+                    <a:lnB w="6350" cap="flat" cmpd="sng" algn="ctr">
+                      <a:solidFill>
+                        <a:srgbClr val="D6DBE8"/>
+                      </a:solidFill>
+                      <a:prstDash val="solid"/>
+                      <a:round/>
+                      <a:headEnd type="none" w="med" len="med"/>
+                      <a:tailEnd type="none" w="med" len="med"/>
+                    </a:lnB>
+                    <a:solidFill>
+                      <a:srgbClr val="18204A"/>
+                    </a:solidFill>
+                  </a:tcPr>
+                </a:tc>
+              </a:tr>
+              <a:tr h="457200">
+                <a:tc>
+                  <a:txBody>
+                    <a:bodyPr/>
+                    <a:lstStyle/>
+                    <a:p>
+                      <a:pPr algn="ctr" indent="0" marL="0">
+                        <a:buNone/>
+                      </a:pPr>
+                      <a:r>
+                        <a:rPr lang="en-US" sz="1300" dirty="0">
+                          <a:solidFill>
+                            <a:srgbClr val="3B4A7A"/>
+                          </a:solidFill>
+                          <a:latin typeface="Calibri" pitchFamily="34" charset="0"/>
+                          <a:ea typeface="Calibri" pitchFamily="34" charset="-122"/>
+                          <a:cs typeface="Calibri" pitchFamily="34" charset="-120"/>
+                        </a:rPr>
+                        <a:t>Multi30k (captions)</a:t>
+                      </a:r>
+                      <a:endParaRPr lang="en-US" sz="1300" dirty="0">
+                        <a:latin typeface="Calibri" charset="0"/>
+                        <a:ea typeface="Calibri" charset="0"/>
+                        <a:cs typeface="Calibri" charset="0"/>
+                      </a:endParaRPr>
+                    </a:p>
+                  </a:txBody>
+                  <a:tcPr marL="91440" marR="91440" marT="45720" marB="45720" anchor="ctr">
+                    <a:lnL w="6350" cap="flat" cmpd="sng" algn="ctr">
+                      <a:solidFill>
+                        <a:srgbClr val="D6DBE8"/>
+                      </a:solidFill>
+                      <a:prstDash val="solid"/>
+                      <a:round/>
+                      <a:headEnd type="none" w="med" len="med"/>
+                      <a:tailEnd type="none" w="med" len="med"/>
+                    </a:lnL>
+                    <a:lnR w="6350" cap="flat" cmpd="sng" algn="ctr">
+                      <a:solidFill>
+                        <a:srgbClr val="D6DBE8"/>
+                      </a:solidFill>
+                      <a:prstDash val="solid"/>
+                      <a:round/>
+                      <a:headEnd type="none" w="med" len="med"/>
+                      <a:tailEnd type="none" w="med" len="med"/>
+                    </a:lnR>
+                    <a:lnT w="6350" cap="flat" cmpd="sng" algn="ctr">
+                      <a:solidFill>
+                        <a:srgbClr val="D6DBE8"/>
+                      </a:solidFill>
+                      <a:prstDash val="solid"/>
+                      <a:round/>
+                      <a:headEnd type="none" w="med" len="med"/>
+                      <a:tailEnd type="none" w="med" len="med"/>
+                    </a:lnT>
+                    <a:lnB w="6350" cap="flat" cmpd="sng" algn="ctr">
+                      <a:solidFill>
+                        <a:srgbClr val="D6DBE8"/>
+                      </a:solidFill>
+                      <a:prstDash val="solid"/>
+                      <a:round/>
+                      <a:headEnd type="none" w="med" len="med"/>
+                      <a:tailEnd type="none" w="med" len="med"/>
+                    </a:lnB>
+                  </a:tcPr>
+                </a:tc>
+                <a:tc>
+                  <a:txBody>
+                    <a:bodyPr/>
+                    <a:lstStyle/>
+                    <a:p>
+                      <a:pPr algn="ctr" indent="0" marL="0">
+                        <a:buNone/>
+                      </a:pPr>
+                      <a:r>
+                        <a:rPr lang="en-US" sz="1300" dirty="0">
+                          <a:solidFill>
+                            <a:srgbClr val="3B4A7A"/>
+                          </a:solidFill>
+                          <a:latin typeface="Calibri" pitchFamily="34" charset="0"/>
+                          <a:ea typeface="Calibri" pitchFamily="34" charset="-122"/>
+                          <a:cs typeface="Calibri" pitchFamily="34" charset="-120"/>
+                        </a:rPr>
+                        <a:t>21-30</a:t>
+                      </a:r>
+                      <a:endParaRPr lang="en-US" sz="1300" dirty="0">
+                        <a:latin typeface="Calibri" charset="0"/>
+                        <a:ea typeface="Calibri" charset="0"/>
+                        <a:cs typeface="Calibri" charset="0"/>
+                      </a:endParaRPr>
+                    </a:p>
+                  </a:txBody>
+                  <a:tcPr marL="91440" marR="91440" marT="45720" marB="45720" anchor="ctr">
+                    <a:lnL w="6350" cap="flat" cmpd="sng" algn="ctr">
+                      <a:solidFill>
+                        <a:srgbClr val="D6DBE8"/>
+                      </a:solidFill>
+                      <a:prstDash val="solid"/>
+                      <a:round/>
+                      <a:headEnd type="none" w="med" len="med"/>
+                      <a:tailEnd type="none" w="med" len="med"/>
+                    </a:lnL>
+                    <a:lnR w="6350" cap="flat" cmpd="sng" algn="ctr">
+                      <a:solidFill>
+                        <a:srgbClr val="D6DBE8"/>
+                      </a:solidFill>
+                      <a:prstDash val="solid"/>
+                      <a:round/>
+                      <a:headEnd type="none" w="med" len="med"/>
+                      <a:tailEnd type="none" w="med" len="med"/>
+                    </a:lnR>
+                    <a:lnT w="6350" cap="flat" cmpd="sng" algn="ctr">
+                      <a:solidFill>
+                        <a:srgbClr val="D6DBE8"/>
+                      </a:solidFill>
+                      <a:prstDash val="solid"/>
+                      <a:round/>
+                      <a:headEnd type="none" w="med" len="med"/>
+                      <a:tailEnd type="none" w="med" len="med"/>
+                    </a:lnT>
+                    <a:lnB w="6350" cap="flat" cmpd="sng" algn="ctr">
+                      <a:solidFill>
+                        <a:srgbClr val="D6DBE8"/>
+                      </a:solidFill>
+                      <a:prstDash val="solid"/>
+                      <a:round/>
+                      <a:headEnd type="none" w="med" len="med"/>
+                      <a:tailEnd type="none" w="med" len="med"/>
+                    </a:lnB>
+                  </a:tcPr>
+                </a:tc>
+                <a:tc>
+                  <a:txBody>
+                    <a:bodyPr/>
+                    <a:lstStyle/>
+                    <a:p>
+                      <a:pPr algn="ctr" indent="0" marL="0">
+                        <a:buNone/>
+                      </a:pPr>
+                      <a:r>
+                        <a:rPr lang="en-US" sz="1300" dirty="0">
+                          <a:solidFill>
+                            <a:srgbClr val="3B4A7A"/>
+                          </a:solidFill>
+                          <a:latin typeface="Calibri" pitchFamily="34" charset="0"/>
+                          <a:ea typeface="Calibri" pitchFamily="34" charset="-122"/>
+                          <a:cs typeface="Calibri" pitchFamily="34" charset="-120"/>
+                        </a:rPr>
+                        <a:t>52</a:t>
+                      </a:r>
+                      <a:endParaRPr lang="en-US" sz="1300" dirty="0">
+                        <a:latin typeface="Calibri" charset="0"/>
+                        <a:ea typeface="Calibri" charset="0"/>
+                        <a:cs typeface="Calibri" charset="0"/>
+                      </a:endParaRPr>
+                    </a:p>
+                  </a:txBody>
+                  <a:tcPr marL="91440" marR="91440" marT="45720" marB="45720" anchor="ctr">
+                    <a:lnL w="6350" cap="flat" cmpd="sng" algn="ctr">
+                      <a:solidFill>
+                        <a:srgbClr val="D6DBE8"/>
+                      </a:solidFill>
+                      <a:prstDash val="solid"/>
+                      <a:round/>
+                      <a:headEnd type="none" w="med" len="med"/>
+                      <a:tailEnd type="none" w="med" len="med"/>
+                    </a:lnL>
+                    <a:lnR w="6350" cap="flat" cmpd="sng" algn="ctr">
+                      <a:solidFill>
+                        <a:srgbClr val="D6DBE8"/>
+                      </a:solidFill>
+                      <a:prstDash val="solid"/>
+                      <a:round/>
+                      <a:headEnd type="none" w="med" len="med"/>
+                      <a:tailEnd type="none" w="med" len="med"/>
+                    </a:lnR>
+                    <a:lnT w="6350" cap="flat" cmpd="sng" algn="ctr">
+                      <a:solidFill>
+                        <a:srgbClr val="D6DBE8"/>
+                      </a:solidFill>
+                      <a:prstDash val="solid"/>
+                      <a:round/>
+                      <a:headEnd type="none" w="med" len="med"/>
+                      <a:tailEnd type="none" w="med" len="med"/>
+                    </a:lnT>
+                    <a:lnB w="6350" cap="flat" cmpd="sng" algn="ctr">
+                      <a:solidFill>
+                        <a:srgbClr val="D6DBE8"/>
+                      </a:solidFill>
+                      <a:prstDash val="solid"/>
+                      <a:round/>
+                      <a:headEnd type="none" w="med" len="med"/>
+                      <a:tailEnd type="none" w="med" len="med"/>
+                    </a:lnB>
+                  </a:tcPr>
+                </a:tc>
+                <a:tc>
+                  <a:txBody>
+                    <a:bodyPr/>
+                    <a:lstStyle/>
+                    <a:p>
+                      <a:pPr algn="ctr" indent="0" marL="0">
+                        <a:buNone/>
+                      </a:pPr>
+                      <a:r>
+                        <a:rPr lang="en-US" sz="1300" dirty="0">
+                          <a:solidFill>
+                            <a:srgbClr val="3B4A7A"/>
+                          </a:solidFill>
+                          <a:latin typeface="Calibri" pitchFamily="34" charset="0"/>
+                          <a:ea typeface="Calibri" pitchFamily="34" charset="-122"/>
+                          <a:cs typeface="Calibri" pitchFamily="34" charset="-120"/>
+                        </a:rPr>
+                        <a:t>13.87 at 1-10  →  2.43 at 21-30</a:t>
+                      </a:r>
+                      <a:endParaRPr lang="en-US" sz="1300" dirty="0">
+                        <a:latin typeface="Calibri" charset="0"/>
+                        <a:ea typeface="Calibri" charset="0"/>
+                        <a:cs typeface="Calibri" charset="0"/>
+                      </a:endParaRPr>
+                    </a:p>
+                  </a:txBody>
+                  <a:tcPr marL="91440" marR="91440" marT="45720" marB="45720" anchor="ctr">
+                    <a:lnL w="6350" cap="flat" cmpd="sng" algn="ctr">
+                      <a:solidFill>
+                        <a:srgbClr val="D6DBE8"/>
+                      </a:solidFill>
+                      <a:prstDash val="solid"/>
+                      <a:round/>
+                      <a:headEnd type="none" w="med" len="med"/>
+                      <a:tailEnd type="none" w="med" len="med"/>
+                    </a:lnL>
+                    <a:lnR w="6350" cap="flat" cmpd="sng" algn="ctr">
+                      <a:solidFill>
+                        <a:srgbClr val="D6DBE8"/>
+                      </a:solidFill>
+                      <a:prstDash val="solid"/>
+                      <a:round/>
+                      <a:headEnd type="none" w="med" len="med"/>
+                      <a:tailEnd type="none" w="med" len="med"/>
+                    </a:lnR>
+                    <a:lnT w="6350" cap="flat" cmpd="sng" algn="ctr">
+                      <a:solidFill>
+                        <a:srgbClr val="D6DBE8"/>
+                      </a:solidFill>
+                      <a:prstDash val="solid"/>
+                      <a:round/>
+                      <a:headEnd type="none" w="med" len="med"/>
+                      <a:tailEnd type="none" w="med" len="med"/>
+                    </a:lnT>
+                    <a:lnB w="6350" cap="flat" cmpd="sng" algn="ctr">
+                      <a:solidFill>
+                        <a:srgbClr val="D6DBE8"/>
+                      </a:solidFill>
+                      <a:prstDash val="solid"/>
+                      <a:round/>
+                      <a:headEnd type="none" w="med" len="med"/>
+                      <a:tailEnd type="none" w="med" len="med"/>
+                    </a:lnB>
+                  </a:tcPr>
+                </a:tc>
+                <a:tc>
+                  <a:txBody>
+                    <a:bodyPr/>
+                    <a:lstStyle/>
+                    <a:p>
+                      <a:pPr algn="ctr" indent="0" marL="0">
+                        <a:buNone/>
+                      </a:pPr>
+                      <a:r>
+                        <a:rPr lang="en-US" sz="1300" b="1" dirty="0">
+                          <a:solidFill>
+                            <a:srgbClr val="C44E52"/>
+                          </a:solidFill>
+                          <a:latin typeface="Calibri" pitchFamily="34" charset="0"/>
+                          <a:ea typeface="Calibri" pitchFamily="34" charset="-122"/>
+                          <a:cs typeface="Calibri" pitchFamily="34" charset="-120"/>
+                        </a:rPr>
+                        <a:t>does NOT widen</a:t>
+                      </a:r>
+                      <a:endParaRPr lang="en-US" sz="1300" dirty="0">
+                        <a:latin typeface="Calibri" charset="0"/>
+                        <a:ea typeface="Calibri" charset="0"/>
+                        <a:cs typeface="Calibri" charset="0"/>
+                      </a:endParaRPr>
+                    </a:p>
+                  </a:txBody>
+                  <a:tcPr marL="91440" marR="91440" marT="45720" marB="45720" anchor="ctr">
+                    <a:lnL w="6350" cap="flat" cmpd="sng" algn="ctr">
+                      <a:solidFill>
+                        <a:srgbClr val="D6DBE8"/>
+                      </a:solidFill>
+                      <a:prstDash val="solid"/>
+                      <a:round/>
+                      <a:headEnd type="none" w="med" len="med"/>
+                      <a:tailEnd type="none" w="med" len="med"/>
+                    </a:lnL>
+                    <a:lnR w="6350" cap="flat" cmpd="sng" algn="ctr">
+                      <a:solidFill>
+                        <a:srgbClr val="D6DBE8"/>
+                      </a:solidFill>
+                      <a:prstDash val="solid"/>
+                      <a:round/>
+                      <a:headEnd type="none" w="med" len="med"/>
+                      <a:tailEnd type="none" w="med" len="med"/>
+                    </a:lnR>
+                    <a:lnT w="6350" cap="flat" cmpd="sng" algn="ctr">
+                      <a:solidFill>
+                        <a:srgbClr val="D6DBE8"/>
+                      </a:solidFill>
+                      <a:prstDash val="solid"/>
+                      <a:round/>
+                      <a:headEnd type="none" w="med" len="med"/>
+                      <a:tailEnd type="none" w="med" len="med"/>
+                    </a:lnT>
+                    <a:lnB w="6350" cap="flat" cmpd="sng" algn="ctr">
+                      <a:solidFill>
+                        <a:srgbClr val="D6DBE8"/>
+                      </a:solidFill>
+                      <a:prstDash val="solid"/>
+                      <a:round/>
+                      <a:headEnd type="none" w="med" len="med"/>
+                      <a:tailEnd type="none" w="med" len="med"/>
+                    </a:lnB>
+                  </a:tcPr>
+                </a:tc>
+              </a:tr>
+              <a:tr h="457200">
+                <a:tc>
+                  <a:txBody>
+                    <a:bodyPr/>
+                    <a:lstStyle/>
+                    <a:p>
+                      <a:pPr algn="ctr" indent="0" marL="0">
+                        <a:buNone/>
+                      </a:pPr>
+                      <a:r>
+                        <a:rPr lang="en-US" sz="1300" dirty="0">
+                          <a:solidFill>
+                            <a:srgbClr val="3B4A7A"/>
+                          </a:solidFill>
+                          <a:latin typeface="Calibri" pitchFamily="34" charset="0"/>
+                          <a:ea typeface="Calibri" pitchFamily="34" charset="-122"/>
+                          <a:cs typeface="Calibri" pitchFamily="34" charset="-120"/>
+                        </a:rPr>
+                        <a:t>WMT'14 (news)</a:t>
+                      </a:r>
+                      <a:endParaRPr lang="en-US" sz="1300" dirty="0">
+                        <a:latin typeface="Calibri" charset="0"/>
+                        <a:ea typeface="Calibri" charset="0"/>
+                        <a:cs typeface="Calibri" charset="0"/>
+                      </a:endParaRPr>
+                    </a:p>
+                  </a:txBody>
+                  <a:tcPr marL="91440" marR="91440" marT="45720" marB="45720" anchor="ctr">
+                    <a:lnL w="6350" cap="flat" cmpd="sng" algn="ctr">
+                      <a:solidFill>
+                        <a:srgbClr val="D6DBE8"/>
+                      </a:solidFill>
+                      <a:prstDash val="solid"/>
+                      <a:round/>
+                      <a:headEnd type="none" w="med" len="med"/>
+                      <a:tailEnd type="none" w="med" len="med"/>
+                    </a:lnL>
+                    <a:lnR w="6350" cap="flat" cmpd="sng" algn="ctr">
+                      <a:solidFill>
+                        <a:srgbClr val="D6DBE8"/>
+                      </a:solidFill>
+                      <a:prstDash val="solid"/>
+                      <a:round/>
+                      <a:headEnd type="none" w="med" len="med"/>
+                      <a:tailEnd type="none" w="med" len="med"/>
+                    </a:lnR>
+                    <a:lnT w="6350" cap="flat" cmpd="sng" algn="ctr">
+                      <a:solidFill>
+                        <a:srgbClr val="D6DBE8"/>
+                      </a:solidFill>
+                      <a:prstDash val="solid"/>
+                      <a:round/>
+                      <a:headEnd type="none" w="med" len="med"/>
+                      <a:tailEnd type="none" w="med" len="med"/>
+                    </a:lnT>
+                    <a:lnB w="6350" cap="flat" cmpd="sng" algn="ctr">
+                      <a:solidFill>
+                        <a:srgbClr val="D6DBE8"/>
+                      </a:solidFill>
+                      <a:prstDash val="solid"/>
+                      <a:round/>
+                      <a:headEnd type="none" w="med" len="med"/>
+                      <a:tailEnd type="none" w="med" len="med"/>
+                    </a:lnB>
+                  </a:tcPr>
+                </a:tc>
+                <a:tc>
+                  <a:txBody>
+                    <a:bodyPr/>
+                    <a:lstStyle/>
+                    <a:p>
+                      <a:pPr algn="ctr" indent="0" marL="0">
+                        <a:buNone/>
+                      </a:pPr>
+                      <a:r>
+                        <a:rPr lang="en-US" sz="1300" dirty="0">
+                          <a:solidFill>
+                            <a:srgbClr val="3B4A7A"/>
+                          </a:solidFill>
+                          <a:latin typeface="Calibri" pitchFamily="34" charset="0"/>
+                          <a:ea typeface="Calibri" pitchFamily="34" charset="-122"/>
+                          <a:cs typeface="Calibri" pitchFamily="34" charset="-120"/>
+                        </a:rPr>
+                        <a:t>51-70</a:t>
+                      </a:r>
+                      <a:endParaRPr lang="en-US" sz="1300" dirty="0">
+                        <a:latin typeface="Calibri" charset="0"/>
+                        <a:ea typeface="Calibri" charset="0"/>
+                        <a:cs typeface="Calibri" charset="0"/>
+                      </a:endParaRPr>
+                    </a:p>
+                  </a:txBody>
+                  <a:tcPr marL="91440" marR="91440" marT="45720" marB="45720" anchor="ctr">
+                    <a:lnL w="6350" cap="flat" cmpd="sng" algn="ctr">
+                      <a:solidFill>
+                        <a:srgbClr val="D6DBE8"/>
+                      </a:solidFill>
+                      <a:prstDash val="solid"/>
+                      <a:round/>
+                      <a:headEnd type="none" w="med" len="med"/>
+                      <a:tailEnd type="none" w="med" len="med"/>
+                    </a:lnL>
+                    <a:lnR w="6350" cap="flat" cmpd="sng" algn="ctr">
+                      <a:solidFill>
+                        <a:srgbClr val="D6DBE8"/>
+                      </a:solidFill>
+                      <a:prstDash val="solid"/>
+                      <a:round/>
+                      <a:headEnd type="none" w="med" len="med"/>
+                      <a:tailEnd type="none" w="med" len="med"/>
+                    </a:lnR>
+                    <a:lnT w="6350" cap="flat" cmpd="sng" algn="ctr">
+                      <a:solidFill>
+                        <a:srgbClr val="D6DBE8"/>
+                      </a:solidFill>
+                      <a:prstDash val="solid"/>
+                      <a:round/>
+                      <a:headEnd type="none" w="med" len="med"/>
+                      <a:tailEnd type="none" w="med" len="med"/>
+                    </a:lnT>
+                    <a:lnB w="6350" cap="flat" cmpd="sng" algn="ctr">
+                      <a:solidFill>
+                        <a:srgbClr val="D6DBE8"/>
+                      </a:solidFill>
+                      <a:prstDash val="solid"/>
+                      <a:round/>
+                      <a:headEnd type="none" w="med" len="med"/>
+                      <a:tailEnd type="none" w="med" len="med"/>
+                    </a:lnB>
+                  </a:tcPr>
+                </a:tc>
+                <a:tc>
+                  <a:txBody>
+                    <a:bodyPr/>
+                    <a:lstStyle/>
+                    <a:p>
+                      <a:pPr algn="ctr" indent="0" marL="0">
+                        <a:buNone/>
+                      </a:pPr>
+                      <a:r>
+                        <a:rPr lang="en-US" sz="1300" dirty="0">
+                          <a:solidFill>
+                            <a:srgbClr val="3B4A7A"/>
+                          </a:solidFill>
+                          <a:latin typeface="Calibri" pitchFamily="34" charset="0"/>
+                          <a:ea typeface="Calibri" pitchFamily="34" charset="-122"/>
+                          <a:cs typeface="Calibri" pitchFamily="34" charset="-120"/>
+                        </a:rPr>
+                        <a:t>80</a:t>
+                      </a:r>
+                      <a:endParaRPr lang="en-US" sz="1300" dirty="0">
+                        <a:latin typeface="Calibri" charset="0"/>
+                        <a:ea typeface="Calibri" charset="0"/>
+                        <a:cs typeface="Calibri" charset="0"/>
+                      </a:endParaRPr>
+                    </a:p>
+                  </a:txBody>
+                  <a:tcPr marL="91440" marR="91440" marT="45720" marB="45720" anchor="ctr">
+                    <a:lnL w="6350" cap="flat" cmpd="sng" algn="ctr">
+                      <a:solidFill>
+                        <a:srgbClr val="D6DBE8"/>
+                      </a:solidFill>
+                      <a:prstDash val="solid"/>
+                      <a:round/>
+                      <a:headEnd type="none" w="med" len="med"/>
+                      <a:tailEnd type="none" w="med" len="med"/>
+                    </a:lnL>
+                    <a:lnR w="6350" cap="flat" cmpd="sng" algn="ctr">
+                      <a:solidFill>
+                        <a:srgbClr val="D6DBE8"/>
+                      </a:solidFill>
+                      <a:prstDash val="solid"/>
+                      <a:round/>
+                      <a:headEnd type="none" w="med" len="med"/>
+                      <a:tailEnd type="none" w="med" len="med"/>
+                    </a:lnR>
+                    <a:lnT w="6350" cap="flat" cmpd="sng" algn="ctr">
+                      <a:solidFill>
+                        <a:srgbClr val="D6DBE8"/>
+                      </a:solidFill>
+                      <a:prstDash val="solid"/>
+                      <a:round/>
+                      <a:headEnd type="none" w="med" len="med"/>
+                      <a:tailEnd type="none" w="med" len="med"/>
+                    </a:lnT>
+                    <a:lnB w="6350" cap="flat" cmpd="sng" algn="ctr">
+                      <a:solidFill>
+                        <a:srgbClr val="D6DBE8"/>
+                      </a:solidFill>
+                      <a:prstDash val="solid"/>
+                      <a:round/>
+                      <a:headEnd type="none" w="med" len="med"/>
+                      <a:tailEnd type="none" w="med" len="med"/>
+                    </a:lnB>
+                  </a:tcPr>
+                </a:tc>
+                <a:tc>
+                  <a:txBody>
+                    <a:bodyPr/>
+                    <a:lstStyle/>
+                    <a:p>
+                      <a:pPr algn="ctr" indent="0" marL="0">
+                        <a:buNone/>
+                      </a:pPr>
+                      <a:r>
+                        <a:rPr lang="en-US" sz="1300" dirty="0">
+                          <a:solidFill>
+                            <a:srgbClr val="3B4A7A"/>
+                          </a:solidFill>
+                          <a:latin typeface="Calibri" pitchFamily="34" charset="0"/>
+                          <a:ea typeface="Calibri" pitchFamily="34" charset="-122"/>
+                          <a:cs typeface="Calibri" pitchFamily="34" charset="-120"/>
+                        </a:rPr>
+                        <a:t>5.11 at 1-10  →  15.20 at 51-70</a:t>
+                      </a:r>
+                      <a:endParaRPr lang="en-US" sz="1300" dirty="0">
+                        <a:latin typeface="Calibri" charset="0"/>
+                        <a:ea typeface="Calibri" charset="0"/>
+                        <a:cs typeface="Calibri" charset="0"/>
+                      </a:endParaRPr>
+                    </a:p>
+                  </a:txBody>
+                  <a:tcPr marL="91440" marR="91440" marT="45720" marB="45720" anchor="ctr">
+                    <a:lnL w="6350" cap="flat" cmpd="sng" algn="ctr">
+                      <a:solidFill>
+                        <a:srgbClr val="D6DBE8"/>
+                      </a:solidFill>
+                      <a:prstDash val="solid"/>
+                      <a:round/>
+                      <a:headEnd type="none" w="med" len="med"/>
+                      <a:tailEnd type="none" w="med" len="med"/>
+                    </a:lnL>
+                    <a:lnR w="6350" cap="flat" cmpd="sng" algn="ctr">
+                      <a:solidFill>
+                        <a:srgbClr val="D6DBE8"/>
+                      </a:solidFill>
+                      <a:prstDash val="solid"/>
+                      <a:round/>
+                      <a:headEnd type="none" w="med" len="med"/>
+                      <a:tailEnd type="none" w="med" len="med"/>
+                    </a:lnR>
+                    <a:lnT w="6350" cap="flat" cmpd="sng" algn="ctr">
+                      <a:solidFill>
+                        <a:srgbClr val="D6DBE8"/>
+                      </a:solidFill>
+                      <a:prstDash val="solid"/>
+                      <a:round/>
+                      <a:headEnd type="none" w="med" len="med"/>
+                      <a:tailEnd type="none" w="med" len="med"/>
+                    </a:lnT>
+                    <a:lnB w="6350" cap="flat" cmpd="sng" algn="ctr">
+                      <a:solidFill>
+                        <a:srgbClr val="D6DBE8"/>
+                      </a:solidFill>
+                      <a:prstDash val="solid"/>
+                      <a:round/>
+                      <a:headEnd type="none" w="med" len="med"/>
+                      <a:tailEnd type="none" w="med" len="med"/>
+                    </a:lnB>
+                  </a:tcPr>
+                </a:tc>
+                <a:tc>
+                  <a:txBody>
+                    <a:bodyPr/>
+                    <a:lstStyle/>
+                    <a:p>
+                      <a:pPr algn="ctr" indent="0" marL="0">
+                        <a:buNone/>
+                      </a:pPr>
+                      <a:r>
+                        <a:rPr lang="en-US" sz="1300" b="1" dirty="0">
+                          <a:solidFill>
+                            <a:srgbClr val="2F7A4F"/>
+                          </a:solidFill>
+                          <a:latin typeface="Calibri" pitchFamily="34" charset="0"/>
+                          <a:ea typeface="Calibri" pitchFamily="34" charset="-122"/>
+                          <a:cs typeface="Calibri" pitchFamily="34" charset="-120"/>
+                        </a:rPr>
+                        <a:t>widens with length</a:t>
+                      </a:r>
+                      <a:endParaRPr lang="en-US" sz="1300" dirty="0">
+                        <a:latin typeface="Calibri" charset="0"/>
+                        <a:ea typeface="Calibri" charset="0"/>
+                        <a:cs typeface="Calibri" charset="0"/>
+                      </a:endParaRPr>
+                    </a:p>
+                  </a:txBody>
+                  <a:tcPr marL="91440" marR="91440" marT="45720" marB="45720" anchor="ctr">
+                    <a:lnL w="6350" cap="flat" cmpd="sng" algn="ctr">
+                      <a:solidFill>
+                        <a:srgbClr val="D6DBE8"/>
+                      </a:solidFill>
+                      <a:prstDash val="solid"/>
+                      <a:round/>
+                      <a:headEnd type="none" w="med" len="med"/>
+                      <a:tailEnd type="none" w="med" len="med"/>
+                    </a:lnL>
+                    <a:lnR w="6350" cap="flat" cmpd="sng" algn="ctr">
+                      <a:solidFill>
+                        <a:srgbClr val="D6DBE8"/>
+                      </a:solidFill>
+                      <a:prstDash val="solid"/>
+                      <a:round/>
+                      <a:headEnd type="none" w="med" len="med"/>
+                      <a:tailEnd type="none" w="med" len="med"/>
+                    </a:lnR>
+                    <a:lnT w="6350" cap="flat" cmpd="sng" algn="ctr">
+                      <a:solidFill>
+                        <a:srgbClr val="D6DBE8"/>
+                      </a:solidFill>
+                      <a:prstDash val="solid"/>
+                      <a:round/>
+                      <a:headEnd type="none" w="med" len="med"/>
+                      <a:tailEnd type="none" w="med" len="med"/>
+                    </a:lnT>
+                    <a:lnB w="6350" cap="flat" cmpd="sng" algn="ctr">
+                      <a:solidFill>
+                        <a:srgbClr val="D6DBE8"/>
+                      </a:solidFill>
+                      <a:prstDash val="solid"/>
+                      <a:round/>
+                      <a:headEnd type="none" w="med" len="med"/>
+                      <a:tailEnd type="none" w="med" len="med"/>
+                    </a:lnB>
+                  </a:tcPr>
+                </a:tc>
+              </a:tr>
+            </a:tbl>
+          </a:graphicData>
+        </a:graphic>
+      </p:graphicFrame>
+      <p:sp>
+        <p:nvSpPr>
+          <p:cNvPr id="6" name="Text 3"/>
+          <p:cNvSpPr txBox="1"/>
+          <p:nvPr/>
+        </p:nvSpPr>
+        <p:spPr>
+          <a:xfrm>
+            <a:off x="548640" y="3200400"/>
+            <a:ext cx="11064240" cy="2286000"/>
+          </a:xfrm>
+          <a:prstGeom prst="rect">
+            <a:avLst/>
+          </a:prstGeom>
+          <a:noFill/>
+          <a:ln/>
+        </p:spPr>
+        <p:txBody>
+          <a:bodyPr wrap="square" lIns="0" tIns="0" rIns="0" bIns="0" rtlCol="0" anchor="t"/>
+          <a:lstStyle/>
+          <a:p>
+            <a:pPr marL="342900" indent="-342900">
+              <a:spcAft>
+                <a:spcPts val="900"/>
+              </a:spcAft>
+              <a:buSzPct val="100000"/>
+              <a:buChar char="•"/>
+            </a:pPr>
+            <a:r>
+              <a:rPr lang="en-US" sz="1400" dirty="0">
+                <a:solidFill>
+                  <a:srgbClr val="3B4A7A"/>
+                </a:solidFill>
+                <a:latin typeface="Calibri" pitchFamily="34" charset="0"/>
+                <a:ea typeface="Calibri" pitchFamily="34" charset="-122"/>
+                <a:cs typeface="Calibri" pitchFamily="34" charset="-120"/>
+              </a:rPr>
+              <a:t>Multi30k is image captions: its longest bucket is 21-30 tokens and holds 52 of 1,000 sentences. There is nothing past 30 tokens to bottleneck.</a:t>
+            </a:r>
+            <a:endParaRPr lang="en-US" sz="1400" dirty="0"/>
+          </a:p>
+          <a:p>
+            <a:pPr marL="342900" indent="-342900">
+              <a:spcAft>
+                <a:spcPts val="900"/>
+              </a:spcAft>
+              <a:buSzPct val="100000"/>
+              <a:buChar char="•"/>
+            </a:pPr>
+            <a:r>
+              <a:rPr lang="en-US" sz="1400" dirty="0">
+                <a:solidFill>
+                  <a:srgbClr val="3B4A7A"/>
+                </a:solidFill>
+                <a:latin typeface="Calibri" pitchFamily="34" charset="0"/>
+                <a:ea typeface="Calibri" pitchFamily="34" charset="-122"/>
+                <a:cs typeface="Calibri" pitchFamily="34" charset="-120"/>
+              </a:rPr>
+              <a:t>So its arm-level gain is real, but it is NOT explained by source length — a 13-token caption fits in 2,048 numbers either way.</a:t>
+            </a:r>
+            <a:endParaRPr lang="en-US" sz="1400" dirty="0"/>
+          </a:p>
+          <a:p>
+            <a:pPr marL="342900" indent="-342900">
+              <a:spcAft>
+                <a:spcPts val="900"/>
+              </a:spcAft>
+              <a:buSzPct val="100000"/>
+              <a:buChar char="•"/>
+            </a:pPr>
+            <a:r>
+              <a:rPr lang="en-US" sz="1400" dirty="0">
+                <a:solidFill>
+                  <a:srgbClr val="3B4A7A"/>
+                </a:solidFill>
+                <a:latin typeface="Calibri" pitchFamily="34" charset="0"/>
+                <a:ea typeface="Calibri" pitchFamily="34" charset="-122"/>
+                <a:cs typeface="Calibri" pitchFamily="34" charset="-120"/>
+              </a:rPr>
+              <a:t>WMT'14 reaches 70 tokens, which is the only tier here where a fixed vector is actually under pressure — and there the gain widens monotonically.</a:t>
+            </a:r>
+            <a:endParaRPr lang="en-US" sz="1400" dirty="0"/>
+          </a:p>
+          <a:p>
+            <a:pPr marL="342900" indent="-342900">
+              <a:spcAft>
+                <a:spcPts val="900"/>
+              </a:spcAft>
+              <a:buSzPct val="100000"/>
+              <a:buChar char="•"/>
+            </a:pPr>
+            <a:r>
+              <a:rPr lang="en-US" sz="1400" dirty="0">
+                <a:solidFill>
+                  <a:srgbClr val="3B4A7A"/>
+                </a:solidFill>
+                <a:latin typeface="Calibri" pitchFamily="34" charset="0"/>
+                <a:ea typeface="Calibri" pitchFamily="34" charset="-122"/>
+                <a:cs typeface="Calibri" pitchFamily="34" charset="-120"/>
+              </a:rPr>
+              <a:t>Multi30k still earns its place: 3 seeds and all four cells, so it carries the error bars and the reversal × attention interaction that WMT's single run cannot.</a:t>
+            </a:r>
+            <a:endParaRPr lang="en-US" sz="1400" dirty="0"/>
+          </a:p>
+        </p:txBody>
+      </p:sp>
+      <p:sp>
+        <p:nvSpPr>
+          <p:cNvPr id="7" name="Text 4"/>
+          <p:cNvSpPr txBox="1"/>
+          <p:nvPr/>
+        </p:nvSpPr>
+        <p:spPr>
+          <a:xfrm>
+            <a:off x="548640" y="6199632"/>
+            <a:ext cx="11064240" cy="384048"/>
+          </a:xfrm>
+          <a:prstGeom prst="rect">
+            <a:avLst/>
+          </a:prstGeom>
+          <a:noFill/>
+          <a:ln/>
+        </p:spPr>
+        <p:txBody>
+          <a:bodyPr wrap="square" lIns="0" tIns="0" rIns="0" bIns="0" rtlCol="0" anchor="ctr"/>
+          <a:lstStyle/>
+          <a:p>
+            <a:pPr indent="0" marL="0">
+              <a:buNone/>
+            </a:pPr>
+            <a:r>
+              <a:rPr lang="en-US" sz="1050" i="1" dirty="0">
+                <a:solidFill>
+                  <a:srgbClr val="6B7280"/>
+                </a:solidFill>
+                <a:latin typeface="Calibri" pitchFamily="34" charset="0"/>
+                <a:ea typeface="Calibri" pitchFamily="34" charset="-122"/>
+                <a:cs typeface="Calibri" pitchFamily="34" charset="-120"/>
+              </a:rPr>
+              <a:t>The generator states this verdict itself from the bucket data, rather than leaving a conditional for the reader to resolve favourably.</a:t>
+            </a:r>
+            <a:endParaRPr lang="en-US" sz="1050" dirty="0"/>
+          </a:p>
+        </p:txBody>
+      </p:sp>
+    </p:spTree>
+  </p:cSld>
+  <p:clrMapOvr>
+    <a:masterClrMapping/>
+  </p:clrMapOvr>
+</p:sld>
+</file>
+
+<file path=ppt/slides/slide15.xml><?xml version="1.0" encoding="utf-8"?>
+<p:sld xmlns:a="http://schemas.openxmlformats.org/drawingml/2006/main" xmlns:r="http://schemas.openxmlformats.org/officeDocument/2006/relationships" xmlns:p="http://schemas.openxmlformats.org/presentationml/2006/main">
+  <p:cSld name="Slide 15">
+    <p:spTree>
+      <p:nvGrpSpPr>
+        <p:cNvPr id="1" name=""/>
+        <p:cNvGrpSpPr/>
+        <p:nvPr/>
+      </p:nvGrpSpPr>
+      <p:grpSpPr>
+        <a:xfrm>
+          <a:off x="0" y="0"/>
+          <a:ext cx="0" cy="0"/>
+          <a:chOff x="0" y="0"/>
+          <a:chExt cx="0" cy="0"/>
+        </a:xfrm>
+      </p:grpSpPr>
+      <p:sp>
+        <p:nvSpPr>
+          <p:cNvPr id="2" name="Text 0"/>
+          <p:cNvSpPr txBox="1"/>
+          <p:nvPr/>
+        </p:nvSpPr>
+        <p:spPr>
+          <a:xfrm>
+            <a:off x="548640" y="384048"/>
+            <a:ext cx="11064240" cy="274320"/>
+          </a:xfrm>
+          <a:prstGeom prst="rect">
+            <a:avLst/>
+          </a:prstGeom>
+          <a:noFill/>
+          <a:ln/>
+        </p:spPr>
+        <p:txBody>
+          <a:bodyPr wrap="square" lIns="0" tIns="0" rIns="0" bIns="0" rtlCol="0" anchor="ctr"/>
+          <a:lstStyle/>
+          <a:p>
+            <a:pPr indent="0" marL="0">
+              <a:buNone/>
+            </a:pPr>
+            <a:r>
+              <a:rPr lang="en-US" sz="1200" b="1" spc="120" kern="0" dirty="0">
+                <a:solidFill>
+                  <a:srgbClr val="4C72B0"/>
+                </a:solidFill>
+                <a:latin typeface="Calibri" pitchFamily="34" charset="0"/>
+                <a:ea typeface="Calibri" pitchFamily="34" charset="-122"/>
+                <a:cs typeface="Calibri" pitchFamily="34" charset="-120"/>
+              </a:rPr>
               <a:t>EVIDENCE</a:t>
             </a:r>
             <a:endParaRPr lang="en-US" sz="1200" dirty="0"/>
@@ -6073,9 +7478,9 @@
 </p:sld>
 </file>
 
-<file path=ppt/slides/slide15.xml><?xml version="1.0" encoding="utf-8"?>
+<file path=ppt/slides/slide16.xml><?xml version="1.0" encoding="utf-8"?>
 <p:sld xmlns:a="http://schemas.openxmlformats.org/drawingml/2006/main" xmlns:r="http://schemas.openxmlformats.org/officeDocument/2006/relationships" xmlns:p="http://schemas.openxmlformats.org/presentationml/2006/main">
-  <p:cSld name="Slide 15">
+  <p:cSld name="Slide 16">
     <p:spTree>
       <p:nvGrpSpPr>
         <p:cNvPr id="1" name=""/>
@@ -6170,7 +7575,7 @@
       </p:sp>
       <p:graphicFrame>
         <p:nvGraphicFramePr>
-          <p:cNvPr id="16" name="Table 0"/>
+          <p:cNvPr id="17" name="Table 0"/>
           <p:cNvGraphicFramePr>
             <a:graphicFrameLocks noGrp="1"/>
           </p:cNvGraphicFramePr>
@@ -8575,9 +9980,9 @@
 </p:sld>
 </file>
 
-<file path=ppt/slides/slide16.xml><?xml version="1.0" encoding="utf-8"?>
+<file path=ppt/slides/slide17.xml><?xml version="1.0" encoding="utf-8"?>
 <p:sld xmlns:a="http://schemas.openxmlformats.org/drawingml/2006/main" xmlns:r="http://schemas.openxmlformats.org/officeDocument/2006/relationships" xmlns:p="http://schemas.openxmlformats.org/presentationml/2006/main">
-  <p:cSld name="Slide 16">
+  <p:cSld name="Slide 17">
     <p:spTree>
       <p:nvGrpSpPr>
         <p:cNvPr id="1" name=""/>
@@ -8952,9 +10357,9 @@
 </p:sld>
 </file>
 
-<file path=ppt/slides/slide17.xml><?xml version="1.0" encoding="utf-8"?>
+<file path=ppt/slides/slide18.xml><?xml version="1.0" encoding="utf-8"?>
 <p:sld xmlns:a="http://schemas.openxmlformats.org/drawingml/2006/main" xmlns:r="http://schemas.openxmlformats.org/officeDocument/2006/relationships" xmlns:p="http://schemas.openxmlformats.org/presentationml/2006/main">
-  <p:cSld name="Slide 17">
+  <p:cSld name="Slide 18">
     <p:spTree>
       <p:nvGrpSpPr>
         <p:cNvPr id="1" name=""/>
